--- a/media/compose_slides/build/lipid_programs.pptx
+++ b/media/compose_slides/build/lipid_programs.pptx
@@ -11,9 +11,15 @@
     <p:sldId id="259" r:id="rId5"/>
     <p:sldId id="260" r:id="rId6"/>
     <p:sldId id="261" r:id="rId7"/>
+    <p:sldId id="262" r:id="rId8"/>
+    <p:sldId id="263" r:id="rId9"/>
+    <p:sldId id="264" r:id="rId10"/>
+    <p:sldId id="265" r:id="rId11"/>
+    <p:sldId id="266" r:id="rId12"/>
+    <p:sldId id="267" r:id="rId13"/>
   </p:sldIdLst>
   <p:notesMasterIdLst>
-    <p:notesMasterId r:id="rId8"/>
+    <p:notesMasterId r:id="rId14"/>
   </p:notesMasterIdLst>
   <p:sldSz cx="12192000" cy="6858000"/>
   <p:notesSz cx="6858000" cy="12192000"/>
@@ -549,6 +555,270 @@
 </p:notes>
 </file>
 
+<file path=ppt/notesSlides/notesSlide10.xml><?xml version="1.0" encoding="utf-8"?>
+<p:notes xmlns:a="http://schemas.openxmlformats.org/drawingml/2006/main" xmlns:r="http://schemas.openxmlformats.org/officeDocument/2006/relationships" xmlns:p="http://schemas.openxmlformats.org/presentationml/2006/main">
+  <p:cSld>
+    <p:spTree>
+      <p:nvGrpSpPr>
+        <p:cNvPr id="1" name=""/>
+        <p:cNvGrpSpPr/>
+        <p:nvPr/>
+      </p:nvGrpSpPr>
+      <p:grpSpPr>
+        <a:xfrm>
+          <a:off x="0" y="0"/>
+          <a:ext cx="0" cy="0"/>
+          <a:chOff x="0" y="0"/>
+          <a:chExt cx="0" cy="0"/>
+        </a:xfrm>
+      </p:grpSpPr>
+      <p:sp>
+        <p:nvSpPr>
+          <p:cNvPr id="2" name="Slide Image Placeholder 1"/>
+          <p:cNvSpPr>
+            <a:spLocks noGrp="1" noRot="1" noChangeAspect="1"/>
+          </p:cNvSpPr>
+          <p:nvPr>
+            <p:ph type="sldImg"/>
+          </p:nvPr>
+        </p:nvSpPr>
+        <p:spPr/>
+      </p:sp>
+      <p:sp>
+        <p:nvSpPr>
+          <p:cNvPr id="3" name="Notes Placeholder 2"/>
+          <p:cNvSpPr>
+            <a:spLocks noGrp="1"/>
+          </p:cNvSpPr>
+          <p:nvPr>
+            <p:ph type="body" idx="1"/>
+          </p:nvPr>
+        </p:nvSpPr>
+        <p:spPr/>
+        <p:txBody>
+          <a:bodyPr/>
+          <a:lstStyle/>
+          <a:p>
+            <a:r>
+              <a:rPr lang="en-US" dirty="0"/>
+              <a:t/>
+            </a:r>
+            <a:endParaRPr lang="en-US" dirty="0"/>
+          </a:p>
+        </p:txBody>
+      </p:sp>
+      <p:sp>
+        <p:nvSpPr>
+          <p:cNvPr id="4" name="Slide Number Placeholder 3"/>
+          <p:cNvSpPr>
+            <a:spLocks noGrp="1"/>
+          </p:cNvSpPr>
+          <p:nvPr>
+            <p:ph type="sldNum" sz="quarter" idx="10"/>
+          </p:nvPr>
+        </p:nvSpPr>
+        <p:spPr/>
+        <p:txBody>
+          <a:bodyPr/>
+          <a:lstStyle/>
+          <a:p>
+            <a:fld id="{F7021451-1387-4CA6-816F-3879F97B5CBC}" type="slidenum">
+              <a:rPr lang="en-US"/>
+              <a:t>10</a:t>
+            </a:fld>
+            <a:endParaRPr lang="en-US"/>
+          </a:p>
+        </p:txBody>
+      </p:sp>
+    </p:spTree>
+    <p:extLst>
+      <p:ext uri="{BB962C8B-B14F-4D97-AF65-F5344CB8AC3E}">
+        <p14:creationId xmlns:p14="http://schemas.microsoft.com/office/powerpoint/2010/main" val="1024086991"/>
+      </p:ext>
+    </p:extLst>
+  </p:cSld>
+  <p:clrMapOvr>
+    <a:masterClrMapping/>
+  </p:clrMapOvr>
+</p:notes>
+</file>
+
+<file path=ppt/notesSlides/notesSlide11.xml><?xml version="1.0" encoding="utf-8"?>
+<p:notes xmlns:a="http://schemas.openxmlformats.org/drawingml/2006/main" xmlns:r="http://schemas.openxmlformats.org/officeDocument/2006/relationships" xmlns:p="http://schemas.openxmlformats.org/presentationml/2006/main">
+  <p:cSld>
+    <p:spTree>
+      <p:nvGrpSpPr>
+        <p:cNvPr id="1" name=""/>
+        <p:cNvGrpSpPr/>
+        <p:nvPr/>
+      </p:nvGrpSpPr>
+      <p:grpSpPr>
+        <a:xfrm>
+          <a:off x="0" y="0"/>
+          <a:ext cx="0" cy="0"/>
+          <a:chOff x="0" y="0"/>
+          <a:chExt cx="0" cy="0"/>
+        </a:xfrm>
+      </p:grpSpPr>
+      <p:sp>
+        <p:nvSpPr>
+          <p:cNvPr id="2" name="Slide Image Placeholder 1"/>
+          <p:cNvSpPr>
+            <a:spLocks noGrp="1" noRot="1" noChangeAspect="1"/>
+          </p:cNvSpPr>
+          <p:nvPr>
+            <p:ph type="sldImg"/>
+          </p:nvPr>
+        </p:nvSpPr>
+        <p:spPr/>
+      </p:sp>
+      <p:sp>
+        <p:nvSpPr>
+          <p:cNvPr id="3" name="Notes Placeholder 2"/>
+          <p:cNvSpPr>
+            <a:spLocks noGrp="1"/>
+          </p:cNvSpPr>
+          <p:nvPr>
+            <p:ph type="body" idx="1"/>
+          </p:nvPr>
+        </p:nvSpPr>
+        <p:spPr/>
+        <p:txBody>
+          <a:bodyPr/>
+          <a:lstStyle/>
+          <a:p>
+            <a:r>
+              <a:rPr lang="en-US" dirty="0"/>
+              <a:t/>
+            </a:r>
+            <a:endParaRPr lang="en-US" dirty="0"/>
+          </a:p>
+        </p:txBody>
+      </p:sp>
+      <p:sp>
+        <p:nvSpPr>
+          <p:cNvPr id="4" name="Slide Number Placeholder 3"/>
+          <p:cNvSpPr>
+            <a:spLocks noGrp="1"/>
+          </p:cNvSpPr>
+          <p:nvPr>
+            <p:ph type="sldNum" sz="quarter" idx="10"/>
+          </p:nvPr>
+        </p:nvSpPr>
+        <p:spPr/>
+        <p:txBody>
+          <a:bodyPr/>
+          <a:lstStyle/>
+          <a:p>
+            <a:fld id="{F7021451-1387-4CA6-816F-3879F97B5CBC}" type="slidenum">
+              <a:rPr lang="en-US"/>
+              <a:t>11</a:t>
+            </a:fld>
+            <a:endParaRPr lang="en-US"/>
+          </a:p>
+        </p:txBody>
+      </p:sp>
+    </p:spTree>
+    <p:extLst>
+      <p:ext uri="{BB962C8B-B14F-4D97-AF65-F5344CB8AC3E}">
+        <p14:creationId xmlns:p14="http://schemas.microsoft.com/office/powerpoint/2010/main" val="1024086991"/>
+      </p:ext>
+    </p:extLst>
+  </p:cSld>
+  <p:clrMapOvr>
+    <a:masterClrMapping/>
+  </p:clrMapOvr>
+</p:notes>
+</file>
+
+<file path=ppt/notesSlides/notesSlide12.xml><?xml version="1.0" encoding="utf-8"?>
+<p:notes xmlns:a="http://schemas.openxmlformats.org/drawingml/2006/main" xmlns:r="http://schemas.openxmlformats.org/officeDocument/2006/relationships" xmlns:p="http://schemas.openxmlformats.org/presentationml/2006/main">
+  <p:cSld>
+    <p:spTree>
+      <p:nvGrpSpPr>
+        <p:cNvPr id="1" name=""/>
+        <p:cNvGrpSpPr/>
+        <p:nvPr/>
+      </p:nvGrpSpPr>
+      <p:grpSpPr>
+        <a:xfrm>
+          <a:off x="0" y="0"/>
+          <a:ext cx="0" cy="0"/>
+          <a:chOff x="0" y="0"/>
+          <a:chExt cx="0" cy="0"/>
+        </a:xfrm>
+      </p:grpSpPr>
+      <p:sp>
+        <p:nvSpPr>
+          <p:cNvPr id="2" name="Slide Image Placeholder 1"/>
+          <p:cNvSpPr>
+            <a:spLocks noGrp="1" noRot="1" noChangeAspect="1"/>
+          </p:cNvSpPr>
+          <p:nvPr>
+            <p:ph type="sldImg"/>
+          </p:nvPr>
+        </p:nvSpPr>
+        <p:spPr/>
+      </p:sp>
+      <p:sp>
+        <p:nvSpPr>
+          <p:cNvPr id="3" name="Notes Placeholder 2"/>
+          <p:cNvSpPr>
+            <a:spLocks noGrp="1"/>
+          </p:cNvSpPr>
+          <p:nvPr>
+            <p:ph type="body" idx="1"/>
+          </p:nvPr>
+        </p:nvSpPr>
+        <p:spPr/>
+        <p:txBody>
+          <a:bodyPr/>
+          <a:lstStyle/>
+          <a:p>
+            <a:r>
+              <a:rPr lang="en-US" dirty="0"/>
+              <a:t/>
+            </a:r>
+            <a:endParaRPr lang="en-US" dirty="0"/>
+          </a:p>
+        </p:txBody>
+      </p:sp>
+      <p:sp>
+        <p:nvSpPr>
+          <p:cNvPr id="4" name="Slide Number Placeholder 3"/>
+          <p:cNvSpPr>
+            <a:spLocks noGrp="1"/>
+          </p:cNvSpPr>
+          <p:nvPr>
+            <p:ph type="sldNum" sz="quarter" idx="10"/>
+          </p:nvPr>
+        </p:nvSpPr>
+        <p:spPr/>
+        <p:txBody>
+          <a:bodyPr/>
+          <a:lstStyle/>
+          <a:p>
+            <a:fld id="{F7021451-1387-4CA6-816F-3879F97B5CBC}" type="slidenum">
+              <a:rPr lang="en-US"/>
+              <a:t>12</a:t>
+            </a:fld>
+            <a:endParaRPr lang="en-US"/>
+          </a:p>
+        </p:txBody>
+      </p:sp>
+    </p:spTree>
+    <p:extLst>
+      <p:ext uri="{BB962C8B-B14F-4D97-AF65-F5344CB8AC3E}">
+        <p14:creationId xmlns:p14="http://schemas.microsoft.com/office/powerpoint/2010/main" val="1024086991"/>
+      </p:ext>
+    </p:extLst>
+  </p:cSld>
+  <p:clrMapOvr>
+    <a:masterClrMapping/>
+  </p:clrMapOvr>
+</p:notes>
+</file>
+
 <file path=ppt/notesSlides/notesSlide2.xml><?xml version="1.0" encoding="utf-8"?>
 <p:notes xmlns:a="http://schemas.openxmlformats.org/drawingml/2006/main" xmlns:r="http://schemas.openxmlformats.org/officeDocument/2006/relationships" xmlns:p="http://schemas.openxmlformats.org/presentationml/2006/main">
   <p:cSld>
@@ -971,6 +1241,270 @@
             <a:fld id="{F7021451-1387-4CA6-816F-3879F97B5CBC}" type="slidenum">
               <a:rPr lang="en-US"/>
               <a:t>6</a:t>
+            </a:fld>
+            <a:endParaRPr lang="en-US"/>
+          </a:p>
+        </p:txBody>
+      </p:sp>
+    </p:spTree>
+    <p:extLst>
+      <p:ext uri="{BB962C8B-B14F-4D97-AF65-F5344CB8AC3E}">
+        <p14:creationId xmlns:p14="http://schemas.microsoft.com/office/powerpoint/2010/main" val="1024086991"/>
+      </p:ext>
+    </p:extLst>
+  </p:cSld>
+  <p:clrMapOvr>
+    <a:masterClrMapping/>
+  </p:clrMapOvr>
+</p:notes>
+</file>
+
+<file path=ppt/notesSlides/notesSlide7.xml><?xml version="1.0" encoding="utf-8"?>
+<p:notes xmlns:a="http://schemas.openxmlformats.org/drawingml/2006/main" xmlns:r="http://schemas.openxmlformats.org/officeDocument/2006/relationships" xmlns:p="http://schemas.openxmlformats.org/presentationml/2006/main">
+  <p:cSld>
+    <p:spTree>
+      <p:nvGrpSpPr>
+        <p:cNvPr id="1" name=""/>
+        <p:cNvGrpSpPr/>
+        <p:nvPr/>
+      </p:nvGrpSpPr>
+      <p:grpSpPr>
+        <a:xfrm>
+          <a:off x="0" y="0"/>
+          <a:ext cx="0" cy="0"/>
+          <a:chOff x="0" y="0"/>
+          <a:chExt cx="0" cy="0"/>
+        </a:xfrm>
+      </p:grpSpPr>
+      <p:sp>
+        <p:nvSpPr>
+          <p:cNvPr id="2" name="Slide Image Placeholder 1"/>
+          <p:cNvSpPr>
+            <a:spLocks noGrp="1" noRot="1" noChangeAspect="1"/>
+          </p:cNvSpPr>
+          <p:nvPr>
+            <p:ph type="sldImg"/>
+          </p:nvPr>
+        </p:nvSpPr>
+        <p:spPr/>
+      </p:sp>
+      <p:sp>
+        <p:nvSpPr>
+          <p:cNvPr id="3" name="Notes Placeholder 2"/>
+          <p:cNvSpPr>
+            <a:spLocks noGrp="1"/>
+          </p:cNvSpPr>
+          <p:nvPr>
+            <p:ph type="body" idx="1"/>
+          </p:nvPr>
+        </p:nvSpPr>
+        <p:spPr/>
+        <p:txBody>
+          <a:bodyPr/>
+          <a:lstStyle/>
+          <a:p>
+            <a:r>
+              <a:rPr lang="en-US" dirty="0"/>
+              <a:t/>
+            </a:r>
+            <a:endParaRPr lang="en-US" dirty="0"/>
+          </a:p>
+        </p:txBody>
+      </p:sp>
+      <p:sp>
+        <p:nvSpPr>
+          <p:cNvPr id="4" name="Slide Number Placeholder 3"/>
+          <p:cNvSpPr>
+            <a:spLocks noGrp="1"/>
+          </p:cNvSpPr>
+          <p:nvPr>
+            <p:ph type="sldNum" sz="quarter" idx="10"/>
+          </p:nvPr>
+        </p:nvSpPr>
+        <p:spPr/>
+        <p:txBody>
+          <a:bodyPr/>
+          <a:lstStyle/>
+          <a:p>
+            <a:fld id="{F7021451-1387-4CA6-816F-3879F97B5CBC}" type="slidenum">
+              <a:rPr lang="en-US"/>
+              <a:t>7</a:t>
+            </a:fld>
+            <a:endParaRPr lang="en-US"/>
+          </a:p>
+        </p:txBody>
+      </p:sp>
+    </p:spTree>
+    <p:extLst>
+      <p:ext uri="{BB962C8B-B14F-4D97-AF65-F5344CB8AC3E}">
+        <p14:creationId xmlns:p14="http://schemas.microsoft.com/office/powerpoint/2010/main" val="1024086991"/>
+      </p:ext>
+    </p:extLst>
+  </p:cSld>
+  <p:clrMapOvr>
+    <a:masterClrMapping/>
+  </p:clrMapOvr>
+</p:notes>
+</file>
+
+<file path=ppt/notesSlides/notesSlide8.xml><?xml version="1.0" encoding="utf-8"?>
+<p:notes xmlns:a="http://schemas.openxmlformats.org/drawingml/2006/main" xmlns:r="http://schemas.openxmlformats.org/officeDocument/2006/relationships" xmlns:p="http://schemas.openxmlformats.org/presentationml/2006/main">
+  <p:cSld>
+    <p:spTree>
+      <p:nvGrpSpPr>
+        <p:cNvPr id="1" name=""/>
+        <p:cNvGrpSpPr/>
+        <p:nvPr/>
+      </p:nvGrpSpPr>
+      <p:grpSpPr>
+        <a:xfrm>
+          <a:off x="0" y="0"/>
+          <a:ext cx="0" cy="0"/>
+          <a:chOff x="0" y="0"/>
+          <a:chExt cx="0" cy="0"/>
+        </a:xfrm>
+      </p:grpSpPr>
+      <p:sp>
+        <p:nvSpPr>
+          <p:cNvPr id="2" name="Slide Image Placeholder 1"/>
+          <p:cNvSpPr>
+            <a:spLocks noGrp="1" noRot="1" noChangeAspect="1"/>
+          </p:cNvSpPr>
+          <p:nvPr>
+            <p:ph type="sldImg"/>
+          </p:nvPr>
+        </p:nvSpPr>
+        <p:spPr/>
+      </p:sp>
+      <p:sp>
+        <p:nvSpPr>
+          <p:cNvPr id="3" name="Notes Placeholder 2"/>
+          <p:cNvSpPr>
+            <a:spLocks noGrp="1"/>
+          </p:cNvSpPr>
+          <p:nvPr>
+            <p:ph type="body" idx="1"/>
+          </p:nvPr>
+        </p:nvSpPr>
+        <p:spPr/>
+        <p:txBody>
+          <a:bodyPr/>
+          <a:lstStyle/>
+          <a:p>
+            <a:r>
+              <a:rPr lang="en-US" dirty="0"/>
+              <a:t/>
+            </a:r>
+            <a:endParaRPr lang="en-US" dirty="0"/>
+          </a:p>
+        </p:txBody>
+      </p:sp>
+      <p:sp>
+        <p:nvSpPr>
+          <p:cNvPr id="4" name="Slide Number Placeholder 3"/>
+          <p:cNvSpPr>
+            <a:spLocks noGrp="1"/>
+          </p:cNvSpPr>
+          <p:nvPr>
+            <p:ph type="sldNum" sz="quarter" idx="10"/>
+          </p:nvPr>
+        </p:nvSpPr>
+        <p:spPr/>
+        <p:txBody>
+          <a:bodyPr/>
+          <a:lstStyle/>
+          <a:p>
+            <a:fld id="{F7021451-1387-4CA6-816F-3879F97B5CBC}" type="slidenum">
+              <a:rPr lang="en-US"/>
+              <a:t>8</a:t>
+            </a:fld>
+            <a:endParaRPr lang="en-US"/>
+          </a:p>
+        </p:txBody>
+      </p:sp>
+    </p:spTree>
+    <p:extLst>
+      <p:ext uri="{BB962C8B-B14F-4D97-AF65-F5344CB8AC3E}">
+        <p14:creationId xmlns:p14="http://schemas.microsoft.com/office/powerpoint/2010/main" val="1024086991"/>
+      </p:ext>
+    </p:extLst>
+  </p:cSld>
+  <p:clrMapOvr>
+    <a:masterClrMapping/>
+  </p:clrMapOvr>
+</p:notes>
+</file>
+
+<file path=ppt/notesSlides/notesSlide9.xml><?xml version="1.0" encoding="utf-8"?>
+<p:notes xmlns:a="http://schemas.openxmlformats.org/drawingml/2006/main" xmlns:r="http://schemas.openxmlformats.org/officeDocument/2006/relationships" xmlns:p="http://schemas.openxmlformats.org/presentationml/2006/main">
+  <p:cSld>
+    <p:spTree>
+      <p:nvGrpSpPr>
+        <p:cNvPr id="1" name=""/>
+        <p:cNvGrpSpPr/>
+        <p:nvPr/>
+      </p:nvGrpSpPr>
+      <p:grpSpPr>
+        <a:xfrm>
+          <a:off x="0" y="0"/>
+          <a:ext cx="0" cy="0"/>
+          <a:chOff x="0" y="0"/>
+          <a:chExt cx="0" cy="0"/>
+        </a:xfrm>
+      </p:grpSpPr>
+      <p:sp>
+        <p:nvSpPr>
+          <p:cNvPr id="2" name="Slide Image Placeholder 1"/>
+          <p:cNvSpPr>
+            <a:spLocks noGrp="1" noRot="1" noChangeAspect="1"/>
+          </p:cNvSpPr>
+          <p:nvPr>
+            <p:ph type="sldImg"/>
+          </p:nvPr>
+        </p:nvSpPr>
+        <p:spPr/>
+      </p:sp>
+      <p:sp>
+        <p:nvSpPr>
+          <p:cNvPr id="3" name="Notes Placeholder 2"/>
+          <p:cNvSpPr>
+            <a:spLocks noGrp="1"/>
+          </p:cNvSpPr>
+          <p:nvPr>
+            <p:ph type="body" idx="1"/>
+          </p:nvPr>
+        </p:nvSpPr>
+        <p:spPr/>
+        <p:txBody>
+          <a:bodyPr/>
+          <a:lstStyle/>
+          <a:p>
+            <a:r>
+              <a:rPr lang="en-US" dirty="0"/>
+              <a:t/>
+            </a:r>
+            <a:endParaRPr lang="en-US" dirty="0"/>
+          </a:p>
+        </p:txBody>
+      </p:sp>
+      <p:sp>
+        <p:nvSpPr>
+          <p:cNvPr id="4" name="Slide Number Placeholder 3"/>
+          <p:cNvSpPr>
+            <a:spLocks noGrp="1"/>
+          </p:cNvSpPr>
+          <p:nvPr>
+            <p:ph type="sldNum" sz="quarter" idx="10"/>
+          </p:nvPr>
+        </p:nvSpPr>
+        <p:spPr/>
+        <p:txBody>
+          <a:bodyPr/>
+          <a:lstStyle/>
+          <a:p>
+            <a:fld id="{F7021451-1387-4CA6-816F-3879F97B5CBC}" type="slidenum">
+              <a:rPr lang="en-US"/>
+              <a:t>9</a:t>
             </a:fld>
             <a:endParaRPr lang="en-US"/>
           </a:p>
@@ -1496,6 +2030,3010 @@
 </p:sld>
 </file>
 
+<file path=ppt/slides/slide10.xml><?xml version="1.0" encoding="utf-8"?>
+<p:sld xmlns:a="http://schemas.openxmlformats.org/drawingml/2006/main" xmlns:r="http://schemas.openxmlformats.org/officeDocument/2006/relationships" xmlns:p="http://schemas.openxmlformats.org/presentationml/2006/main">
+  <p:cSld name="Slide 10">
+    <p:bg>
+      <p:bgPr>
+        <a:solidFill>
+          <a:srgbClr val="FFFFFF"/>
+        </a:solidFill>
+      </p:bgPr>
+    </p:bg>
+    <p:spTree>
+      <p:nvGrpSpPr>
+        <p:cNvPr id="1" name=""/>
+        <p:cNvGrpSpPr/>
+        <p:nvPr/>
+      </p:nvGrpSpPr>
+      <p:grpSpPr>
+        <a:xfrm>
+          <a:off x="0" y="0"/>
+          <a:ext cx="0" cy="0"/>
+          <a:chOff x="0" y="0"/>
+          <a:chExt cx="0" cy="0"/>
+        </a:xfrm>
+      </p:grpSpPr>
+      <p:sp>
+        <p:nvSpPr>
+          <p:cNvPr id="2" name="Text 0"/>
+          <p:cNvSpPr txBox="1"/>
+          <p:nvPr/>
+        </p:nvSpPr>
+        <p:spPr>
+          <a:xfrm>
+            <a:off x="685800" y="530352"/>
+            <a:ext cx="10820095" cy="1060704"/>
+          </a:xfrm>
+          <a:prstGeom prst="rect">
+            <a:avLst/>
+          </a:prstGeom>
+          <a:noFill/>
+          <a:ln/>
+        </p:spPr>
+        <p:txBody>
+          <a:bodyPr wrap="square" lIns="0" tIns="0" rIns="0" bIns="0" rtlCol="0" anchor="t"/>
+          <a:lstStyle/>
+          <a:p>
+            <a:pPr indent="0" marL="0">
+              <a:buNone/>
+            </a:pPr>
+            <a:r>
+              <a:rPr lang="en-US" sz="3200" b="1" dirty="0">
+                <a:solidFill>
+                  <a:srgbClr val="1A1D20"/>
+                </a:solidFill>
+                <a:latin typeface="Calibri" pitchFamily="34" charset="0"/>
+                <a:ea typeface="Calibri" pitchFamily="34" charset="-122"/>
+                <a:cs typeface="Calibri" pitchFamily="34" charset="-120"/>
+              </a:rPr>
+              <a:t>Figure 3 — synthesis, formulation and characterisation</a:t>
+            </a:r>
+            <a:endParaRPr lang="en-US" sz="3200" dirty="0"/>
+          </a:p>
+        </p:txBody>
+      </p:sp>
+      <p:sp>
+        <p:nvSpPr>
+          <p:cNvPr id="3" name="Text 1"/>
+          <p:cNvSpPr txBox="1"/>
+          <p:nvPr/>
+        </p:nvSpPr>
+        <p:spPr>
+          <a:xfrm>
+            <a:off x="1261872" y="1481328"/>
+            <a:ext cx="4828032" cy="292608"/>
+          </a:xfrm>
+          <a:prstGeom prst="rect">
+            <a:avLst/>
+          </a:prstGeom>
+          <a:noFill/>
+          <a:ln/>
+        </p:spPr>
+        <p:txBody>
+          <a:bodyPr wrap="square" lIns="0" tIns="0" rIns="0" bIns="0" rtlCol="0" anchor="ctr"/>
+          <a:lstStyle/>
+          <a:p>
+            <a:pPr indent="0" marL="0">
+              <a:buNone/>
+            </a:pPr>
+            <a:r>
+              <a:rPr lang="en-US" sz="1600" b="1" dirty="0">
+                <a:solidFill>
+                  <a:srgbClr val="A9581F"/>
+                </a:solidFill>
+                <a:latin typeface="Calibri" pitchFamily="34" charset="0"/>
+                <a:ea typeface="Calibri" pitchFamily="34" charset="-122"/>
+                <a:cs typeface="Calibri" pitchFamily="34" charset="-120"/>
+              </a:rPr>
+              <a:t>FORGE</a:t>
+            </a:r>
+            <a:endParaRPr lang="en-US" sz="1600" dirty="0"/>
+          </a:p>
+        </p:txBody>
+      </p:sp>
+      <p:sp>
+        <p:nvSpPr>
+          <p:cNvPr id="4" name="Text 2"/>
+          <p:cNvSpPr txBox="1"/>
+          <p:nvPr/>
+        </p:nvSpPr>
+        <p:spPr>
+          <a:xfrm>
+            <a:off x="6419088" y="1481328"/>
+            <a:ext cx="5074920" cy="292608"/>
+          </a:xfrm>
+          <a:prstGeom prst="rect">
+            <a:avLst/>
+          </a:prstGeom>
+          <a:noFill/>
+          <a:ln/>
+        </p:spPr>
+        <p:txBody>
+          <a:bodyPr wrap="square" lIns="0" tIns="0" rIns="0" bIns="0" rtlCol="0" anchor="ctr"/>
+          <a:lstStyle/>
+          <a:p>
+            <a:pPr indent="0" marL="0">
+              <a:buNone/>
+            </a:pPr>
+            <a:r>
+              <a:rPr lang="en-US" sz="1600" b="1" dirty="0">
+                <a:solidFill>
+                  <a:srgbClr val="2F6B73"/>
+                </a:solidFill>
+                <a:latin typeface="Calibri" pitchFamily="34" charset="0"/>
+                <a:ea typeface="Calibri" pitchFamily="34" charset="-122"/>
+                <a:cs typeface="Calibri" pitchFamily="34" charset="-120"/>
+              </a:rPr>
+              <a:t>COMPOSE-Lipid</a:t>
+            </a:r>
+            <a:endParaRPr lang="en-US" sz="1600" dirty="0"/>
+          </a:p>
+        </p:txBody>
+      </p:sp>
+      <p:sp>
+        <p:nvSpPr>
+          <p:cNvPr id="5" name="Shape 3"/>
+          <p:cNvSpPr/>
+          <p:nvPr/>
+        </p:nvSpPr>
+        <p:spPr>
+          <a:xfrm>
+            <a:off x="685800" y="1901952"/>
+            <a:ext cx="10820095" cy="0"/>
+          </a:xfrm>
+          <a:prstGeom prst="line">
+            <a:avLst/>
+          </a:prstGeom>
+          <a:noFill/>
+          <a:ln w="9525">
+            <a:solidFill>
+              <a:srgbClr val="D8DAD9"/>
+            </a:solidFill>
+            <a:prstDash val="solid"/>
+          </a:ln>
+        </p:spPr>
+      </p:sp>
+      <p:sp>
+        <p:nvSpPr>
+          <p:cNvPr id="6" name="Text 4"/>
+          <p:cNvSpPr txBox="1"/>
+          <p:nvPr/>
+        </p:nvSpPr>
+        <p:spPr>
+          <a:xfrm>
+            <a:off x="685800" y="2029968"/>
+            <a:ext cx="384048" cy="365760"/>
+          </a:xfrm>
+          <a:prstGeom prst="rect">
+            <a:avLst/>
+          </a:prstGeom>
+          <a:noFill/>
+          <a:ln/>
+        </p:spPr>
+        <p:txBody>
+          <a:bodyPr wrap="square" lIns="0" tIns="0" rIns="0" bIns="0" rtlCol="0" anchor="ctr"/>
+          <a:lstStyle/>
+          <a:p>
+            <a:pPr indent="0" marL="0">
+              <a:buNone/>
+            </a:pPr>
+            <a:r>
+              <a:rPr lang="en-US" sz="1400" b="1" dirty="0">
+                <a:solidFill>
+                  <a:srgbClr val="8C9094"/>
+                </a:solidFill>
+                <a:latin typeface="Calibri" pitchFamily="34" charset="0"/>
+                <a:ea typeface="Calibri" pitchFamily="34" charset="-122"/>
+                <a:cs typeface="Calibri" pitchFamily="34" charset="-120"/>
+              </a:rPr>
+              <a:t>a</a:t>
+            </a:r>
+            <a:endParaRPr lang="en-US" sz="1400" dirty="0"/>
+          </a:p>
+        </p:txBody>
+      </p:sp>
+      <p:sp>
+        <p:nvSpPr>
+          <p:cNvPr id="7" name="Text 5"/>
+          <p:cNvSpPr txBox="1"/>
+          <p:nvPr/>
+        </p:nvSpPr>
+        <p:spPr>
+          <a:xfrm>
+            <a:off x="1261872" y="2029968"/>
+            <a:ext cx="4828032" cy="365760"/>
+          </a:xfrm>
+          <a:prstGeom prst="rect">
+            <a:avLst/>
+          </a:prstGeom>
+          <a:noFill/>
+          <a:ln/>
+        </p:spPr>
+        <p:txBody>
+          <a:bodyPr wrap="square" lIns="0" tIns="0" rIns="0" bIns="0" rtlCol="0" anchor="ctr"/>
+          <a:lstStyle/>
+          <a:p>
+            <a:pPr indent="0" marL="0">
+              <a:buNone/>
+            </a:pPr>
+            <a:r>
+              <a:rPr lang="en-US" sz="1450" dirty="0">
+                <a:solidFill>
+                  <a:srgbClr val="1A1D20"/>
+                </a:solidFill>
+                <a:latin typeface="Calibri" pitchFamily="34" charset="0"/>
+                <a:ea typeface="Calibri" pitchFamily="34" charset="-122"/>
+                <a:cs typeface="Calibri" pitchFamily="34" charset="-120"/>
+              </a:rPr>
+              <a:t>Ugi-3 route for the selected candidates</a:t>
+            </a:r>
+            <a:endParaRPr lang="en-US" sz="1450" dirty="0"/>
+          </a:p>
+        </p:txBody>
+      </p:sp>
+      <p:sp>
+        <p:nvSpPr>
+          <p:cNvPr id="8" name="Text 6"/>
+          <p:cNvSpPr txBox="1"/>
+          <p:nvPr/>
+        </p:nvSpPr>
+        <p:spPr>
+          <a:xfrm>
+            <a:off x="6419088" y="2029968"/>
+            <a:ext cx="5074920" cy="365760"/>
+          </a:xfrm>
+          <a:prstGeom prst="rect">
+            <a:avLst/>
+          </a:prstGeom>
+          <a:noFill/>
+          <a:ln/>
+        </p:spPr>
+        <p:txBody>
+          <a:bodyPr wrap="square" lIns="0" tIns="0" rIns="0" bIns="0" rtlCol="0" anchor="ctr"/>
+          <a:lstStyle/>
+          <a:p>
+            <a:pPr indent="0" marL="0">
+              <a:buNone/>
+            </a:pPr>
+            <a:r>
+              <a:rPr lang="en-US" sz="1450" dirty="0">
+                <a:solidFill>
+                  <a:srgbClr val="1A1D20"/>
+                </a:solidFill>
+                <a:latin typeface="Calibri" pitchFamily="34" charset="0"/>
+                <a:ea typeface="Calibri" pitchFamily="34" charset="-122"/>
+                <a:cs typeface="Calibri" pitchFamily="34" charset="-120"/>
+              </a:rPr>
+              <a:t>Route development for the novel linker scaffolds</a:t>
+            </a:r>
+            <a:endParaRPr lang="en-US" sz="1450" dirty="0"/>
+          </a:p>
+        </p:txBody>
+      </p:sp>
+      <p:sp>
+        <p:nvSpPr>
+          <p:cNvPr id="9" name="Shape 7"/>
+          <p:cNvSpPr/>
+          <p:nvPr/>
+        </p:nvSpPr>
+        <p:spPr>
+          <a:xfrm>
+            <a:off x="685800" y="2505456"/>
+            <a:ext cx="10820095" cy="0"/>
+          </a:xfrm>
+          <a:prstGeom prst="line">
+            <a:avLst/>
+          </a:prstGeom>
+          <a:noFill/>
+          <a:ln w="9525">
+            <a:solidFill>
+              <a:srgbClr val="D8DAD9"/>
+            </a:solidFill>
+            <a:prstDash val="solid"/>
+          </a:ln>
+        </p:spPr>
+      </p:sp>
+      <p:sp>
+        <p:nvSpPr>
+          <p:cNvPr id="10" name="Text 8"/>
+          <p:cNvSpPr txBox="1"/>
+          <p:nvPr/>
+        </p:nvSpPr>
+        <p:spPr>
+          <a:xfrm>
+            <a:off x="685800" y="2633472"/>
+            <a:ext cx="384048" cy="365760"/>
+          </a:xfrm>
+          <a:prstGeom prst="rect">
+            <a:avLst/>
+          </a:prstGeom>
+          <a:noFill/>
+          <a:ln/>
+        </p:spPr>
+        <p:txBody>
+          <a:bodyPr wrap="square" lIns="0" tIns="0" rIns="0" bIns="0" rtlCol="0" anchor="ctr"/>
+          <a:lstStyle/>
+          <a:p>
+            <a:pPr indent="0" marL="0">
+              <a:buNone/>
+            </a:pPr>
+            <a:r>
+              <a:rPr lang="en-US" sz="1400" b="1" dirty="0">
+                <a:solidFill>
+                  <a:srgbClr val="8C9094"/>
+                </a:solidFill>
+                <a:latin typeface="Calibri" pitchFamily="34" charset="0"/>
+                <a:ea typeface="Calibri" pitchFamily="34" charset="-122"/>
+                <a:cs typeface="Calibri" pitchFamily="34" charset="-120"/>
+              </a:rPr>
+              <a:t>b</a:t>
+            </a:r>
+            <a:endParaRPr lang="en-US" sz="1400" dirty="0"/>
+          </a:p>
+        </p:txBody>
+      </p:sp>
+      <p:sp>
+        <p:nvSpPr>
+          <p:cNvPr id="11" name="Text 9"/>
+          <p:cNvSpPr txBox="1"/>
+          <p:nvPr/>
+        </p:nvSpPr>
+        <p:spPr>
+          <a:xfrm>
+            <a:off x="1261872" y="2633472"/>
+            <a:ext cx="10232136" cy="365760"/>
+          </a:xfrm>
+          <a:prstGeom prst="rect">
+            <a:avLst/>
+          </a:prstGeom>
+          <a:noFill/>
+          <a:ln/>
+        </p:spPr>
+        <p:txBody>
+          <a:bodyPr wrap="square" lIns="0" tIns="0" rIns="0" bIns="0" rtlCol="0" anchor="ctr"/>
+          <a:lstStyle/>
+          <a:p>
+            <a:pPr indent="0" marL="0">
+              <a:buNone/>
+            </a:pPr>
+            <a:r>
+              <a:rPr lang="en-US" sz="1450" dirty="0">
+                <a:solidFill>
+                  <a:srgbClr val="1A1D20"/>
+                </a:solidFill>
+                <a:latin typeface="Calibri" pitchFamily="34" charset="0"/>
+                <a:ea typeface="Calibri" pitchFamily="34" charset="-122"/>
+                <a:cs typeface="Calibri" pitchFamily="34" charset="-120"/>
+              </a:rPr>
+              <a:t>Identity and purity confirmation</a:t>
+            </a:r>
+            <a:endParaRPr lang="en-US" sz="1450" dirty="0"/>
+          </a:p>
+        </p:txBody>
+      </p:sp>
+      <p:sp>
+        <p:nvSpPr>
+          <p:cNvPr id="12" name="Shape 10"/>
+          <p:cNvSpPr/>
+          <p:nvPr/>
+        </p:nvSpPr>
+        <p:spPr>
+          <a:xfrm>
+            <a:off x="685800" y="3108960"/>
+            <a:ext cx="10820095" cy="0"/>
+          </a:xfrm>
+          <a:prstGeom prst="line">
+            <a:avLst/>
+          </a:prstGeom>
+          <a:noFill/>
+          <a:ln w="9525">
+            <a:solidFill>
+              <a:srgbClr val="D8DAD9"/>
+            </a:solidFill>
+            <a:prstDash val="solid"/>
+          </a:ln>
+        </p:spPr>
+      </p:sp>
+      <p:sp>
+        <p:nvSpPr>
+          <p:cNvPr id="13" name="Text 11"/>
+          <p:cNvSpPr txBox="1"/>
+          <p:nvPr/>
+        </p:nvSpPr>
+        <p:spPr>
+          <a:xfrm>
+            <a:off x="685800" y="3236976"/>
+            <a:ext cx="384048" cy="365760"/>
+          </a:xfrm>
+          <a:prstGeom prst="rect">
+            <a:avLst/>
+          </a:prstGeom>
+          <a:noFill/>
+          <a:ln/>
+        </p:spPr>
+        <p:txBody>
+          <a:bodyPr wrap="square" lIns="0" tIns="0" rIns="0" bIns="0" rtlCol="0" anchor="ctr"/>
+          <a:lstStyle/>
+          <a:p>
+            <a:pPr indent="0" marL="0">
+              <a:buNone/>
+            </a:pPr>
+            <a:r>
+              <a:rPr lang="en-US" sz="1400" b="1" dirty="0">
+                <a:solidFill>
+                  <a:srgbClr val="8C9094"/>
+                </a:solidFill>
+                <a:latin typeface="Calibri" pitchFamily="34" charset="0"/>
+                <a:ea typeface="Calibri" pitchFamily="34" charset="-122"/>
+                <a:cs typeface="Calibri" pitchFamily="34" charset="-120"/>
+              </a:rPr>
+              <a:t>c</a:t>
+            </a:r>
+            <a:endParaRPr lang="en-US" sz="1400" dirty="0"/>
+          </a:p>
+        </p:txBody>
+      </p:sp>
+      <p:sp>
+        <p:nvSpPr>
+          <p:cNvPr id="14" name="Text 12"/>
+          <p:cNvSpPr txBox="1"/>
+          <p:nvPr/>
+        </p:nvSpPr>
+        <p:spPr>
+          <a:xfrm>
+            <a:off x="1261872" y="3236976"/>
+            <a:ext cx="10232136" cy="365760"/>
+          </a:xfrm>
+          <a:prstGeom prst="rect">
+            <a:avLst/>
+          </a:prstGeom>
+          <a:noFill/>
+          <a:ln/>
+        </p:spPr>
+        <p:txBody>
+          <a:bodyPr wrap="square" lIns="0" tIns="0" rIns="0" bIns="0" rtlCol="0" anchor="ctr"/>
+          <a:lstStyle/>
+          <a:p>
+            <a:pPr indent="0" marL="0">
+              <a:buNone/>
+            </a:pPr>
+            <a:r>
+              <a:rPr lang="en-US" sz="1450" dirty="0">
+                <a:solidFill>
+                  <a:srgbClr val="1A1D20"/>
+                </a:solidFill>
+                <a:latin typeface="Calibri" pitchFamily="34" charset="0"/>
+                <a:ea typeface="Calibri" pitchFamily="34" charset="-122"/>
+                <a:cs typeface="Calibri" pitchFamily="34" charset="-120"/>
+              </a:rPr>
+              <a:t>LNP formulation: components and ratios</a:t>
+            </a:r>
+            <a:endParaRPr lang="en-US" sz="1450" dirty="0"/>
+          </a:p>
+        </p:txBody>
+      </p:sp>
+      <p:sp>
+        <p:nvSpPr>
+          <p:cNvPr id="15" name="Shape 13"/>
+          <p:cNvSpPr/>
+          <p:nvPr/>
+        </p:nvSpPr>
+        <p:spPr>
+          <a:xfrm>
+            <a:off x="685800" y="3712464"/>
+            <a:ext cx="10820095" cy="0"/>
+          </a:xfrm>
+          <a:prstGeom prst="line">
+            <a:avLst/>
+          </a:prstGeom>
+          <a:noFill/>
+          <a:ln w="9525">
+            <a:solidFill>
+              <a:srgbClr val="D8DAD9"/>
+            </a:solidFill>
+            <a:prstDash val="solid"/>
+          </a:ln>
+        </p:spPr>
+      </p:sp>
+      <p:sp>
+        <p:nvSpPr>
+          <p:cNvPr id="16" name="Text 14"/>
+          <p:cNvSpPr txBox="1"/>
+          <p:nvPr/>
+        </p:nvSpPr>
+        <p:spPr>
+          <a:xfrm>
+            <a:off x="685800" y="3840480"/>
+            <a:ext cx="384048" cy="365760"/>
+          </a:xfrm>
+          <a:prstGeom prst="rect">
+            <a:avLst/>
+          </a:prstGeom>
+          <a:noFill/>
+          <a:ln/>
+        </p:spPr>
+        <p:txBody>
+          <a:bodyPr wrap="square" lIns="0" tIns="0" rIns="0" bIns="0" rtlCol="0" anchor="ctr"/>
+          <a:lstStyle/>
+          <a:p>
+            <a:pPr indent="0" marL="0">
+              <a:buNone/>
+            </a:pPr>
+            <a:r>
+              <a:rPr lang="en-US" sz="1400" b="1" dirty="0">
+                <a:solidFill>
+                  <a:srgbClr val="8C9094"/>
+                </a:solidFill>
+                <a:latin typeface="Calibri" pitchFamily="34" charset="0"/>
+                <a:ea typeface="Calibri" pitchFamily="34" charset="-122"/>
+                <a:cs typeface="Calibri" pitchFamily="34" charset="-120"/>
+              </a:rPr>
+              <a:t>d</a:t>
+            </a:r>
+            <a:endParaRPr lang="en-US" sz="1400" dirty="0"/>
+          </a:p>
+        </p:txBody>
+      </p:sp>
+      <p:sp>
+        <p:nvSpPr>
+          <p:cNvPr id="17" name="Text 15"/>
+          <p:cNvSpPr txBox="1"/>
+          <p:nvPr/>
+        </p:nvSpPr>
+        <p:spPr>
+          <a:xfrm>
+            <a:off x="1261872" y="3840480"/>
+            <a:ext cx="10232136" cy="365760"/>
+          </a:xfrm>
+          <a:prstGeom prst="rect">
+            <a:avLst/>
+          </a:prstGeom>
+          <a:noFill/>
+          <a:ln/>
+        </p:spPr>
+        <p:txBody>
+          <a:bodyPr wrap="square" lIns="0" tIns="0" rIns="0" bIns="0" rtlCol="0" anchor="ctr"/>
+          <a:lstStyle/>
+          <a:p>
+            <a:pPr indent="0" marL="0">
+              <a:buNone/>
+            </a:pPr>
+            <a:r>
+              <a:rPr lang="en-US" sz="1450" dirty="0">
+                <a:solidFill>
+                  <a:srgbClr val="1A1D20"/>
+                </a:solidFill>
+                <a:latin typeface="Calibri" pitchFamily="34" charset="0"/>
+                <a:ea typeface="Calibri" pitchFamily="34" charset="-122"/>
+                <a:cs typeface="Calibri" pitchFamily="34" charset="-120"/>
+              </a:rPr>
+              <a:t>Size, polydispersity and surface charge</a:t>
+            </a:r>
+            <a:endParaRPr lang="en-US" sz="1450" dirty="0"/>
+          </a:p>
+        </p:txBody>
+      </p:sp>
+      <p:sp>
+        <p:nvSpPr>
+          <p:cNvPr id="18" name="Shape 16"/>
+          <p:cNvSpPr/>
+          <p:nvPr/>
+        </p:nvSpPr>
+        <p:spPr>
+          <a:xfrm>
+            <a:off x="685800" y="4315968"/>
+            <a:ext cx="10820095" cy="0"/>
+          </a:xfrm>
+          <a:prstGeom prst="line">
+            <a:avLst/>
+          </a:prstGeom>
+          <a:noFill/>
+          <a:ln w="9525">
+            <a:solidFill>
+              <a:srgbClr val="D8DAD9"/>
+            </a:solidFill>
+            <a:prstDash val="solid"/>
+          </a:ln>
+        </p:spPr>
+      </p:sp>
+      <p:sp>
+        <p:nvSpPr>
+          <p:cNvPr id="19" name="Text 17"/>
+          <p:cNvSpPr txBox="1"/>
+          <p:nvPr/>
+        </p:nvSpPr>
+        <p:spPr>
+          <a:xfrm>
+            <a:off x="685800" y="4443984"/>
+            <a:ext cx="384048" cy="365760"/>
+          </a:xfrm>
+          <a:prstGeom prst="rect">
+            <a:avLst/>
+          </a:prstGeom>
+          <a:noFill/>
+          <a:ln/>
+        </p:spPr>
+        <p:txBody>
+          <a:bodyPr wrap="square" lIns="0" tIns="0" rIns="0" bIns="0" rtlCol="0" anchor="ctr"/>
+          <a:lstStyle/>
+          <a:p>
+            <a:pPr indent="0" marL="0">
+              <a:buNone/>
+            </a:pPr>
+            <a:r>
+              <a:rPr lang="en-US" sz="1400" b="1" dirty="0">
+                <a:solidFill>
+                  <a:srgbClr val="8C9094"/>
+                </a:solidFill>
+                <a:latin typeface="Calibri" pitchFamily="34" charset="0"/>
+                <a:ea typeface="Calibri" pitchFamily="34" charset="-122"/>
+                <a:cs typeface="Calibri" pitchFamily="34" charset="-120"/>
+              </a:rPr>
+              <a:t>e</a:t>
+            </a:r>
+            <a:endParaRPr lang="en-US" sz="1400" dirty="0"/>
+          </a:p>
+        </p:txBody>
+      </p:sp>
+      <p:sp>
+        <p:nvSpPr>
+          <p:cNvPr id="20" name="Text 18"/>
+          <p:cNvSpPr txBox="1"/>
+          <p:nvPr/>
+        </p:nvSpPr>
+        <p:spPr>
+          <a:xfrm>
+            <a:off x="1261872" y="4443984"/>
+            <a:ext cx="10232136" cy="365760"/>
+          </a:xfrm>
+          <a:prstGeom prst="rect">
+            <a:avLst/>
+          </a:prstGeom>
+          <a:noFill/>
+          <a:ln/>
+        </p:spPr>
+        <p:txBody>
+          <a:bodyPr wrap="square" lIns="0" tIns="0" rIns="0" bIns="0" rtlCol="0" anchor="ctr"/>
+          <a:lstStyle/>
+          <a:p>
+            <a:pPr indent="0" marL="0">
+              <a:buNone/>
+            </a:pPr>
+            <a:r>
+              <a:rPr lang="en-US" sz="1450" dirty="0">
+                <a:solidFill>
+                  <a:srgbClr val="1A1D20"/>
+                </a:solidFill>
+                <a:latin typeface="Calibri" pitchFamily="34" charset="0"/>
+                <a:ea typeface="Calibri" pitchFamily="34" charset="-122"/>
+                <a:cs typeface="Calibri" pitchFamily="34" charset="-120"/>
+              </a:rPr>
+              <a:t>Encapsulation efficiency</a:t>
+            </a:r>
+            <a:endParaRPr lang="en-US" sz="1450" dirty="0"/>
+          </a:p>
+        </p:txBody>
+      </p:sp>
+      <p:sp>
+        <p:nvSpPr>
+          <p:cNvPr id="21" name="Shape 19"/>
+          <p:cNvSpPr/>
+          <p:nvPr/>
+        </p:nvSpPr>
+        <p:spPr>
+          <a:xfrm>
+            <a:off x="685800" y="4919472"/>
+            <a:ext cx="10820095" cy="0"/>
+          </a:xfrm>
+          <a:prstGeom prst="line">
+            <a:avLst/>
+          </a:prstGeom>
+          <a:noFill/>
+          <a:ln w="9525">
+            <a:solidFill>
+              <a:srgbClr val="D8DAD9"/>
+            </a:solidFill>
+            <a:prstDash val="solid"/>
+          </a:ln>
+        </p:spPr>
+      </p:sp>
+      <p:sp>
+        <p:nvSpPr>
+          <p:cNvPr id="22" name="Text 20"/>
+          <p:cNvSpPr txBox="1"/>
+          <p:nvPr/>
+        </p:nvSpPr>
+        <p:spPr>
+          <a:xfrm>
+            <a:off x="685800" y="5047488"/>
+            <a:ext cx="384048" cy="365760"/>
+          </a:xfrm>
+          <a:prstGeom prst="rect">
+            <a:avLst/>
+          </a:prstGeom>
+          <a:noFill/>
+          <a:ln/>
+        </p:spPr>
+        <p:txBody>
+          <a:bodyPr wrap="square" lIns="0" tIns="0" rIns="0" bIns="0" rtlCol="0" anchor="ctr"/>
+          <a:lstStyle/>
+          <a:p>
+            <a:pPr indent="0" marL="0">
+              <a:buNone/>
+            </a:pPr>
+            <a:r>
+              <a:rPr lang="en-US" sz="1400" b="1" dirty="0">
+                <a:solidFill>
+                  <a:srgbClr val="8C9094"/>
+                </a:solidFill>
+                <a:latin typeface="Calibri" pitchFamily="34" charset="0"/>
+                <a:ea typeface="Calibri" pitchFamily="34" charset="-122"/>
+                <a:cs typeface="Calibri" pitchFamily="34" charset="-120"/>
+              </a:rPr>
+              <a:t>f</a:t>
+            </a:r>
+            <a:endParaRPr lang="en-US" sz="1400" dirty="0"/>
+          </a:p>
+        </p:txBody>
+      </p:sp>
+      <p:sp>
+        <p:nvSpPr>
+          <p:cNvPr id="23" name="Text 21"/>
+          <p:cNvSpPr txBox="1"/>
+          <p:nvPr/>
+        </p:nvSpPr>
+        <p:spPr>
+          <a:xfrm>
+            <a:off x="1261872" y="5047488"/>
+            <a:ext cx="10232136" cy="365760"/>
+          </a:xfrm>
+          <a:prstGeom prst="rect">
+            <a:avLst/>
+          </a:prstGeom>
+          <a:noFill/>
+          <a:ln/>
+        </p:spPr>
+        <p:txBody>
+          <a:bodyPr wrap="square" lIns="0" tIns="0" rIns="0" bIns="0" rtlCol="0" anchor="ctr"/>
+          <a:lstStyle/>
+          <a:p>
+            <a:pPr indent="0" marL="0">
+              <a:buNone/>
+            </a:pPr>
+            <a:r>
+              <a:rPr lang="en-US" sz="1450" dirty="0">
+                <a:solidFill>
+                  <a:srgbClr val="1A1D20"/>
+                </a:solidFill>
+                <a:latin typeface="Calibri" pitchFamily="34" charset="0"/>
+                <a:ea typeface="Calibri" pitchFamily="34" charset="-122"/>
+                <a:cs typeface="Calibri" pitchFamily="34" charset="-120"/>
+              </a:rPr>
+              <a:t>Apparent pKa</a:t>
+            </a:r>
+            <a:endParaRPr lang="en-US" sz="1450" dirty="0"/>
+          </a:p>
+        </p:txBody>
+      </p:sp>
+      <p:sp>
+        <p:nvSpPr>
+          <p:cNvPr id="24" name="Shape 22"/>
+          <p:cNvSpPr/>
+          <p:nvPr/>
+        </p:nvSpPr>
+        <p:spPr>
+          <a:xfrm>
+            <a:off x="685800" y="5522976"/>
+            <a:ext cx="10820095" cy="0"/>
+          </a:xfrm>
+          <a:prstGeom prst="line">
+            <a:avLst/>
+          </a:prstGeom>
+          <a:noFill/>
+          <a:ln w="9525">
+            <a:solidFill>
+              <a:srgbClr val="D8DAD9"/>
+            </a:solidFill>
+            <a:prstDash val="solid"/>
+          </a:ln>
+        </p:spPr>
+      </p:sp>
+      <p:sp>
+        <p:nvSpPr>
+          <p:cNvPr id="25" name="Text 23"/>
+          <p:cNvSpPr txBox="1"/>
+          <p:nvPr/>
+        </p:nvSpPr>
+        <p:spPr>
+          <a:xfrm>
+            <a:off x="685800" y="5815584"/>
+            <a:ext cx="10607040" cy="512064"/>
+          </a:xfrm>
+          <a:prstGeom prst="rect">
+            <a:avLst/>
+          </a:prstGeom>
+          <a:noFill/>
+          <a:ln/>
+        </p:spPr>
+        <p:txBody>
+          <a:bodyPr wrap="square" lIns="0" tIns="0" rIns="0" bIns="0" rtlCol="0" anchor="t"/>
+          <a:lstStyle/>
+          <a:p>
+            <a:pPr indent="0" marL="0">
+              <a:lnSpc>
+                <a:spcPct val="115000"/>
+              </a:lnSpc>
+              <a:buNone/>
+            </a:pPr>
+            <a:r>
+              <a:rPr lang="en-US" sz="1250" dirty="0">
+                <a:solidFill>
+                  <a:srgbClr val="8C9094"/>
+                </a:solidFill>
+                <a:latin typeface="Calibri" pitchFamily="34" charset="0"/>
+                <a:ea typeface="Calibri" pitchFamily="34" charset="-122"/>
+                <a:cs typeface="Calibri" pitchFamily="34" charset="-120"/>
+              </a:rPr>
+              <a:t>Only panel a differs between the programmes: a known route against one that has to be developed for a new scaffold.</a:t>
+            </a:r>
+            <a:endParaRPr lang="en-US" sz="1250" dirty="0"/>
+          </a:p>
+        </p:txBody>
+      </p:sp>
+    </p:spTree>
+  </p:cSld>
+  <p:clrMapOvr>
+    <a:masterClrMapping/>
+  </p:clrMapOvr>
+</p:sld>
+</file>
+
+<file path=ppt/slides/slide11.xml><?xml version="1.0" encoding="utf-8"?>
+<p:sld xmlns:a="http://schemas.openxmlformats.org/drawingml/2006/main" xmlns:r="http://schemas.openxmlformats.org/officeDocument/2006/relationships" xmlns:p="http://schemas.openxmlformats.org/presentationml/2006/main">
+  <p:cSld name="Slide 11">
+    <p:bg>
+      <p:bgPr>
+        <a:solidFill>
+          <a:srgbClr val="FFFFFF"/>
+        </a:solidFill>
+      </p:bgPr>
+    </p:bg>
+    <p:spTree>
+      <p:nvGrpSpPr>
+        <p:cNvPr id="1" name=""/>
+        <p:cNvGrpSpPr/>
+        <p:nvPr/>
+      </p:nvGrpSpPr>
+      <p:grpSpPr>
+        <a:xfrm>
+          <a:off x="0" y="0"/>
+          <a:ext cx="0" cy="0"/>
+          <a:chOff x="0" y="0"/>
+          <a:chExt cx="0" cy="0"/>
+        </a:xfrm>
+      </p:grpSpPr>
+      <p:sp>
+        <p:nvSpPr>
+          <p:cNvPr id="2" name="Text 0"/>
+          <p:cNvSpPr txBox="1"/>
+          <p:nvPr/>
+        </p:nvSpPr>
+        <p:spPr>
+          <a:xfrm>
+            <a:off x="685800" y="530352"/>
+            <a:ext cx="10820095" cy="1060704"/>
+          </a:xfrm>
+          <a:prstGeom prst="rect">
+            <a:avLst/>
+          </a:prstGeom>
+          <a:noFill/>
+          <a:ln/>
+        </p:spPr>
+        <p:txBody>
+          <a:bodyPr wrap="square" lIns="0" tIns="0" rIns="0" bIns="0" rtlCol="0" anchor="t"/>
+          <a:lstStyle/>
+          <a:p>
+            <a:pPr indent="0" marL="0">
+              <a:buNone/>
+            </a:pPr>
+            <a:r>
+              <a:rPr lang="en-US" sz="3200" b="1" dirty="0">
+                <a:solidFill>
+                  <a:srgbClr val="1A1D20"/>
+                </a:solidFill>
+                <a:latin typeface="Calibri" pitchFamily="34" charset="0"/>
+                <a:ea typeface="Calibri" pitchFamily="34" charset="-122"/>
+                <a:cs typeface="Calibri" pitchFamily="34" charset="-120"/>
+              </a:rPr>
+              <a:t>Figure 4 — in vitro and in vivo reporter</a:t>
+            </a:r>
+            <a:endParaRPr lang="en-US" sz="3200" dirty="0"/>
+          </a:p>
+        </p:txBody>
+      </p:sp>
+      <p:sp>
+        <p:nvSpPr>
+          <p:cNvPr id="3" name="Text 1"/>
+          <p:cNvSpPr txBox="1"/>
+          <p:nvPr/>
+        </p:nvSpPr>
+        <p:spPr>
+          <a:xfrm>
+            <a:off x="1261872" y="1481328"/>
+            <a:ext cx="4828032" cy="292608"/>
+          </a:xfrm>
+          <a:prstGeom prst="rect">
+            <a:avLst/>
+          </a:prstGeom>
+          <a:noFill/>
+          <a:ln/>
+        </p:spPr>
+        <p:txBody>
+          <a:bodyPr wrap="square" lIns="0" tIns="0" rIns="0" bIns="0" rtlCol="0" anchor="ctr"/>
+          <a:lstStyle/>
+          <a:p>
+            <a:pPr indent="0" marL="0">
+              <a:buNone/>
+            </a:pPr>
+            <a:r>
+              <a:rPr lang="en-US" sz="1600" b="1" dirty="0">
+                <a:solidFill>
+                  <a:srgbClr val="A9581F"/>
+                </a:solidFill>
+                <a:latin typeface="Calibri" pitchFamily="34" charset="0"/>
+                <a:ea typeface="Calibri" pitchFamily="34" charset="-122"/>
+                <a:cs typeface="Calibri" pitchFamily="34" charset="-120"/>
+              </a:rPr>
+              <a:t>FORGE</a:t>
+            </a:r>
+            <a:endParaRPr lang="en-US" sz="1600" dirty="0"/>
+          </a:p>
+        </p:txBody>
+      </p:sp>
+      <p:sp>
+        <p:nvSpPr>
+          <p:cNvPr id="4" name="Text 2"/>
+          <p:cNvSpPr txBox="1"/>
+          <p:nvPr/>
+        </p:nvSpPr>
+        <p:spPr>
+          <a:xfrm>
+            <a:off x="6419088" y="1481328"/>
+            <a:ext cx="5074920" cy="292608"/>
+          </a:xfrm>
+          <a:prstGeom prst="rect">
+            <a:avLst/>
+          </a:prstGeom>
+          <a:noFill/>
+          <a:ln/>
+        </p:spPr>
+        <p:txBody>
+          <a:bodyPr wrap="square" lIns="0" tIns="0" rIns="0" bIns="0" rtlCol="0" anchor="ctr"/>
+          <a:lstStyle/>
+          <a:p>
+            <a:pPr indent="0" marL="0">
+              <a:buNone/>
+            </a:pPr>
+            <a:r>
+              <a:rPr lang="en-US" sz="1600" b="1" dirty="0">
+                <a:solidFill>
+                  <a:srgbClr val="2F6B73"/>
+                </a:solidFill>
+                <a:latin typeface="Calibri" pitchFamily="34" charset="0"/>
+                <a:ea typeface="Calibri" pitchFamily="34" charset="-122"/>
+                <a:cs typeface="Calibri" pitchFamily="34" charset="-120"/>
+              </a:rPr>
+              <a:t>COMPOSE-Lipid</a:t>
+            </a:r>
+            <a:endParaRPr lang="en-US" sz="1600" dirty="0"/>
+          </a:p>
+        </p:txBody>
+      </p:sp>
+      <p:sp>
+        <p:nvSpPr>
+          <p:cNvPr id="5" name="Shape 3"/>
+          <p:cNvSpPr/>
+          <p:nvPr/>
+        </p:nvSpPr>
+        <p:spPr>
+          <a:xfrm>
+            <a:off x="685800" y="1901952"/>
+            <a:ext cx="10820095" cy="0"/>
+          </a:xfrm>
+          <a:prstGeom prst="line">
+            <a:avLst/>
+          </a:prstGeom>
+          <a:noFill/>
+          <a:ln w="9525">
+            <a:solidFill>
+              <a:srgbClr val="D8DAD9"/>
+            </a:solidFill>
+            <a:prstDash val="solid"/>
+          </a:ln>
+        </p:spPr>
+      </p:sp>
+      <p:sp>
+        <p:nvSpPr>
+          <p:cNvPr id="6" name="Text 4"/>
+          <p:cNvSpPr txBox="1"/>
+          <p:nvPr/>
+        </p:nvSpPr>
+        <p:spPr>
+          <a:xfrm>
+            <a:off x="685800" y="2029968"/>
+            <a:ext cx="384048" cy="365760"/>
+          </a:xfrm>
+          <a:prstGeom prst="rect">
+            <a:avLst/>
+          </a:prstGeom>
+          <a:noFill/>
+          <a:ln/>
+        </p:spPr>
+        <p:txBody>
+          <a:bodyPr wrap="square" lIns="0" tIns="0" rIns="0" bIns="0" rtlCol="0" anchor="ctr"/>
+          <a:lstStyle/>
+          <a:p>
+            <a:pPr indent="0" marL="0">
+              <a:buNone/>
+            </a:pPr>
+            <a:r>
+              <a:rPr lang="en-US" sz="1400" b="1" dirty="0">
+                <a:solidFill>
+                  <a:srgbClr val="8C9094"/>
+                </a:solidFill>
+                <a:latin typeface="Calibri" pitchFamily="34" charset="0"/>
+                <a:ea typeface="Calibri" pitchFamily="34" charset="-122"/>
+                <a:cs typeface="Calibri" pitchFamily="34" charset="-120"/>
+              </a:rPr>
+              <a:t>a</a:t>
+            </a:r>
+            <a:endParaRPr lang="en-US" sz="1400" dirty="0"/>
+          </a:p>
+        </p:txBody>
+      </p:sp>
+      <p:sp>
+        <p:nvSpPr>
+          <p:cNvPr id="7" name="Text 5"/>
+          <p:cNvSpPr txBox="1"/>
+          <p:nvPr/>
+        </p:nvSpPr>
+        <p:spPr>
+          <a:xfrm>
+            <a:off x="1261872" y="2029968"/>
+            <a:ext cx="4828032" cy="365760"/>
+          </a:xfrm>
+          <a:prstGeom prst="rect">
+            <a:avLst/>
+          </a:prstGeom>
+          <a:noFill/>
+          <a:ln/>
+        </p:spPr>
+        <p:txBody>
+          <a:bodyPr wrap="square" lIns="0" tIns="0" rIns="0" bIns="0" rtlCol="0" anchor="ctr"/>
+          <a:lstStyle/>
+          <a:p>
+            <a:pPr indent="0" marL="0">
+              <a:buNone/>
+            </a:pPr>
+            <a:r>
+              <a:rPr lang="en-US" sz="1450" dirty="0">
+                <a:solidFill>
+                  <a:srgbClr val="1A1D20"/>
+                </a:solidFill>
+                <a:latin typeface="Calibri" pitchFamily="34" charset="0"/>
+                <a:ea typeface="Calibri" pitchFamily="34" charset="-122"/>
+                <a:cs typeface="Calibri" pitchFamily="34" charset="-120"/>
+              </a:rPr>
+              <a:t>HeLa transfection, dose response</a:t>
+            </a:r>
+            <a:endParaRPr lang="en-US" sz="1450" dirty="0"/>
+          </a:p>
+        </p:txBody>
+      </p:sp>
+      <p:sp>
+        <p:nvSpPr>
+          <p:cNvPr id="8" name="Text 6"/>
+          <p:cNvSpPr txBox="1"/>
+          <p:nvPr/>
+        </p:nvSpPr>
+        <p:spPr>
+          <a:xfrm>
+            <a:off x="6419088" y="2029968"/>
+            <a:ext cx="5074920" cy="365760"/>
+          </a:xfrm>
+          <a:prstGeom prst="rect">
+            <a:avLst/>
+          </a:prstGeom>
+          <a:noFill/>
+          <a:ln/>
+        </p:spPr>
+        <p:txBody>
+          <a:bodyPr wrap="square" lIns="0" tIns="0" rIns="0" bIns="0" rtlCol="0" anchor="ctr"/>
+          <a:lstStyle/>
+          <a:p>
+            <a:pPr indent="0" marL="0">
+              <a:buNone/>
+            </a:pPr>
+            <a:r>
+              <a:rPr lang="en-US" sz="1450" dirty="0">
+                <a:solidFill>
+                  <a:srgbClr val="1A1D20"/>
+                </a:solidFill>
+                <a:latin typeface="Calibri" pitchFamily="34" charset="0"/>
+                <a:ea typeface="Calibri" pitchFamily="34" charset="-122"/>
+                <a:cs typeface="Calibri" pitchFamily="34" charset="-120"/>
+              </a:rPr>
+              <a:t>A549 transfection, dose response</a:t>
+            </a:r>
+            <a:endParaRPr lang="en-US" sz="1450" dirty="0"/>
+          </a:p>
+        </p:txBody>
+      </p:sp>
+      <p:sp>
+        <p:nvSpPr>
+          <p:cNvPr id="9" name="Shape 7"/>
+          <p:cNvSpPr/>
+          <p:nvPr/>
+        </p:nvSpPr>
+        <p:spPr>
+          <a:xfrm>
+            <a:off x="685800" y="2505456"/>
+            <a:ext cx="10820095" cy="0"/>
+          </a:xfrm>
+          <a:prstGeom prst="line">
+            <a:avLst/>
+          </a:prstGeom>
+          <a:noFill/>
+          <a:ln w="9525">
+            <a:solidFill>
+              <a:srgbClr val="D8DAD9"/>
+            </a:solidFill>
+            <a:prstDash val="solid"/>
+          </a:ln>
+        </p:spPr>
+      </p:sp>
+      <p:sp>
+        <p:nvSpPr>
+          <p:cNvPr id="10" name="Text 8"/>
+          <p:cNvSpPr txBox="1"/>
+          <p:nvPr/>
+        </p:nvSpPr>
+        <p:spPr>
+          <a:xfrm>
+            <a:off x="685800" y="2633472"/>
+            <a:ext cx="384048" cy="365760"/>
+          </a:xfrm>
+          <a:prstGeom prst="rect">
+            <a:avLst/>
+          </a:prstGeom>
+          <a:noFill/>
+          <a:ln/>
+        </p:spPr>
+        <p:txBody>
+          <a:bodyPr wrap="square" lIns="0" tIns="0" rIns="0" bIns="0" rtlCol="0" anchor="ctr"/>
+          <a:lstStyle/>
+          <a:p>
+            <a:pPr indent="0" marL="0">
+              <a:buNone/>
+            </a:pPr>
+            <a:r>
+              <a:rPr lang="en-US" sz="1400" b="1" dirty="0">
+                <a:solidFill>
+                  <a:srgbClr val="8C9094"/>
+                </a:solidFill>
+                <a:latin typeface="Calibri" pitchFamily="34" charset="0"/>
+                <a:ea typeface="Calibri" pitchFamily="34" charset="-122"/>
+                <a:cs typeface="Calibri" pitchFamily="34" charset="-120"/>
+              </a:rPr>
+              <a:t>b</a:t>
+            </a:r>
+            <a:endParaRPr lang="en-US" sz="1400" dirty="0"/>
+          </a:p>
+        </p:txBody>
+      </p:sp>
+      <p:sp>
+        <p:nvSpPr>
+          <p:cNvPr id="11" name="Text 9"/>
+          <p:cNvSpPr txBox="1"/>
+          <p:nvPr/>
+        </p:nvSpPr>
+        <p:spPr>
+          <a:xfrm>
+            <a:off x="1261872" y="2633472"/>
+            <a:ext cx="10232136" cy="365760"/>
+          </a:xfrm>
+          <a:prstGeom prst="rect">
+            <a:avLst/>
+          </a:prstGeom>
+          <a:noFill/>
+          <a:ln/>
+        </p:spPr>
+        <p:txBody>
+          <a:bodyPr wrap="square" lIns="0" tIns="0" rIns="0" bIns="0" rtlCol="0" anchor="ctr"/>
+          <a:lstStyle/>
+          <a:p>
+            <a:pPr indent="0" marL="0">
+              <a:buNone/>
+            </a:pPr>
+            <a:r>
+              <a:rPr lang="en-US" sz="1450" dirty="0">
+                <a:solidFill>
+                  <a:srgbClr val="1A1D20"/>
+                </a:solidFill>
+                <a:latin typeface="Calibri" pitchFamily="34" charset="0"/>
+                <a:ea typeface="Calibri" pitchFamily="34" charset="-122"/>
+                <a:cs typeface="Calibri" pitchFamily="34" charset="-120"/>
+              </a:rPr>
+              <a:t>Viability across the dose range</a:t>
+            </a:r>
+            <a:endParaRPr lang="en-US" sz="1450" dirty="0"/>
+          </a:p>
+        </p:txBody>
+      </p:sp>
+      <p:sp>
+        <p:nvSpPr>
+          <p:cNvPr id="12" name="Shape 10"/>
+          <p:cNvSpPr/>
+          <p:nvPr/>
+        </p:nvSpPr>
+        <p:spPr>
+          <a:xfrm>
+            <a:off x="685800" y="3108960"/>
+            <a:ext cx="10820095" cy="0"/>
+          </a:xfrm>
+          <a:prstGeom prst="line">
+            <a:avLst/>
+          </a:prstGeom>
+          <a:noFill/>
+          <a:ln w="9525">
+            <a:solidFill>
+              <a:srgbClr val="D8DAD9"/>
+            </a:solidFill>
+            <a:prstDash val="solid"/>
+          </a:ln>
+        </p:spPr>
+      </p:sp>
+      <p:sp>
+        <p:nvSpPr>
+          <p:cNvPr id="13" name="Text 11"/>
+          <p:cNvSpPr txBox="1"/>
+          <p:nvPr/>
+        </p:nvSpPr>
+        <p:spPr>
+          <a:xfrm>
+            <a:off x="685800" y="3236976"/>
+            <a:ext cx="384048" cy="365760"/>
+          </a:xfrm>
+          <a:prstGeom prst="rect">
+            <a:avLst/>
+          </a:prstGeom>
+          <a:noFill/>
+          <a:ln/>
+        </p:spPr>
+        <p:txBody>
+          <a:bodyPr wrap="square" lIns="0" tIns="0" rIns="0" bIns="0" rtlCol="0" anchor="ctr"/>
+          <a:lstStyle/>
+          <a:p>
+            <a:pPr indent="0" marL="0">
+              <a:buNone/>
+            </a:pPr>
+            <a:r>
+              <a:rPr lang="en-US" sz="1400" b="1" dirty="0">
+                <a:solidFill>
+                  <a:srgbClr val="8C9094"/>
+                </a:solidFill>
+                <a:latin typeface="Calibri" pitchFamily="34" charset="0"/>
+                <a:ea typeface="Calibri" pitchFamily="34" charset="-122"/>
+                <a:cs typeface="Calibri" pitchFamily="34" charset="-120"/>
+              </a:rPr>
+              <a:t>c</a:t>
+            </a:r>
+            <a:endParaRPr lang="en-US" sz="1400" dirty="0"/>
+          </a:p>
+        </p:txBody>
+      </p:sp>
+      <p:sp>
+        <p:nvSpPr>
+          <p:cNvPr id="14" name="Text 12"/>
+          <p:cNvSpPr txBox="1"/>
+          <p:nvPr/>
+        </p:nvSpPr>
+        <p:spPr>
+          <a:xfrm>
+            <a:off x="1261872" y="3236976"/>
+            <a:ext cx="4828032" cy="365760"/>
+          </a:xfrm>
+          <a:prstGeom prst="rect">
+            <a:avLst/>
+          </a:prstGeom>
+          <a:noFill/>
+          <a:ln/>
+        </p:spPr>
+        <p:txBody>
+          <a:bodyPr wrap="square" lIns="0" tIns="0" rIns="0" bIns="0" rtlCol="0" anchor="ctr"/>
+          <a:lstStyle/>
+          <a:p>
+            <a:pPr indent="0" marL="0">
+              <a:buNone/>
+            </a:pPr>
+            <a:r>
+              <a:rPr lang="en-US" sz="1450" dirty="0">
+                <a:solidFill>
+                  <a:srgbClr val="1A1D20"/>
+                </a:solidFill>
+                <a:latin typeface="Calibri" pitchFamily="34" charset="0"/>
+                <a:ea typeface="Calibri" pitchFamily="34" charset="-122"/>
+                <a:cs typeface="Calibri" pitchFamily="34" charset="-120"/>
+              </a:rPr>
+              <a:t>Reporter expression after intramuscular delivery</a:t>
+            </a:r>
+            <a:endParaRPr lang="en-US" sz="1450" dirty="0"/>
+          </a:p>
+        </p:txBody>
+      </p:sp>
+      <p:sp>
+        <p:nvSpPr>
+          <p:cNvPr id="15" name="Text 13"/>
+          <p:cNvSpPr txBox="1"/>
+          <p:nvPr/>
+        </p:nvSpPr>
+        <p:spPr>
+          <a:xfrm>
+            <a:off x="6419088" y="3236976"/>
+            <a:ext cx="5074920" cy="365760"/>
+          </a:xfrm>
+          <a:prstGeom prst="rect">
+            <a:avLst/>
+          </a:prstGeom>
+          <a:noFill/>
+          <a:ln/>
+        </p:spPr>
+        <p:txBody>
+          <a:bodyPr wrap="square" lIns="0" tIns="0" rIns="0" bIns="0" rtlCol="0" anchor="ctr"/>
+          <a:lstStyle/>
+          <a:p>
+            <a:pPr indent="0" marL="0">
+              <a:buNone/>
+            </a:pPr>
+            <a:r>
+              <a:rPr lang="en-US" sz="1450" dirty="0">
+                <a:solidFill>
+                  <a:srgbClr val="1A1D20"/>
+                </a:solidFill>
+                <a:latin typeface="Calibri" pitchFamily="34" charset="0"/>
+                <a:ea typeface="Calibri" pitchFamily="34" charset="-122"/>
+                <a:cs typeface="Calibri" pitchFamily="34" charset="-120"/>
+              </a:rPr>
+              <a:t>Reporter expression after intranasal delivery</a:t>
+            </a:r>
+            <a:endParaRPr lang="en-US" sz="1450" dirty="0"/>
+          </a:p>
+        </p:txBody>
+      </p:sp>
+      <p:sp>
+        <p:nvSpPr>
+          <p:cNvPr id="16" name="Shape 14"/>
+          <p:cNvSpPr/>
+          <p:nvPr/>
+        </p:nvSpPr>
+        <p:spPr>
+          <a:xfrm>
+            <a:off x="685800" y="3712464"/>
+            <a:ext cx="10820095" cy="0"/>
+          </a:xfrm>
+          <a:prstGeom prst="line">
+            <a:avLst/>
+          </a:prstGeom>
+          <a:noFill/>
+          <a:ln w="9525">
+            <a:solidFill>
+              <a:srgbClr val="D8DAD9"/>
+            </a:solidFill>
+            <a:prstDash val="solid"/>
+          </a:ln>
+        </p:spPr>
+      </p:sp>
+      <p:sp>
+        <p:nvSpPr>
+          <p:cNvPr id="17" name="Text 15"/>
+          <p:cNvSpPr txBox="1"/>
+          <p:nvPr/>
+        </p:nvSpPr>
+        <p:spPr>
+          <a:xfrm>
+            <a:off x="685800" y="3840480"/>
+            <a:ext cx="384048" cy="365760"/>
+          </a:xfrm>
+          <a:prstGeom prst="rect">
+            <a:avLst/>
+          </a:prstGeom>
+          <a:noFill/>
+          <a:ln/>
+        </p:spPr>
+        <p:txBody>
+          <a:bodyPr wrap="square" lIns="0" tIns="0" rIns="0" bIns="0" rtlCol="0" anchor="ctr"/>
+          <a:lstStyle/>
+          <a:p>
+            <a:pPr indent="0" marL="0">
+              <a:buNone/>
+            </a:pPr>
+            <a:r>
+              <a:rPr lang="en-US" sz="1400" b="1" dirty="0">
+                <a:solidFill>
+                  <a:srgbClr val="8C9094"/>
+                </a:solidFill>
+                <a:latin typeface="Calibri" pitchFamily="34" charset="0"/>
+                <a:ea typeface="Calibri" pitchFamily="34" charset="-122"/>
+                <a:cs typeface="Calibri" pitchFamily="34" charset="-120"/>
+              </a:rPr>
+              <a:t>d</a:t>
+            </a:r>
+            <a:endParaRPr lang="en-US" sz="1400" dirty="0"/>
+          </a:p>
+        </p:txBody>
+      </p:sp>
+      <p:sp>
+        <p:nvSpPr>
+          <p:cNvPr id="18" name="Text 16"/>
+          <p:cNvSpPr txBox="1"/>
+          <p:nvPr/>
+        </p:nvSpPr>
+        <p:spPr>
+          <a:xfrm>
+            <a:off x="1261872" y="3840480"/>
+            <a:ext cx="10232136" cy="365760"/>
+          </a:xfrm>
+          <a:prstGeom prst="rect">
+            <a:avLst/>
+          </a:prstGeom>
+          <a:noFill/>
+          <a:ln/>
+        </p:spPr>
+        <p:txBody>
+          <a:bodyPr wrap="square" lIns="0" tIns="0" rIns="0" bIns="0" rtlCol="0" anchor="ctr"/>
+          <a:lstStyle/>
+          <a:p>
+            <a:pPr indent="0" marL="0">
+              <a:buNone/>
+            </a:pPr>
+            <a:r>
+              <a:rPr lang="en-US" sz="1450" dirty="0">
+                <a:solidFill>
+                  <a:srgbClr val="1A1D20"/>
+                </a:solidFill>
+                <a:latin typeface="Calibri" pitchFamily="34" charset="0"/>
+                <a:ea typeface="Calibri" pitchFamily="34" charset="-122"/>
+                <a:cs typeface="Calibri" pitchFamily="34" charset="-120"/>
+              </a:rPr>
+              <a:t>Organ-level biodistribution</a:t>
+            </a:r>
+            <a:endParaRPr lang="en-US" sz="1450" dirty="0"/>
+          </a:p>
+        </p:txBody>
+      </p:sp>
+      <p:sp>
+        <p:nvSpPr>
+          <p:cNvPr id="19" name="Shape 17"/>
+          <p:cNvSpPr/>
+          <p:nvPr/>
+        </p:nvSpPr>
+        <p:spPr>
+          <a:xfrm>
+            <a:off x="685800" y="4315968"/>
+            <a:ext cx="10820095" cy="0"/>
+          </a:xfrm>
+          <a:prstGeom prst="line">
+            <a:avLst/>
+          </a:prstGeom>
+          <a:noFill/>
+          <a:ln w="9525">
+            <a:solidFill>
+              <a:srgbClr val="D8DAD9"/>
+            </a:solidFill>
+            <a:prstDash val="solid"/>
+          </a:ln>
+        </p:spPr>
+      </p:sp>
+      <p:sp>
+        <p:nvSpPr>
+          <p:cNvPr id="20" name="Text 18"/>
+          <p:cNvSpPr txBox="1"/>
+          <p:nvPr/>
+        </p:nvSpPr>
+        <p:spPr>
+          <a:xfrm>
+            <a:off x="685800" y="4443984"/>
+            <a:ext cx="384048" cy="365760"/>
+          </a:xfrm>
+          <a:prstGeom prst="rect">
+            <a:avLst/>
+          </a:prstGeom>
+          <a:noFill/>
+          <a:ln/>
+        </p:spPr>
+        <p:txBody>
+          <a:bodyPr wrap="square" lIns="0" tIns="0" rIns="0" bIns="0" rtlCol="0" anchor="ctr"/>
+          <a:lstStyle/>
+          <a:p>
+            <a:pPr indent="0" marL="0">
+              <a:buNone/>
+            </a:pPr>
+            <a:r>
+              <a:rPr lang="en-US" sz="1400" b="1" dirty="0">
+                <a:solidFill>
+                  <a:srgbClr val="8C9094"/>
+                </a:solidFill>
+                <a:latin typeface="Calibri" pitchFamily="34" charset="0"/>
+                <a:ea typeface="Calibri" pitchFamily="34" charset="-122"/>
+                <a:cs typeface="Calibri" pitchFamily="34" charset="-120"/>
+              </a:rPr>
+              <a:t>e</a:t>
+            </a:r>
+            <a:endParaRPr lang="en-US" sz="1400" dirty="0"/>
+          </a:p>
+        </p:txBody>
+      </p:sp>
+      <p:sp>
+        <p:nvSpPr>
+          <p:cNvPr id="21" name="Text 19"/>
+          <p:cNvSpPr txBox="1"/>
+          <p:nvPr/>
+        </p:nvSpPr>
+        <p:spPr>
+          <a:xfrm>
+            <a:off x="1261872" y="4443984"/>
+            <a:ext cx="10232136" cy="365760"/>
+          </a:xfrm>
+          <a:prstGeom prst="rect">
+            <a:avLst/>
+          </a:prstGeom>
+          <a:noFill/>
+          <a:ln/>
+        </p:spPr>
+        <p:txBody>
+          <a:bodyPr wrap="square" lIns="0" tIns="0" rIns="0" bIns="0" rtlCol="0" anchor="ctr"/>
+          <a:lstStyle/>
+          <a:p>
+            <a:pPr indent="0" marL="0">
+              <a:buNone/>
+            </a:pPr>
+            <a:r>
+              <a:rPr lang="en-US" sz="1450" dirty="0">
+                <a:solidFill>
+                  <a:srgbClr val="1A1D20"/>
+                </a:solidFill>
+                <a:latin typeface="Calibri" pitchFamily="34" charset="0"/>
+                <a:ea typeface="Calibri" pitchFamily="34" charset="-122"/>
+                <a:cs typeface="Calibri" pitchFamily="34" charset="-120"/>
+              </a:rPr>
+              <a:t>Comparison against a benchmark formulation</a:t>
+            </a:r>
+            <a:endParaRPr lang="en-US" sz="1450" dirty="0"/>
+          </a:p>
+        </p:txBody>
+      </p:sp>
+      <p:sp>
+        <p:nvSpPr>
+          <p:cNvPr id="22" name="Shape 20"/>
+          <p:cNvSpPr/>
+          <p:nvPr/>
+        </p:nvSpPr>
+        <p:spPr>
+          <a:xfrm>
+            <a:off x="685800" y="4919472"/>
+            <a:ext cx="10820095" cy="0"/>
+          </a:xfrm>
+          <a:prstGeom prst="line">
+            <a:avLst/>
+          </a:prstGeom>
+          <a:noFill/>
+          <a:ln w="9525">
+            <a:solidFill>
+              <a:srgbClr val="D8DAD9"/>
+            </a:solidFill>
+            <a:prstDash val="solid"/>
+          </a:ln>
+        </p:spPr>
+      </p:sp>
+      <p:sp>
+        <p:nvSpPr>
+          <p:cNvPr id="23" name="Text 21"/>
+          <p:cNvSpPr txBox="1"/>
+          <p:nvPr/>
+        </p:nvSpPr>
+        <p:spPr>
+          <a:xfrm>
+            <a:off x="685800" y="5047488"/>
+            <a:ext cx="384048" cy="365760"/>
+          </a:xfrm>
+          <a:prstGeom prst="rect">
+            <a:avLst/>
+          </a:prstGeom>
+          <a:noFill/>
+          <a:ln/>
+        </p:spPr>
+        <p:txBody>
+          <a:bodyPr wrap="square" lIns="0" tIns="0" rIns="0" bIns="0" rtlCol="0" anchor="ctr"/>
+          <a:lstStyle/>
+          <a:p>
+            <a:pPr indent="0" marL="0">
+              <a:buNone/>
+            </a:pPr>
+            <a:r>
+              <a:rPr lang="en-US" sz="1400" b="1" dirty="0">
+                <a:solidFill>
+                  <a:srgbClr val="8C9094"/>
+                </a:solidFill>
+                <a:latin typeface="Calibri" pitchFamily="34" charset="0"/>
+                <a:ea typeface="Calibri" pitchFamily="34" charset="-122"/>
+                <a:cs typeface="Calibri" pitchFamily="34" charset="-120"/>
+              </a:rPr>
+              <a:t>f</a:t>
+            </a:r>
+            <a:endParaRPr lang="en-US" sz="1400" dirty="0"/>
+          </a:p>
+        </p:txBody>
+      </p:sp>
+      <p:sp>
+        <p:nvSpPr>
+          <p:cNvPr id="24" name="Text 22"/>
+          <p:cNvSpPr txBox="1"/>
+          <p:nvPr/>
+        </p:nvSpPr>
+        <p:spPr>
+          <a:xfrm>
+            <a:off x="1261872" y="5047488"/>
+            <a:ext cx="10232136" cy="365760"/>
+          </a:xfrm>
+          <a:prstGeom prst="rect">
+            <a:avLst/>
+          </a:prstGeom>
+          <a:noFill/>
+          <a:ln/>
+        </p:spPr>
+        <p:txBody>
+          <a:bodyPr wrap="square" lIns="0" tIns="0" rIns="0" bIns="0" rtlCol="0" anchor="ctr"/>
+          <a:lstStyle/>
+          <a:p>
+            <a:pPr indent="0" marL="0">
+              <a:buNone/>
+            </a:pPr>
+            <a:r>
+              <a:rPr lang="en-US" sz="1450" dirty="0">
+                <a:solidFill>
+                  <a:srgbClr val="1A1D20"/>
+                </a:solidFill>
+                <a:latin typeface="Calibri" pitchFamily="34" charset="0"/>
+                <a:ea typeface="Calibri" pitchFamily="34" charset="-122"/>
+                <a:cs typeface="Calibri" pitchFamily="34" charset="-120"/>
+              </a:rPr>
+              <a:t>Lead selection carried into the application study</a:t>
+            </a:r>
+            <a:endParaRPr lang="en-US" sz="1450" dirty="0"/>
+          </a:p>
+        </p:txBody>
+      </p:sp>
+      <p:sp>
+        <p:nvSpPr>
+          <p:cNvPr id="25" name="Shape 23"/>
+          <p:cNvSpPr/>
+          <p:nvPr/>
+        </p:nvSpPr>
+        <p:spPr>
+          <a:xfrm>
+            <a:off x="685800" y="5522976"/>
+            <a:ext cx="10820095" cy="0"/>
+          </a:xfrm>
+          <a:prstGeom prst="line">
+            <a:avLst/>
+          </a:prstGeom>
+          <a:noFill/>
+          <a:ln w="9525">
+            <a:solidFill>
+              <a:srgbClr val="D8DAD9"/>
+            </a:solidFill>
+            <a:prstDash val="solid"/>
+          </a:ln>
+        </p:spPr>
+      </p:sp>
+      <p:sp>
+        <p:nvSpPr>
+          <p:cNvPr id="26" name="Text 24"/>
+          <p:cNvSpPr txBox="1"/>
+          <p:nvPr/>
+        </p:nvSpPr>
+        <p:spPr>
+          <a:xfrm>
+            <a:off x="685800" y="5815584"/>
+            <a:ext cx="10607040" cy="512064"/>
+          </a:xfrm>
+          <a:prstGeom prst="rect">
+            <a:avLst/>
+          </a:prstGeom>
+          <a:noFill/>
+          <a:ln/>
+        </p:spPr>
+        <p:txBody>
+          <a:bodyPr wrap="square" lIns="0" tIns="0" rIns="0" bIns="0" rtlCol="0" anchor="t"/>
+          <a:lstStyle/>
+          <a:p>
+            <a:pPr indent="0" marL="0">
+              <a:lnSpc>
+                <a:spcPct val="115000"/>
+              </a:lnSpc>
+              <a:buNone/>
+            </a:pPr>
+            <a:r>
+              <a:rPr lang="en-US" sz="1250" dirty="0">
+                <a:solidFill>
+                  <a:srgbClr val="8C9094"/>
+                </a:solidFill>
+                <a:latin typeface="Calibri" pitchFamily="34" charset="0"/>
+                <a:ea typeface="Calibri" pitchFamily="34" charset="-122"/>
+                <a:cs typeface="Calibri" pitchFamily="34" charset="-120"/>
+              </a:rPr>
+              <a:t>Same experimental architecture in both programmes; the cell line and the route of administration are what change.</a:t>
+            </a:r>
+            <a:endParaRPr lang="en-US" sz="1250" dirty="0"/>
+          </a:p>
+        </p:txBody>
+      </p:sp>
+    </p:spTree>
+  </p:cSld>
+  <p:clrMapOvr>
+    <a:masterClrMapping/>
+  </p:clrMapOvr>
+</p:sld>
+</file>
+
+<file path=ppt/slides/slide12.xml><?xml version="1.0" encoding="utf-8"?>
+<p:sld xmlns:a="http://schemas.openxmlformats.org/drawingml/2006/main" xmlns:r="http://schemas.openxmlformats.org/officeDocument/2006/relationships" xmlns:p="http://schemas.openxmlformats.org/presentationml/2006/main">
+  <p:cSld name="Slide 12">
+    <p:bg>
+      <p:bgPr>
+        <a:solidFill>
+          <a:srgbClr val="FFFFFF"/>
+        </a:solidFill>
+      </p:bgPr>
+    </p:bg>
+    <p:spTree>
+      <p:nvGrpSpPr>
+        <p:cNvPr id="1" name=""/>
+        <p:cNvGrpSpPr/>
+        <p:nvPr/>
+      </p:nvGrpSpPr>
+      <p:grpSpPr>
+        <a:xfrm>
+          <a:off x="0" y="0"/>
+          <a:ext cx="0" cy="0"/>
+          <a:chOff x="0" y="0"/>
+          <a:chExt cx="0" cy="0"/>
+        </a:xfrm>
+      </p:grpSpPr>
+      <p:sp>
+        <p:nvSpPr>
+          <p:cNvPr id="2" name="Text 0"/>
+          <p:cNvSpPr txBox="1"/>
+          <p:nvPr/>
+        </p:nvSpPr>
+        <p:spPr>
+          <a:xfrm>
+            <a:off x="685800" y="530352"/>
+            <a:ext cx="10820095" cy="1060704"/>
+          </a:xfrm>
+          <a:prstGeom prst="rect">
+            <a:avLst/>
+          </a:prstGeom>
+          <a:noFill/>
+          <a:ln/>
+        </p:spPr>
+        <p:txBody>
+          <a:bodyPr wrap="square" lIns="0" tIns="0" rIns="0" bIns="0" rtlCol="0" anchor="t"/>
+          <a:lstStyle/>
+          <a:p>
+            <a:pPr indent="0" marL="0">
+              <a:buNone/>
+            </a:pPr>
+            <a:r>
+              <a:rPr lang="en-US" sz="3200" b="1" dirty="0">
+                <a:solidFill>
+                  <a:srgbClr val="1A1D20"/>
+                </a:solidFill>
+                <a:latin typeface="Calibri" pitchFamily="34" charset="0"/>
+                <a:ea typeface="Calibri" pitchFamily="34" charset="-122"/>
+                <a:cs typeface="Calibri" pitchFamily="34" charset="-120"/>
+              </a:rPr>
+              <a:t>Figure 5 — the application study</a:t>
+            </a:r>
+            <a:endParaRPr lang="en-US" sz="3200" dirty="0"/>
+          </a:p>
+        </p:txBody>
+      </p:sp>
+      <p:sp>
+        <p:nvSpPr>
+          <p:cNvPr id="3" name="Text 1"/>
+          <p:cNvSpPr txBox="1"/>
+          <p:nvPr/>
+        </p:nvSpPr>
+        <p:spPr>
+          <a:xfrm>
+            <a:off x="685800" y="1517904"/>
+            <a:ext cx="5074920" cy="310896"/>
+          </a:xfrm>
+          <a:prstGeom prst="rect">
+            <a:avLst/>
+          </a:prstGeom>
+          <a:noFill/>
+          <a:ln/>
+        </p:spPr>
+        <p:txBody>
+          <a:bodyPr wrap="square" lIns="0" tIns="0" rIns="0" bIns="0" rtlCol="0" anchor="ctr"/>
+          <a:lstStyle/>
+          <a:p>
+            <a:pPr indent="0" marL="0">
+              <a:buNone/>
+            </a:pPr>
+            <a:r>
+              <a:rPr lang="en-US" sz="1700" b="1" dirty="0">
+                <a:solidFill>
+                  <a:srgbClr val="A9581F"/>
+                </a:solidFill>
+                <a:latin typeface="Calibri" pitchFamily="34" charset="0"/>
+                <a:ea typeface="Calibri" pitchFamily="34" charset="-122"/>
+                <a:cs typeface="Calibri" pitchFamily="34" charset="-120"/>
+              </a:rPr>
+              <a:t>FORGE · vaccine study</a:t>
+            </a:r>
+            <a:endParaRPr lang="en-US" sz="1700" dirty="0"/>
+          </a:p>
+        </p:txBody>
+      </p:sp>
+      <p:sp>
+        <p:nvSpPr>
+          <p:cNvPr id="4" name="Text 2"/>
+          <p:cNvSpPr txBox="1"/>
+          <p:nvPr/>
+        </p:nvSpPr>
+        <p:spPr>
+          <a:xfrm>
+            <a:off x="6419088" y="1517904"/>
+            <a:ext cx="5074920" cy="310896"/>
+          </a:xfrm>
+          <a:prstGeom prst="rect">
+            <a:avLst/>
+          </a:prstGeom>
+          <a:noFill/>
+          <a:ln/>
+        </p:spPr>
+        <p:txBody>
+          <a:bodyPr wrap="square" lIns="0" tIns="0" rIns="0" bIns="0" rtlCol="0" anchor="ctr"/>
+          <a:lstStyle/>
+          <a:p>
+            <a:pPr indent="0" marL="0">
+              <a:buNone/>
+            </a:pPr>
+            <a:r>
+              <a:rPr lang="en-US" sz="1700" b="1" dirty="0">
+                <a:solidFill>
+                  <a:srgbClr val="2F6B73"/>
+                </a:solidFill>
+                <a:latin typeface="Calibri" pitchFamily="34" charset="0"/>
+                <a:ea typeface="Calibri" pitchFamily="34" charset="-122"/>
+                <a:cs typeface="Calibri" pitchFamily="34" charset="-120"/>
+              </a:rPr>
+              <a:t>COMPOSE-Lipid · editing study</a:t>
+            </a:r>
+            <a:endParaRPr lang="en-US" sz="1700" dirty="0"/>
+          </a:p>
+        </p:txBody>
+      </p:sp>
+      <p:sp>
+        <p:nvSpPr>
+          <p:cNvPr id="5" name="Shape 3"/>
+          <p:cNvSpPr/>
+          <p:nvPr/>
+        </p:nvSpPr>
+        <p:spPr>
+          <a:xfrm>
+            <a:off x="685800" y="1956816"/>
+            <a:ext cx="5074920" cy="0"/>
+          </a:xfrm>
+          <a:prstGeom prst="line">
+            <a:avLst/>
+          </a:prstGeom>
+          <a:noFill/>
+          <a:ln w="9525">
+            <a:solidFill>
+              <a:srgbClr val="D8DAD9"/>
+            </a:solidFill>
+            <a:prstDash val="solid"/>
+          </a:ln>
+        </p:spPr>
+      </p:sp>
+      <p:sp>
+        <p:nvSpPr>
+          <p:cNvPr id="6" name="Shape 4"/>
+          <p:cNvSpPr/>
+          <p:nvPr/>
+        </p:nvSpPr>
+        <p:spPr>
+          <a:xfrm>
+            <a:off x="6419088" y="1956816"/>
+            <a:ext cx="5074920" cy="0"/>
+          </a:xfrm>
+          <a:prstGeom prst="line">
+            <a:avLst/>
+          </a:prstGeom>
+          <a:noFill/>
+          <a:ln w="9525">
+            <a:solidFill>
+              <a:srgbClr val="D8DAD9"/>
+            </a:solidFill>
+            <a:prstDash val="solid"/>
+          </a:ln>
+        </p:spPr>
+      </p:sp>
+      <p:sp>
+        <p:nvSpPr>
+          <p:cNvPr id="7" name="Text 5"/>
+          <p:cNvSpPr txBox="1"/>
+          <p:nvPr/>
+        </p:nvSpPr>
+        <p:spPr>
+          <a:xfrm>
+            <a:off x="685800" y="2084832"/>
+            <a:ext cx="384048" cy="365760"/>
+          </a:xfrm>
+          <a:prstGeom prst="rect">
+            <a:avLst/>
+          </a:prstGeom>
+          <a:noFill/>
+          <a:ln/>
+        </p:spPr>
+        <p:txBody>
+          <a:bodyPr wrap="square" lIns="0" tIns="0" rIns="0" bIns="0" rtlCol="0" anchor="ctr"/>
+          <a:lstStyle/>
+          <a:p>
+            <a:pPr indent="0" marL="0">
+              <a:buNone/>
+            </a:pPr>
+            <a:r>
+              <a:rPr lang="en-US" sz="1400" b="1" dirty="0">
+                <a:solidFill>
+                  <a:srgbClr val="8C9094"/>
+                </a:solidFill>
+                <a:latin typeface="Calibri" pitchFamily="34" charset="0"/>
+                <a:ea typeface="Calibri" pitchFamily="34" charset="-122"/>
+                <a:cs typeface="Calibri" pitchFamily="34" charset="-120"/>
+              </a:rPr>
+              <a:t>a</a:t>
+            </a:r>
+            <a:endParaRPr lang="en-US" sz="1400" dirty="0"/>
+          </a:p>
+        </p:txBody>
+      </p:sp>
+      <p:sp>
+        <p:nvSpPr>
+          <p:cNvPr id="8" name="Text 6"/>
+          <p:cNvSpPr txBox="1"/>
+          <p:nvPr/>
+        </p:nvSpPr>
+        <p:spPr>
+          <a:xfrm>
+            <a:off x="1161288" y="2084832"/>
+            <a:ext cx="4599432" cy="365760"/>
+          </a:xfrm>
+          <a:prstGeom prst="rect">
+            <a:avLst/>
+          </a:prstGeom>
+          <a:noFill/>
+          <a:ln/>
+        </p:spPr>
+        <p:txBody>
+          <a:bodyPr wrap="square" lIns="0" tIns="0" rIns="0" bIns="0" rtlCol="0" anchor="ctr"/>
+          <a:lstStyle/>
+          <a:p>
+            <a:pPr indent="0" marL="0">
+              <a:buNone/>
+            </a:pPr>
+            <a:r>
+              <a:rPr lang="en-US" sz="1450" dirty="0">
+                <a:solidFill>
+                  <a:srgbClr val="1A1D20"/>
+                </a:solidFill>
+                <a:latin typeface="Calibri" pitchFamily="34" charset="0"/>
+                <a:ea typeface="Calibri" pitchFamily="34" charset="-122"/>
+                <a:cs typeface="Calibri" pitchFamily="34" charset="-120"/>
+              </a:rPr>
+              <a:t>Immunisation schedule and groups</a:t>
+            </a:r>
+            <a:endParaRPr lang="en-US" sz="1450" dirty="0"/>
+          </a:p>
+        </p:txBody>
+      </p:sp>
+      <p:sp>
+        <p:nvSpPr>
+          <p:cNvPr id="9" name="Text 7"/>
+          <p:cNvSpPr txBox="1"/>
+          <p:nvPr/>
+        </p:nvSpPr>
+        <p:spPr>
+          <a:xfrm>
+            <a:off x="6419088" y="2084832"/>
+            <a:ext cx="384048" cy="365760"/>
+          </a:xfrm>
+          <a:prstGeom prst="rect">
+            <a:avLst/>
+          </a:prstGeom>
+          <a:noFill/>
+          <a:ln/>
+        </p:spPr>
+        <p:txBody>
+          <a:bodyPr wrap="square" lIns="0" tIns="0" rIns="0" bIns="0" rtlCol="0" anchor="ctr"/>
+          <a:lstStyle/>
+          <a:p>
+            <a:pPr indent="0" marL="0">
+              <a:buNone/>
+            </a:pPr>
+            <a:r>
+              <a:rPr lang="en-US" sz="1400" b="1" dirty="0">
+                <a:solidFill>
+                  <a:srgbClr val="8C9094"/>
+                </a:solidFill>
+                <a:latin typeface="Calibri" pitchFamily="34" charset="0"/>
+                <a:ea typeface="Calibri" pitchFamily="34" charset="-122"/>
+                <a:cs typeface="Calibri" pitchFamily="34" charset="-120"/>
+              </a:rPr>
+              <a:t>a</a:t>
+            </a:r>
+            <a:endParaRPr lang="en-US" sz="1400" dirty="0"/>
+          </a:p>
+        </p:txBody>
+      </p:sp>
+      <p:sp>
+        <p:nvSpPr>
+          <p:cNvPr id="10" name="Text 8"/>
+          <p:cNvSpPr txBox="1"/>
+          <p:nvPr/>
+        </p:nvSpPr>
+        <p:spPr>
+          <a:xfrm>
+            <a:off x="6894576" y="2084832"/>
+            <a:ext cx="4599432" cy="365760"/>
+          </a:xfrm>
+          <a:prstGeom prst="rect">
+            <a:avLst/>
+          </a:prstGeom>
+          <a:noFill/>
+          <a:ln/>
+        </p:spPr>
+        <p:txBody>
+          <a:bodyPr wrap="square" lIns="0" tIns="0" rIns="0" bIns="0" rtlCol="0" anchor="ctr"/>
+          <a:lstStyle/>
+          <a:p>
+            <a:pPr indent="0" marL="0">
+              <a:buNone/>
+            </a:pPr>
+            <a:r>
+              <a:rPr lang="en-US" sz="1450" dirty="0">
+                <a:solidFill>
+                  <a:srgbClr val="1A1D20"/>
+                </a:solidFill>
+                <a:latin typeface="Calibri" pitchFamily="34" charset="0"/>
+                <a:ea typeface="Calibri" pitchFamily="34" charset="-122"/>
+                <a:cs typeface="Calibri" pitchFamily="34" charset="-120"/>
+              </a:rPr>
+              <a:t>Editing construct and dosing schedule</a:t>
+            </a:r>
+            <a:endParaRPr lang="en-US" sz="1450" dirty="0"/>
+          </a:p>
+        </p:txBody>
+      </p:sp>
+      <p:sp>
+        <p:nvSpPr>
+          <p:cNvPr id="11" name="Shape 9"/>
+          <p:cNvSpPr/>
+          <p:nvPr/>
+        </p:nvSpPr>
+        <p:spPr>
+          <a:xfrm>
+            <a:off x="685800" y="2615184"/>
+            <a:ext cx="5074920" cy="0"/>
+          </a:xfrm>
+          <a:prstGeom prst="line">
+            <a:avLst/>
+          </a:prstGeom>
+          <a:noFill/>
+          <a:ln w="9525">
+            <a:solidFill>
+              <a:srgbClr val="D8DAD9"/>
+            </a:solidFill>
+            <a:prstDash val="solid"/>
+          </a:ln>
+        </p:spPr>
+      </p:sp>
+      <p:sp>
+        <p:nvSpPr>
+          <p:cNvPr id="12" name="Shape 10"/>
+          <p:cNvSpPr/>
+          <p:nvPr/>
+        </p:nvSpPr>
+        <p:spPr>
+          <a:xfrm>
+            <a:off x="6419088" y="2615184"/>
+            <a:ext cx="5074920" cy="0"/>
+          </a:xfrm>
+          <a:prstGeom prst="line">
+            <a:avLst/>
+          </a:prstGeom>
+          <a:noFill/>
+          <a:ln w="9525">
+            <a:solidFill>
+              <a:srgbClr val="D8DAD9"/>
+            </a:solidFill>
+            <a:prstDash val="solid"/>
+          </a:ln>
+        </p:spPr>
+      </p:sp>
+      <p:sp>
+        <p:nvSpPr>
+          <p:cNvPr id="13" name="Text 11"/>
+          <p:cNvSpPr txBox="1"/>
+          <p:nvPr/>
+        </p:nvSpPr>
+        <p:spPr>
+          <a:xfrm>
+            <a:off x="685800" y="2743200"/>
+            <a:ext cx="384048" cy="365760"/>
+          </a:xfrm>
+          <a:prstGeom prst="rect">
+            <a:avLst/>
+          </a:prstGeom>
+          <a:noFill/>
+          <a:ln/>
+        </p:spPr>
+        <p:txBody>
+          <a:bodyPr wrap="square" lIns="0" tIns="0" rIns="0" bIns="0" rtlCol="0" anchor="ctr"/>
+          <a:lstStyle/>
+          <a:p>
+            <a:pPr indent="0" marL="0">
+              <a:buNone/>
+            </a:pPr>
+            <a:r>
+              <a:rPr lang="en-US" sz="1400" b="1" dirty="0">
+                <a:solidFill>
+                  <a:srgbClr val="8C9094"/>
+                </a:solidFill>
+                <a:latin typeface="Calibri" pitchFamily="34" charset="0"/>
+                <a:ea typeface="Calibri" pitchFamily="34" charset="-122"/>
+                <a:cs typeface="Calibri" pitchFamily="34" charset="-120"/>
+              </a:rPr>
+              <a:t>b</a:t>
+            </a:r>
+            <a:endParaRPr lang="en-US" sz="1400" dirty="0"/>
+          </a:p>
+        </p:txBody>
+      </p:sp>
+      <p:sp>
+        <p:nvSpPr>
+          <p:cNvPr id="14" name="Text 12"/>
+          <p:cNvSpPr txBox="1"/>
+          <p:nvPr/>
+        </p:nvSpPr>
+        <p:spPr>
+          <a:xfrm>
+            <a:off x="1161288" y="2743200"/>
+            <a:ext cx="4599432" cy="365760"/>
+          </a:xfrm>
+          <a:prstGeom prst="rect">
+            <a:avLst/>
+          </a:prstGeom>
+          <a:noFill/>
+          <a:ln/>
+        </p:spPr>
+        <p:txBody>
+          <a:bodyPr wrap="square" lIns="0" tIns="0" rIns="0" bIns="0" rtlCol="0" anchor="ctr"/>
+          <a:lstStyle/>
+          <a:p>
+            <a:pPr indent="0" marL="0">
+              <a:buNone/>
+            </a:pPr>
+            <a:r>
+              <a:rPr lang="en-US" sz="1450" dirty="0">
+                <a:solidFill>
+                  <a:srgbClr val="1A1D20"/>
+                </a:solidFill>
+                <a:latin typeface="Calibri" pitchFamily="34" charset="0"/>
+                <a:ea typeface="Calibri" pitchFamily="34" charset="-122"/>
+                <a:cs typeface="Calibri" pitchFamily="34" charset="-120"/>
+              </a:rPr>
+              <a:t>Antigen-specific antibody titres</a:t>
+            </a:r>
+            <a:endParaRPr lang="en-US" sz="1450" dirty="0"/>
+          </a:p>
+        </p:txBody>
+      </p:sp>
+      <p:sp>
+        <p:nvSpPr>
+          <p:cNvPr id="15" name="Text 13"/>
+          <p:cNvSpPr txBox="1"/>
+          <p:nvPr/>
+        </p:nvSpPr>
+        <p:spPr>
+          <a:xfrm>
+            <a:off x="6419088" y="2743200"/>
+            <a:ext cx="384048" cy="365760"/>
+          </a:xfrm>
+          <a:prstGeom prst="rect">
+            <a:avLst/>
+          </a:prstGeom>
+          <a:noFill/>
+          <a:ln/>
+        </p:spPr>
+        <p:txBody>
+          <a:bodyPr wrap="square" lIns="0" tIns="0" rIns="0" bIns="0" rtlCol="0" anchor="ctr"/>
+          <a:lstStyle/>
+          <a:p>
+            <a:pPr indent="0" marL="0">
+              <a:buNone/>
+            </a:pPr>
+            <a:r>
+              <a:rPr lang="en-US" sz="1400" b="1" dirty="0">
+                <a:solidFill>
+                  <a:srgbClr val="8C9094"/>
+                </a:solidFill>
+                <a:latin typeface="Calibri" pitchFamily="34" charset="0"/>
+                <a:ea typeface="Calibri" pitchFamily="34" charset="-122"/>
+                <a:cs typeface="Calibri" pitchFamily="34" charset="-120"/>
+              </a:rPr>
+              <a:t>b</a:t>
+            </a:r>
+            <a:endParaRPr lang="en-US" sz="1400" dirty="0"/>
+          </a:p>
+        </p:txBody>
+      </p:sp>
+      <p:sp>
+        <p:nvSpPr>
+          <p:cNvPr id="16" name="Text 14"/>
+          <p:cNvSpPr txBox="1"/>
+          <p:nvPr/>
+        </p:nvSpPr>
+        <p:spPr>
+          <a:xfrm>
+            <a:off x="6894576" y="2743200"/>
+            <a:ext cx="4599432" cy="365760"/>
+          </a:xfrm>
+          <a:prstGeom prst="rect">
+            <a:avLst/>
+          </a:prstGeom>
+          <a:noFill/>
+          <a:ln/>
+        </p:spPr>
+        <p:txBody>
+          <a:bodyPr wrap="square" lIns="0" tIns="0" rIns="0" bIns="0" rtlCol="0" anchor="ctr"/>
+          <a:lstStyle/>
+          <a:p>
+            <a:pPr indent="0" marL="0">
+              <a:buNone/>
+            </a:pPr>
+            <a:r>
+              <a:rPr lang="en-US" sz="1450" dirty="0">
+                <a:solidFill>
+                  <a:srgbClr val="1A1D20"/>
+                </a:solidFill>
+                <a:latin typeface="Calibri" pitchFamily="34" charset="0"/>
+                <a:ea typeface="Calibri" pitchFamily="34" charset="-122"/>
+                <a:cs typeface="Calibri" pitchFamily="34" charset="-120"/>
+              </a:rPr>
+              <a:t>Editing efficiency in the lung</a:t>
+            </a:r>
+            <a:endParaRPr lang="en-US" sz="1450" dirty="0"/>
+          </a:p>
+        </p:txBody>
+      </p:sp>
+      <p:sp>
+        <p:nvSpPr>
+          <p:cNvPr id="17" name="Shape 15"/>
+          <p:cNvSpPr/>
+          <p:nvPr/>
+        </p:nvSpPr>
+        <p:spPr>
+          <a:xfrm>
+            <a:off x="685800" y="3273552"/>
+            <a:ext cx="5074920" cy="0"/>
+          </a:xfrm>
+          <a:prstGeom prst="line">
+            <a:avLst/>
+          </a:prstGeom>
+          <a:noFill/>
+          <a:ln w="9525">
+            <a:solidFill>
+              <a:srgbClr val="D8DAD9"/>
+            </a:solidFill>
+            <a:prstDash val="solid"/>
+          </a:ln>
+        </p:spPr>
+      </p:sp>
+      <p:sp>
+        <p:nvSpPr>
+          <p:cNvPr id="18" name="Shape 16"/>
+          <p:cNvSpPr/>
+          <p:nvPr/>
+        </p:nvSpPr>
+        <p:spPr>
+          <a:xfrm>
+            <a:off x="6419088" y="3273552"/>
+            <a:ext cx="5074920" cy="0"/>
+          </a:xfrm>
+          <a:prstGeom prst="line">
+            <a:avLst/>
+          </a:prstGeom>
+          <a:noFill/>
+          <a:ln w="9525">
+            <a:solidFill>
+              <a:srgbClr val="D8DAD9"/>
+            </a:solidFill>
+            <a:prstDash val="solid"/>
+          </a:ln>
+        </p:spPr>
+      </p:sp>
+      <p:sp>
+        <p:nvSpPr>
+          <p:cNvPr id="19" name="Text 17"/>
+          <p:cNvSpPr txBox="1"/>
+          <p:nvPr/>
+        </p:nvSpPr>
+        <p:spPr>
+          <a:xfrm>
+            <a:off x="685800" y="3401568"/>
+            <a:ext cx="384048" cy="365760"/>
+          </a:xfrm>
+          <a:prstGeom prst="rect">
+            <a:avLst/>
+          </a:prstGeom>
+          <a:noFill/>
+          <a:ln/>
+        </p:spPr>
+        <p:txBody>
+          <a:bodyPr wrap="square" lIns="0" tIns="0" rIns="0" bIns="0" rtlCol="0" anchor="ctr"/>
+          <a:lstStyle/>
+          <a:p>
+            <a:pPr indent="0" marL="0">
+              <a:buNone/>
+            </a:pPr>
+            <a:r>
+              <a:rPr lang="en-US" sz="1400" b="1" dirty="0">
+                <a:solidFill>
+                  <a:srgbClr val="8C9094"/>
+                </a:solidFill>
+                <a:latin typeface="Calibri" pitchFamily="34" charset="0"/>
+                <a:ea typeface="Calibri" pitchFamily="34" charset="-122"/>
+                <a:cs typeface="Calibri" pitchFamily="34" charset="-120"/>
+              </a:rPr>
+              <a:t>c</a:t>
+            </a:r>
+            <a:endParaRPr lang="en-US" sz="1400" dirty="0"/>
+          </a:p>
+        </p:txBody>
+      </p:sp>
+      <p:sp>
+        <p:nvSpPr>
+          <p:cNvPr id="20" name="Text 18"/>
+          <p:cNvSpPr txBox="1"/>
+          <p:nvPr/>
+        </p:nvSpPr>
+        <p:spPr>
+          <a:xfrm>
+            <a:off x="1161288" y="3401568"/>
+            <a:ext cx="4599432" cy="365760"/>
+          </a:xfrm>
+          <a:prstGeom prst="rect">
+            <a:avLst/>
+          </a:prstGeom>
+          <a:noFill/>
+          <a:ln/>
+        </p:spPr>
+        <p:txBody>
+          <a:bodyPr wrap="square" lIns="0" tIns="0" rIns="0" bIns="0" rtlCol="0" anchor="ctr"/>
+          <a:lstStyle/>
+          <a:p>
+            <a:pPr indent="0" marL="0">
+              <a:buNone/>
+            </a:pPr>
+            <a:r>
+              <a:rPr lang="en-US" sz="1450" dirty="0">
+                <a:solidFill>
+                  <a:srgbClr val="1A1D20"/>
+                </a:solidFill>
+                <a:latin typeface="Calibri" pitchFamily="34" charset="0"/>
+                <a:ea typeface="Calibri" pitchFamily="34" charset="-122"/>
+                <a:cs typeface="Calibri" pitchFamily="34" charset="-120"/>
+              </a:rPr>
+              <a:t>Cellular response</a:t>
+            </a:r>
+            <a:endParaRPr lang="en-US" sz="1450" dirty="0"/>
+          </a:p>
+        </p:txBody>
+      </p:sp>
+      <p:sp>
+        <p:nvSpPr>
+          <p:cNvPr id="21" name="Text 19"/>
+          <p:cNvSpPr txBox="1"/>
+          <p:nvPr/>
+        </p:nvSpPr>
+        <p:spPr>
+          <a:xfrm>
+            <a:off x="6419088" y="3401568"/>
+            <a:ext cx="384048" cy="365760"/>
+          </a:xfrm>
+          <a:prstGeom prst="rect">
+            <a:avLst/>
+          </a:prstGeom>
+          <a:noFill/>
+          <a:ln/>
+        </p:spPr>
+        <p:txBody>
+          <a:bodyPr wrap="square" lIns="0" tIns="0" rIns="0" bIns="0" rtlCol="0" anchor="ctr"/>
+          <a:lstStyle/>
+          <a:p>
+            <a:pPr indent="0" marL="0">
+              <a:buNone/>
+            </a:pPr>
+            <a:r>
+              <a:rPr lang="en-US" sz="1400" b="1" dirty="0">
+                <a:solidFill>
+                  <a:srgbClr val="8C9094"/>
+                </a:solidFill>
+                <a:latin typeface="Calibri" pitchFamily="34" charset="0"/>
+                <a:ea typeface="Calibri" pitchFamily="34" charset="-122"/>
+                <a:cs typeface="Calibri" pitchFamily="34" charset="-120"/>
+              </a:rPr>
+              <a:t>c</a:t>
+            </a:r>
+            <a:endParaRPr lang="en-US" sz="1400" dirty="0"/>
+          </a:p>
+        </p:txBody>
+      </p:sp>
+      <p:sp>
+        <p:nvSpPr>
+          <p:cNvPr id="22" name="Text 20"/>
+          <p:cNvSpPr txBox="1"/>
+          <p:nvPr/>
+        </p:nvSpPr>
+        <p:spPr>
+          <a:xfrm>
+            <a:off x="6894576" y="3401568"/>
+            <a:ext cx="4599432" cy="365760"/>
+          </a:xfrm>
+          <a:prstGeom prst="rect">
+            <a:avLst/>
+          </a:prstGeom>
+          <a:noFill/>
+          <a:ln/>
+        </p:spPr>
+        <p:txBody>
+          <a:bodyPr wrap="square" lIns="0" tIns="0" rIns="0" bIns="0" rtlCol="0" anchor="ctr"/>
+          <a:lstStyle/>
+          <a:p>
+            <a:pPr indent="0" marL="0">
+              <a:buNone/>
+            </a:pPr>
+            <a:r>
+              <a:rPr lang="en-US" sz="1450" dirty="0">
+                <a:solidFill>
+                  <a:srgbClr val="1A1D20"/>
+                </a:solidFill>
+                <a:latin typeface="Calibri" pitchFamily="34" charset="0"/>
+                <a:ea typeface="Calibri" pitchFamily="34" charset="-122"/>
+                <a:cs typeface="Calibri" pitchFamily="34" charset="-120"/>
+              </a:rPr>
+              <a:t>Breakdown across lung cell types</a:t>
+            </a:r>
+            <a:endParaRPr lang="en-US" sz="1450" dirty="0"/>
+          </a:p>
+        </p:txBody>
+      </p:sp>
+      <p:sp>
+        <p:nvSpPr>
+          <p:cNvPr id="23" name="Shape 21"/>
+          <p:cNvSpPr/>
+          <p:nvPr/>
+        </p:nvSpPr>
+        <p:spPr>
+          <a:xfrm>
+            <a:off x="685800" y="3931920"/>
+            <a:ext cx="5074920" cy="0"/>
+          </a:xfrm>
+          <a:prstGeom prst="line">
+            <a:avLst/>
+          </a:prstGeom>
+          <a:noFill/>
+          <a:ln w="9525">
+            <a:solidFill>
+              <a:srgbClr val="D8DAD9"/>
+            </a:solidFill>
+            <a:prstDash val="solid"/>
+          </a:ln>
+        </p:spPr>
+      </p:sp>
+      <p:sp>
+        <p:nvSpPr>
+          <p:cNvPr id="24" name="Shape 22"/>
+          <p:cNvSpPr/>
+          <p:nvPr/>
+        </p:nvSpPr>
+        <p:spPr>
+          <a:xfrm>
+            <a:off x="6419088" y="3931920"/>
+            <a:ext cx="5074920" cy="0"/>
+          </a:xfrm>
+          <a:prstGeom prst="line">
+            <a:avLst/>
+          </a:prstGeom>
+          <a:noFill/>
+          <a:ln w="9525">
+            <a:solidFill>
+              <a:srgbClr val="D8DAD9"/>
+            </a:solidFill>
+            <a:prstDash val="solid"/>
+          </a:ln>
+        </p:spPr>
+      </p:sp>
+      <p:sp>
+        <p:nvSpPr>
+          <p:cNvPr id="25" name="Text 23"/>
+          <p:cNvSpPr txBox="1"/>
+          <p:nvPr/>
+        </p:nvSpPr>
+        <p:spPr>
+          <a:xfrm>
+            <a:off x="685800" y="4059936"/>
+            <a:ext cx="384048" cy="365760"/>
+          </a:xfrm>
+          <a:prstGeom prst="rect">
+            <a:avLst/>
+          </a:prstGeom>
+          <a:noFill/>
+          <a:ln/>
+        </p:spPr>
+        <p:txBody>
+          <a:bodyPr wrap="square" lIns="0" tIns="0" rIns="0" bIns="0" rtlCol="0" anchor="ctr"/>
+          <a:lstStyle/>
+          <a:p>
+            <a:pPr indent="0" marL="0">
+              <a:buNone/>
+            </a:pPr>
+            <a:r>
+              <a:rPr lang="en-US" sz="1400" b="1" dirty="0">
+                <a:solidFill>
+                  <a:srgbClr val="8C9094"/>
+                </a:solidFill>
+                <a:latin typeface="Calibri" pitchFamily="34" charset="0"/>
+                <a:ea typeface="Calibri" pitchFamily="34" charset="-122"/>
+                <a:cs typeface="Calibri" pitchFamily="34" charset="-120"/>
+              </a:rPr>
+              <a:t>d</a:t>
+            </a:r>
+            <a:endParaRPr lang="en-US" sz="1400" dirty="0"/>
+          </a:p>
+        </p:txBody>
+      </p:sp>
+      <p:sp>
+        <p:nvSpPr>
+          <p:cNvPr id="26" name="Text 24"/>
+          <p:cNvSpPr txBox="1"/>
+          <p:nvPr/>
+        </p:nvSpPr>
+        <p:spPr>
+          <a:xfrm>
+            <a:off x="1161288" y="4059936"/>
+            <a:ext cx="4599432" cy="365760"/>
+          </a:xfrm>
+          <a:prstGeom prst="rect">
+            <a:avLst/>
+          </a:prstGeom>
+          <a:noFill/>
+          <a:ln/>
+        </p:spPr>
+        <p:txBody>
+          <a:bodyPr wrap="square" lIns="0" tIns="0" rIns="0" bIns="0" rtlCol="0" anchor="ctr"/>
+          <a:lstStyle/>
+          <a:p>
+            <a:pPr indent="0" marL="0">
+              <a:buNone/>
+            </a:pPr>
+            <a:r>
+              <a:rPr lang="en-US" sz="1450" dirty="0">
+                <a:solidFill>
+                  <a:srgbClr val="1A1D20"/>
+                </a:solidFill>
+                <a:latin typeface="Calibri" pitchFamily="34" charset="0"/>
+                <a:ea typeface="Calibri" pitchFamily="34" charset="-122"/>
+                <a:cs typeface="Calibri" pitchFamily="34" charset="-120"/>
+              </a:rPr>
+              <a:t>Comparison against the benchmark formulation</a:t>
+            </a:r>
+            <a:endParaRPr lang="en-US" sz="1450" dirty="0"/>
+          </a:p>
+        </p:txBody>
+      </p:sp>
+      <p:sp>
+        <p:nvSpPr>
+          <p:cNvPr id="27" name="Text 25"/>
+          <p:cNvSpPr txBox="1"/>
+          <p:nvPr/>
+        </p:nvSpPr>
+        <p:spPr>
+          <a:xfrm>
+            <a:off x="6419088" y="4059936"/>
+            <a:ext cx="384048" cy="365760"/>
+          </a:xfrm>
+          <a:prstGeom prst="rect">
+            <a:avLst/>
+          </a:prstGeom>
+          <a:noFill/>
+          <a:ln/>
+        </p:spPr>
+        <p:txBody>
+          <a:bodyPr wrap="square" lIns="0" tIns="0" rIns="0" bIns="0" rtlCol="0" anchor="ctr"/>
+          <a:lstStyle/>
+          <a:p>
+            <a:pPr indent="0" marL="0">
+              <a:buNone/>
+            </a:pPr>
+            <a:r>
+              <a:rPr lang="en-US" sz="1400" b="1" dirty="0">
+                <a:solidFill>
+                  <a:srgbClr val="8C9094"/>
+                </a:solidFill>
+                <a:latin typeface="Calibri" pitchFamily="34" charset="0"/>
+                <a:ea typeface="Calibri" pitchFamily="34" charset="-122"/>
+                <a:cs typeface="Calibri" pitchFamily="34" charset="-120"/>
+              </a:rPr>
+              <a:t>d</a:t>
+            </a:r>
+            <a:endParaRPr lang="en-US" sz="1400" dirty="0"/>
+          </a:p>
+        </p:txBody>
+      </p:sp>
+      <p:sp>
+        <p:nvSpPr>
+          <p:cNvPr id="28" name="Text 26"/>
+          <p:cNvSpPr txBox="1"/>
+          <p:nvPr/>
+        </p:nvSpPr>
+        <p:spPr>
+          <a:xfrm>
+            <a:off x="6894576" y="4059936"/>
+            <a:ext cx="4599432" cy="365760"/>
+          </a:xfrm>
+          <a:prstGeom prst="rect">
+            <a:avLst/>
+          </a:prstGeom>
+          <a:noFill/>
+          <a:ln/>
+        </p:spPr>
+        <p:txBody>
+          <a:bodyPr wrap="square" lIns="0" tIns="0" rIns="0" bIns="0" rtlCol="0" anchor="ctr"/>
+          <a:lstStyle/>
+          <a:p>
+            <a:pPr indent="0" marL="0">
+              <a:buNone/>
+            </a:pPr>
+            <a:r>
+              <a:rPr lang="en-US" sz="1450" dirty="0">
+                <a:solidFill>
+                  <a:srgbClr val="1A1D20"/>
+                </a:solidFill>
+                <a:latin typeface="Calibri" pitchFamily="34" charset="0"/>
+                <a:ea typeface="Calibri" pitchFamily="34" charset="-122"/>
+                <a:cs typeface="Calibri" pitchFamily="34" charset="-120"/>
+              </a:rPr>
+              <a:t>Durability of editing</a:t>
+            </a:r>
+            <a:endParaRPr lang="en-US" sz="1450" dirty="0"/>
+          </a:p>
+        </p:txBody>
+      </p:sp>
+      <p:sp>
+        <p:nvSpPr>
+          <p:cNvPr id="29" name="Shape 27"/>
+          <p:cNvSpPr/>
+          <p:nvPr/>
+        </p:nvSpPr>
+        <p:spPr>
+          <a:xfrm>
+            <a:off x="685800" y="4590288"/>
+            <a:ext cx="5074920" cy="0"/>
+          </a:xfrm>
+          <a:prstGeom prst="line">
+            <a:avLst/>
+          </a:prstGeom>
+          <a:noFill/>
+          <a:ln w="9525">
+            <a:solidFill>
+              <a:srgbClr val="D8DAD9"/>
+            </a:solidFill>
+            <a:prstDash val="solid"/>
+          </a:ln>
+        </p:spPr>
+      </p:sp>
+      <p:sp>
+        <p:nvSpPr>
+          <p:cNvPr id="30" name="Shape 28"/>
+          <p:cNvSpPr/>
+          <p:nvPr/>
+        </p:nvSpPr>
+        <p:spPr>
+          <a:xfrm>
+            <a:off x="6419088" y="4590288"/>
+            <a:ext cx="5074920" cy="0"/>
+          </a:xfrm>
+          <a:prstGeom prst="line">
+            <a:avLst/>
+          </a:prstGeom>
+          <a:noFill/>
+          <a:ln w="9525">
+            <a:solidFill>
+              <a:srgbClr val="D8DAD9"/>
+            </a:solidFill>
+            <a:prstDash val="solid"/>
+          </a:ln>
+        </p:spPr>
+      </p:sp>
+      <p:sp>
+        <p:nvSpPr>
+          <p:cNvPr id="31" name="Text 29"/>
+          <p:cNvSpPr txBox="1"/>
+          <p:nvPr/>
+        </p:nvSpPr>
+        <p:spPr>
+          <a:xfrm>
+            <a:off x="685800" y="4718304"/>
+            <a:ext cx="384048" cy="365760"/>
+          </a:xfrm>
+          <a:prstGeom prst="rect">
+            <a:avLst/>
+          </a:prstGeom>
+          <a:noFill/>
+          <a:ln/>
+        </p:spPr>
+        <p:txBody>
+          <a:bodyPr wrap="square" lIns="0" tIns="0" rIns="0" bIns="0" rtlCol="0" anchor="ctr"/>
+          <a:lstStyle/>
+          <a:p>
+            <a:pPr indent="0" marL="0">
+              <a:buNone/>
+            </a:pPr>
+            <a:r>
+              <a:rPr lang="en-US" sz="1400" b="1" dirty="0">
+                <a:solidFill>
+                  <a:srgbClr val="8C9094"/>
+                </a:solidFill>
+                <a:latin typeface="Calibri" pitchFamily="34" charset="0"/>
+                <a:ea typeface="Calibri" pitchFamily="34" charset="-122"/>
+                <a:cs typeface="Calibri" pitchFamily="34" charset="-120"/>
+              </a:rPr>
+              <a:t>e</a:t>
+            </a:r>
+            <a:endParaRPr lang="en-US" sz="1400" dirty="0"/>
+          </a:p>
+        </p:txBody>
+      </p:sp>
+      <p:sp>
+        <p:nvSpPr>
+          <p:cNvPr id="32" name="Text 30"/>
+          <p:cNvSpPr txBox="1"/>
+          <p:nvPr/>
+        </p:nvSpPr>
+        <p:spPr>
+          <a:xfrm>
+            <a:off x="1161288" y="4718304"/>
+            <a:ext cx="4599432" cy="365760"/>
+          </a:xfrm>
+          <a:prstGeom prst="rect">
+            <a:avLst/>
+          </a:prstGeom>
+          <a:noFill/>
+          <a:ln/>
+        </p:spPr>
+        <p:txBody>
+          <a:bodyPr wrap="square" lIns="0" tIns="0" rIns="0" bIns="0" rtlCol="0" anchor="ctr"/>
+          <a:lstStyle/>
+          <a:p>
+            <a:pPr indent="0" marL="0">
+              <a:buNone/>
+            </a:pPr>
+            <a:r>
+              <a:rPr lang="en-US" sz="1450" dirty="0">
+                <a:solidFill>
+                  <a:srgbClr val="1A1D20"/>
+                </a:solidFill>
+                <a:latin typeface="Calibri" pitchFamily="34" charset="0"/>
+                <a:ea typeface="Calibri" pitchFamily="34" charset="-122"/>
+                <a:cs typeface="Calibri" pitchFamily="34" charset="-120"/>
+              </a:rPr>
+              <a:t>Tolerability</a:t>
+            </a:r>
+            <a:endParaRPr lang="en-US" sz="1450" dirty="0"/>
+          </a:p>
+        </p:txBody>
+      </p:sp>
+      <p:sp>
+        <p:nvSpPr>
+          <p:cNvPr id="33" name="Text 31"/>
+          <p:cNvSpPr txBox="1"/>
+          <p:nvPr/>
+        </p:nvSpPr>
+        <p:spPr>
+          <a:xfrm>
+            <a:off x="6419088" y="4718304"/>
+            <a:ext cx="384048" cy="365760"/>
+          </a:xfrm>
+          <a:prstGeom prst="rect">
+            <a:avLst/>
+          </a:prstGeom>
+          <a:noFill/>
+          <a:ln/>
+        </p:spPr>
+        <p:txBody>
+          <a:bodyPr wrap="square" lIns="0" tIns="0" rIns="0" bIns="0" rtlCol="0" anchor="ctr"/>
+          <a:lstStyle/>
+          <a:p>
+            <a:pPr indent="0" marL="0">
+              <a:buNone/>
+            </a:pPr>
+            <a:r>
+              <a:rPr lang="en-US" sz="1400" b="1" dirty="0">
+                <a:solidFill>
+                  <a:srgbClr val="8C9094"/>
+                </a:solidFill>
+                <a:latin typeface="Calibri" pitchFamily="34" charset="0"/>
+                <a:ea typeface="Calibri" pitchFamily="34" charset="-122"/>
+                <a:cs typeface="Calibri" pitchFamily="34" charset="-120"/>
+              </a:rPr>
+              <a:t>e</a:t>
+            </a:r>
+            <a:endParaRPr lang="en-US" sz="1400" dirty="0"/>
+          </a:p>
+        </p:txBody>
+      </p:sp>
+      <p:sp>
+        <p:nvSpPr>
+          <p:cNvPr id="34" name="Text 32"/>
+          <p:cNvSpPr txBox="1"/>
+          <p:nvPr/>
+        </p:nvSpPr>
+        <p:spPr>
+          <a:xfrm>
+            <a:off x="6894576" y="4718304"/>
+            <a:ext cx="4599432" cy="365760"/>
+          </a:xfrm>
+          <a:prstGeom prst="rect">
+            <a:avLst/>
+          </a:prstGeom>
+          <a:noFill/>
+          <a:ln/>
+        </p:spPr>
+        <p:txBody>
+          <a:bodyPr wrap="square" lIns="0" tIns="0" rIns="0" bIns="0" rtlCol="0" anchor="ctr"/>
+          <a:lstStyle/>
+          <a:p>
+            <a:pPr indent="0" marL="0">
+              <a:buNone/>
+            </a:pPr>
+            <a:r>
+              <a:rPr lang="en-US" sz="1450" dirty="0">
+                <a:solidFill>
+                  <a:srgbClr val="1A1D20"/>
+                </a:solidFill>
+                <a:latin typeface="Calibri" pitchFamily="34" charset="0"/>
+                <a:ea typeface="Calibri" pitchFamily="34" charset="-122"/>
+                <a:cs typeface="Calibri" pitchFamily="34" charset="-120"/>
+              </a:rPr>
+              <a:t>Tolerability</a:t>
+            </a:r>
+            <a:endParaRPr lang="en-US" sz="1450" dirty="0"/>
+          </a:p>
+        </p:txBody>
+      </p:sp>
+      <p:sp>
+        <p:nvSpPr>
+          <p:cNvPr id="35" name="Shape 33"/>
+          <p:cNvSpPr/>
+          <p:nvPr/>
+        </p:nvSpPr>
+        <p:spPr>
+          <a:xfrm>
+            <a:off x="685800" y="5248656"/>
+            <a:ext cx="5074920" cy="0"/>
+          </a:xfrm>
+          <a:prstGeom prst="line">
+            <a:avLst/>
+          </a:prstGeom>
+          <a:noFill/>
+          <a:ln w="9525">
+            <a:solidFill>
+              <a:srgbClr val="D8DAD9"/>
+            </a:solidFill>
+            <a:prstDash val="solid"/>
+          </a:ln>
+        </p:spPr>
+      </p:sp>
+      <p:sp>
+        <p:nvSpPr>
+          <p:cNvPr id="36" name="Shape 34"/>
+          <p:cNvSpPr/>
+          <p:nvPr/>
+        </p:nvSpPr>
+        <p:spPr>
+          <a:xfrm>
+            <a:off x="6419088" y="5248656"/>
+            <a:ext cx="5074920" cy="0"/>
+          </a:xfrm>
+          <a:prstGeom prst="line">
+            <a:avLst/>
+          </a:prstGeom>
+          <a:noFill/>
+          <a:ln w="9525">
+            <a:solidFill>
+              <a:srgbClr val="D8DAD9"/>
+            </a:solidFill>
+            <a:prstDash val="solid"/>
+          </a:ln>
+        </p:spPr>
+      </p:sp>
+      <p:sp>
+        <p:nvSpPr>
+          <p:cNvPr id="37" name="Text 35"/>
+          <p:cNvSpPr txBox="1"/>
+          <p:nvPr/>
+        </p:nvSpPr>
+        <p:spPr>
+          <a:xfrm>
+            <a:off x="685800" y="5577840"/>
+            <a:ext cx="10607040" cy="512064"/>
+          </a:xfrm>
+          <a:prstGeom prst="rect">
+            <a:avLst/>
+          </a:prstGeom>
+          <a:noFill/>
+          <a:ln/>
+        </p:spPr>
+        <p:txBody>
+          <a:bodyPr wrap="square" lIns="0" tIns="0" rIns="0" bIns="0" rtlCol="0" anchor="t"/>
+          <a:lstStyle/>
+          <a:p>
+            <a:pPr indent="0" marL="0">
+              <a:lnSpc>
+                <a:spcPct val="115000"/>
+              </a:lnSpc>
+              <a:buNone/>
+            </a:pPr>
+            <a:r>
+              <a:rPr lang="en-US" sz="1250" dirty="0">
+                <a:solidFill>
+                  <a:srgbClr val="8C9094"/>
+                </a:solidFill>
+                <a:latin typeface="Calibri" pitchFamily="34" charset="0"/>
+                <a:ea typeface="Calibri" pitchFamily="34" charset="-122"/>
+                <a:cs typeface="Calibri" pitchFamily="34" charset="-120"/>
+              </a:rPr>
+              <a:t>This is the only figure where the two programmes stop sharing a shape: one ends in an immune readout, the other in an editing readout.</a:t>
+            </a:r>
+            <a:endParaRPr lang="en-US" sz="1250" dirty="0"/>
+          </a:p>
+        </p:txBody>
+      </p:sp>
+    </p:spTree>
+  </p:cSld>
+  <p:clrMapOvr>
+    <a:masterClrMapping/>
+  </p:clrMapOvr>
+</p:sld>
+</file>
+
 <file path=ppt/slides/slide2.xml><?xml version="1.0" encoding="utf-8"?>
 <p:sld xmlns:a="http://schemas.openxmlformats.org/drawingml/2006/main" xmlns:r="http://schemas.openxmlformats.org/officeDocument/2006/relationships" xmlns:p="http://schemas.openxmlformats.org/presentationml/2006/main">
   <p:cSld name="Slide 2">
@@ -5475,6 +9013,2624 @@
                 <a:cs typeface="Calibri" pitchFamily="34" charset="-120"/>
               </a:rPr>
               <a:t>Generation stays inside the established family throughout, so a hit is immediately actionable in the existing synthesis programme.</a:t>
+            </a:r>
+            <a:endParaRPr lang="en-US" sz="1250" dirty="0"/>
+          </a:p>
+        </p:txBody>
+      </p:sp>
+    </p:spTree>
+  </p:cSld>
+  <p:clrMapOvr>
+    <a:masterClrMapping/>
+  </p:clrMapOvr>
+</p:sld>
+</file>
+
+<file path=ppt/slides/slide7.xml><?xml version="1.0" encoding="utf-8"?>
+<p:sld xmlns:a="http://schemas.openxmlformats.org/drawingml/2006/main" xmlns:r="http://schemas.openxmlformats.org/officeDocument/2006/relationships" xmlns:p="http://schemas.openxmlformats.org/presentationml/2006/main">
+  <p:cSld name="Slide 7">
+    <p:bg>
+      <p:bgPr>
+        <a:solidFill>
+          <a:srgbClr val="FFFFFF"/>
+        </a:solidFill>
+      </p:bgPr>
+    </p:bg>
+    <p:spTree>
+      <p:nvGrpSpPr>
+        <p:cNvPr id="1" name=""/>
+        <p:cNvGrpSpPr/>
+        <p:nvPr/>
+      </p:nvGrpSpPr>
+      <p:grpSpPr>
+        <a:xfrm>
+          <a:off x="0" y="0"/>
+          <a:ext cx="0" cy="0"/>
+          <a:chOff x="0" y="0"/>
+          <a:chExt cx="0" cy="0"/>
+        </a:xfrm>
+      </p:grpSpPr>
+      <p:sp>
+        <p:nvSpPr>
+          <p:cNvPr id="2" name="Text 0"/>
+          <p:cNvSpPr txBox="1"/>
+          <p:nvPr/>
+        </p:nvSpPr>
+        <p:spPr>
+          <a:xfrm>
+            <a:off x="685800" y="530352"/>
+            <a:ext cx="10820095" cy="1060704"/>
+          </a:xfrm>
+          <a:prstGeom prst="rect">
+            <a:avLst/>
+          </a:prstGeom>
+          <a:noFill/>
+          <a:ln/>
+        </p:spPr>
+        <p:txBody>
+          <a:bodyPr wrap="square" lIns="0" tIns="0" rIns="0" bIns="0" rtlCol="0" anchor="t"/>
+          <a:lstStyle/>
+          <a:p>
+            <a:pPr indent="0" marL="0">
+              <a:buNone/>
+            </a:pPr>
+            <a:r>
+              <a:rPr lang="en-US" sz="3200" b="1" dirty="0">
+                <a:solidFill>
+                  <a:srgbClr val="1A1D20"/>
+                </a:solidFill>
+                <a:latin typeface="Calibri" pitchFamily="34" charset="0"/>
+                <a:ea typeface="Calibri" pitchFamily="34" charset="-122"/>
+                <a:cs typeface="Calibri" pitchFamily="34" charset="-120"/>
+              </a:rPr>
+              <a:t>Proposed figure architecture</a:t>
+            </a:r>
+            <a:endParaRPr lang="en-US" sz="3200" dirty="0"/>
+          </a:p>
+        </p:txBody>
+      </p:sp>
+      <p:sp>
+        <p:nvSpPr>
+          <p:cNvPr id="3" name="Shape 1"/>
+          <p:cNvSpPr/>
+          <p:nvPr/>
+        </p:nvSpPr>
+        <p:spPr>
+          <a:xfrm>
+            <a:off x="594360" y="2331720"/>
+            <a:ext cx="1901952" cy="1335024"/>
+          </a:xfrm>
+          <a:prstGeom prst="rect">
+            <a:avLst/>
+          </a:prstGeom>
+          <a:solidFill>
+            <a:srgbClr val="FFFFFF"/>
+          </a:solidFill>
+          <a:ln w="12700">
+            <a:solidFill>
+              <a:srgbClr val="D8DAD9"/>
+            </a:solidFill>
+            <a:prstDash val="solid"/>
+          </a:ln>
+        </p:spPr>
+      </p:sp>
+      <p:sp>
+        <p:nvSpPr>
+          <p:cNvPr id="4" name="Text 2"/>
+          <p:cNvSpPr txBox="1"/>
+          <p:nvPr/>
+        </p:nvSpPr>
+        <p:spPr>
+          <a:xfrm>
+            <a:off x="722376" y="2468880"/>
+            <a:ext cx="1645920" cy="292608"/>
+          </a:xfrm>
+          <a:prstGeom prst="rect">
+            <a:avLst/>
+          </a:prstGeom>
+          <a:noFill/>
+          <a:ln/>
+        </p:spPr>
+        <p:txBody>
+          <a:bodyPr wrap="square" lIns="0" tIns="0" rIns="0" bIns="0" rtlCol="0" anchor="t"/>
+          <a:lstStyle/>
+          <a:p>
+            <a:pPr algn="l" indent="0" marL="0">
+              <a:buNone/>
+            </a:pPr>
+            <a:r>
+              <a:rPr lang="en-US" sz="1500" b="1" dirty="0">
+                <a:solidFill>
+                  <a:srgbClr val="1A1D20"/>
+                </a:solidFill>
+                <a:latin typeface="Calibri" pitchFamily="34" charset="0"/>
+                <a:ea typeface="Calibri" pitchFamily="34" charset="-122"/>
+                <a:cs typeface="Calibri" pitchFamily="34" charset="-120"/>
+              </a:rPr>
+              <a:t>Figure 1</a:t>
+            </a:r>
+            <a:endParaRPr lang="en-US" sz="1500" dirty="0"/>
+          </a:p>
+        </p:txBody>
+      </p:sp>
+      <p:sp>
+        <p:nvSpPr>
+          <p:cNvPr id="5" name="Text 3"/>
+          <p:cNvSpPr txBox="1"/>
+          <p:nvPr/>
+        </p:nvSpPr>
+        <p:spPr>
+          <a:xfrm>
+            <a:off x="722376" y="2816352"/>
+            <a:ext cx="1645920" cy="740664"/>
+          </a:xfrm>
+          <a:prstGeom prst="rect">
+            <a:avLst/>
+          </a:prstGeom>
+          <a:noFill/>
+          <a:ln/>
+        </p:spPr>
+        <p:txBody>
+          <a:bodyPr wrap="square" lIns="0" tIns="0" rIns="0" bIns="0" rtlCol="0" anchor="t"/>
+          <a:lstStyle/>
+          <a:p>
+            <a:pPr algn="l" indent="0" marL="0">
+              <a:lnSpc>
+                <a:spcPct val="110000"/>
+              </a:lnSpc>
+              <a:buNone/>
+            </a:pPr>
+            <a:r>
+              <a:rPr lang="en-US" sz="1200" dirty="0">
+                <a:solidFill>
+                  <a:srgbClr val="8C9094"/>
+                </a:solidFill>
+                <a:latin typeface="Calibri" pitchFamily="34" charset="0"/>
+                <a:ea typeface="Calibri" pitchFamily="34" charset="-122"/>
+                <a:cs typeface="Calibri" pitchFamily="34" charset="-120"/>
+              </a:rPr>
+              <a:t>The generative model</a:t>
+            </a:r>
+            <a:endParaRPr lang="en-US" sz="1200" dirty="0"/>
+          </a:p>
+        </p:txBody>
+      </p:sp>
+      <p:sp>
+        <p:nvSpPr>
+          <p:cNvPr id="6" name="Shape 4"/>
+          <p:cNvSpPr/>
+          <p:nvPr/>
+        </p:nvSpPr>
+        <p:spPr>
+          <a:xfrm>
+            <a:off x="2542032" y="2999232"/>
+            <a:ext cx="274320" cy="0"/>
+          </a:xfrm>
+          <a:prstGeom prst="line">
+            <a:avLst/>
+          </a:prstGeom>
+          <a:noFill/>
+          <a:ln w="12700">
+            <a:solidFill>
+              <a:srgbClr val="8C9094"/>
+            </a:solidFill>
+            <a:prstDash val="solid"/>
+            <a:tailEnd type="triangle"/>
+          </a:ln>
+        </p:spPr>
+      </p:sp>
+      <p:sp>
+        <p:nvSpPr>
+          <p:cNvPr id="7" name="Shape 5"/>
+          <p:cNvSpPr/>
+          <p:nvPr/>
+        </p:nvSpPr>
+        <p:spPr>
+          <a:xfrm>
+            <a:off x="2862072" y="2331720"/>
+            <a:ext cx="1901952" cy="1335024"/>
+          </a:xfrm>
+          <a:prstGeom prst="rect">
+            <a:avLst/>
+          </a:prstGeom>
+          <a:solidFill>
+            <a:srgbClr val="FFFFFF"/>
+          </a:solidFill>
+          <a:ln w="12700">
+            <a:solidFill>
+              <a:srgbClr val="D8DAD9"/>
+            </a:solidFill>
+            <a:prstDash val="solid"/>
+          </a:ln>
+        </p:spPr>
+      </p:sp>
+      <p:sp>
+        <p:nvSpPr>
+          <p:cNvPr id="8" name="Text 6"/>
+          <p:cNvSpPr txBox="1"/>
+          <p:nvPr/>
+        </p:nvSpPr>
+        <p:spPr>
+          <a:xfrm>
+            <a:off x="2990088" y="2468880"/>
+            <a:ext cx="1645920" cy="292608"/>
+          </a:xfrm>
+          <a:prstGeom prst="rect">
+            <a:avLst/>
+          </a:prstGeom>
+          <a:noFill/>
+          <a:ln/>
+        </p:spPr>
+        <p:txBody>
+          <a:bodyPr wrap="square" lIns="0" tIns="0" rIns="0" bIns="0" rtlCol="0" anchor="t"/>
+          <a:lstStyle/>
+          <a:p>
+            <a:pPr algn="l" indent="0" marL="0">
+              <a:buNone/>
+            </a:pPr>
+            <a:r>
+              <a:rPr lang="en-US" sz="1500" b="1" dirty="0">
+                <a:solidFill>
+                  <a:srgbClr val="1A1D20"/>
+                </a:solidFill>
+                <a:latin typeface="Calibri" pitchFamily="34" charset="0"/>
+                <a:ea typeface="Calibri" pitchFamily="34" charset="-122"/>
+                <a:cs typeface="Calibri" pitchFamily="34" charset="-120"/>
+              </a:rPr>
+              <a:t>Figure 2</a:t>
+            </a:r>
+            <a:endParaRPr lang="en-US" sz="1500" dirty="0"/>
+          </a:p>
+        </p:txBody>
+      </p:sp>
+      <p:sp>
+        <p:nvSpPr>
+          <p:cNvPr id="9" name="Text 7"/>
+          <p:cNvSpPr txBox="1"/>
+          <p:nvPr/>
+        </p:nvSpPr>
+        <p:spPr>
+          <a:xfrm>
+            <a:off x="2990088" y="2816352"/>
+            <a:ext cx="1645920" cy="740664"/>
+          </a:xfrm>
+          <a:prstGeom prst="rect">
+            <a:avLst/>
+          </a:prstGeom>
+          <a:noFill/>
+          <a:ln/>
+        </p:spPr>
+        <p:txBody>
+          <a:bodyPr wrap="square" lIns="0" tIns="0" rIns="0" bIns="0" rtlCol="0" anchor="t"/>
+          <a:lstStyle/>
+          <a:p>
+            <a:pPr algn="l" indent="0" marL="0">
+              <a:lnSpc>
+                <a:spcPct val="110000"/>
+              </a:lnSpc>
+              <a:buNone/>
+            </a:pPr>
+            <a:r>
+              <a:rPr lang="en-US" sz="1200" dirty="0">
+                <a:solidFill>
+                  <a:srgbClr val="8C9094"/>
+                </a:solidFill>
+                <a:latin typeface="Calibri" pitchFamily="34" charset="0"/>
+                <a:ea typeface="Calibri" pitchFamily="34" charset="-122"/>
+                <a:cs typeface="Calibri" pitchFamily="34" charset="-120"/>
+              </a:rPr>
+              <a:t>Computational validation</a:t>
+            </a:r>
+            <a:endParaRPr lang="en-US" sz="1200" dirty="0"/>
+          </a:p>
+        </p:txBody>
+      </p:sp>
+      <p:sp>
+        <p:nvSpPr>
+          <p:cNvPr id="10" name="Shape 8"/>
+          <p:cNvSpPr/>
+          <p:nvPr/>
+        </p:nvSpPr>
+        <p:spPr>
+          <a:xfrm>
+            <a:off x="4809744" y="2999232"/>
+            <a:ext cx="274320" cy="0"/>
+          </a:xfrm>
+          <a:prstGeom prst="line">
+            <a:avLst/>
+          </a:prstGeom>
+          <a:noFill/>
+          <a:ln w="12700">
+            <a:solidFill>
+              <a:srgbClr val="8C9094"/>
+            </a:solidFill>
+            <a:prstDash val="solid"/>
+            <a:tailEnd type="triangle"/>
+          </a:ln>
+        </p:spPr>
+      </p:sp>
+      <p:sp>
+        <p:nvSpPr>
+          <p:cNvPr id="11" name="Shape 9"/>
+          <p:cNvSpPr/>
+          <p:nvPr/>
+        </p:nvSpPr>
+        <p:spPr>
+          <a:xfrm>
+            <a:off x="5129784" y="2331720"/>
+            <a:ext cx="1901952" cy="1335024"/>
+          </a:xfrm>
+          <a:prstGeom prst="rect">
+            <a:avLst/>
+          </a:prstGeom>
+          <a:solidFill>
+            <a:srgbClr val="FFFFFF"/>
+          </a:solidFill>
+          <a:ln w="12700">
+            <a:solidFill>
+              <a:srgbClr val="D8DAD9"/>
+            </a:solidFill>
+            <a:prstDash val="solid"/>
+          </a:ln>
+        </p:spPr>
+      </p:sp>
+      <p:sp>
+        <p:nvSpPr>
+          <p:cNvPr id="12" name="Text 10"/>
+          <p:cNvSpPr txBox="1"/>
+          <p:nvPr/>
+        </p:nvSpPr>
+        <p:spPr>
+          <a:xfrm>
+            <a:off x="5257800" y="2468880"/>
+            <a:ext cx="1645920" cy="292608"/>
+          </a:xfrm>
+          <a:prstGeom prst="rect">
+            <a:avLst/>
+          </a:prstGeom>
+          <a:noFill/>
+          <a:ln/>
+        </p:spPr>
+        <p:txBody>
+          <a:bodyPr wrap="square" lIns="0" tIns="0" rIns="0" bIns="0" rtlCol="0" anchor="t"/>
+          <a:lstStyle/>
+          <a:p>
+            <a:pPr algn="l" indent="0" marL="0">
+              <a:buNone/>
+            </a:pPr>
+            <a:r>
+              <a:rPr lang="en-US" sz="1500" b="1" dirty="0">
+                <a:solidFill>
+                  <a:srgbClr val="1A1D20"/>
+                </a:solidFill>
+                <a:latin typeface="Calibri" pitchFamily="34" charset="0"/>
+                <a:ea typeface="Calibri" pitchFamily="34" charset="-122"/>
+                <a:cs typeface="Calibri" pitchFamily="34" charset="-120"/>
+              </a:rPr>
+              <a:t>Figure 3</a:t>
+            </a:r>
+            <a:endParaRPr lang="en-US" sz="1500" dirty="0"/>
+          </a:p>
+        </p:txBody>
+      </p:sp>
+      <p:sp>
+        <p:nvSpPr>
+          <p:cNvPr id="13" name="Text 11"/>
+          <p:cNvSpPr txBox="1"/>
+          <p:nvPr/>
+        </p:nvSpPr>
+        <p:spPr>
+          <a:xfrm>
+            <a:off x="5257800" y="2816352"/>
+            <a:ext cx="1645920" cy="740664"/>
+          </a:xfrm>
+          <a:prstGeom prst="rect">
+            <a:avLst/>
+          </a:prstGeom>
+          <a:noFill/>
+          <a:ln/>
+        </p:spPr>
+        <p:txBody>
+          <a:bodyPr wrap="square" lIns="0" tIns="0" rIns="0" bIns="0" rtlCol="0" anchor="t"/>
+          <a:lstStyle/>
+          <a:p>
+            <a:pPr algn="l" indent="0" marL="0">
+              <a:lnSpc>
+                <a:spcPct val="110000"/>
+              </a:lnSpc>
+              <a:buNone/>
+            </a:pPr>
+            <a:r>
+              <a:rPr lang="en-US" sz="1200" dirty="0">
+                <a:solidFill>
+                  <a:srgbClr val="8C9094"/>
+                </a:solidFill>
+                <a:latin typeface="Calibri" pitchFamily="34" charset="0"/>
+                <a:ea typeface="Calibri" pitchFamily="34" charset="-122"/>
+                <a:cs typeface="Calibri" pitchFamily="34" charset="-120"/>
+              </a:rPr>
+              <a:t>Synthesis, formulation, characterisation</a:t>
+            </a:r>
+            <a:endParaRPr lang="en-US" sz="1200" dirty="0"/>
+          </a:p>
+        </p:txBody>
+      </p:sp>
+      <p:sp>
+        <p:nvSpPr>
+          <p:cNvPr id="14" name="Shape 12"/>
+          <p:cNvSpPr/>
+          <p:nvPr/>
+        </p:nvSpPr>
+        <p:spPr>
+          <a:xfrm>
+            <a:off x="7077456" y="2999232"/>
+            <a:ext cx="274320" cy="0"/>
+          </a:xfrm>
+          <a:prstGeom prst="line">
+            <a:avLst/>
+          </a:prstGeom>
+          <a:noFill/>
+          <a:ln w="12700">
+            <a:solidFill>
+              <a:srgbClr val="8C9094"/>
+            </a:solidFill>
+            <a:prstDash val="solid"/>
+            <a:tailEnd type="triangle"/>
+          </a:ln>
+        </p:spPr>
+      </p:sp>
+      <p:sp>
+        <p:nvSpPr>
+          <p:cNvPr id="15" name="Shape 13"/>
+          <p:cNvSpPr/>
+          <p:nvPr/>
+        </p:nvSpPr>
+        <p:spPr>
+          <a:xfrm>
+            <a:off x="7397496" y="2331720"/>
+            <a:ext cx="1901952" cy="1335024"/>
+          </a:xfrm>
+          <a:prstGeom prst="rect">
+            <a:avLst/>
+          </a:prstGeom>
+          <a:solidFill>
+            <a:srgbClr val="FFFFFF"/>
+          </a:solidFill>
+          <a:ln w="12700">
+            <a:solidFill>
+              <a:srgbClr val="D8DAD9"/>
+            </a:solidFill>
+            <a:prstDash val="solid"/>
+          </a:ln>
+        </p:spPr>
+      </p:sp>
+      <p:sp>
+        <p:nvSpPr>
+          <p:cNvPr id="16" name="Text 14"/>
+          <p:cNvSpPr txBox="1"/>
+          <p:nvPr/>
+        </p:nvSpPr>
+        <p:spPr>
+          <a:xfrm>
+            <a:off x="7525512" y="2468880"/>
+            <a:ext cx="1645920" cy="292608"/>
+          </a:xfrm>
+          <a:prstGeom prst="rect">
+            <a:avLst/>
+          </a:prstGeom>
+          <a:noFill/>
+          <a:ln/>
+        </p:spPr>
+        <p:txBody>
+          <a:bodyPr wrap="square" lIns="0" tIns="0" rIns="0" bIns="0" rtlCol="0" anchor="t"/>
+          <a:lstStyle/>
+          <a:p>
+            <a:pPr algn="l" indent="0" marL="0">
+              <a:buNone/>
+            </a:pPr>
+            <a:r>
+              <a:rPr lang="en-US" sz="1500" b="1" dirty="0">
+                <a:solidFill>
+                  <a:srgbClr val="1A1D20"/>
+                </a:solidFill>
+                <a:latin typeface="Calibri" pitchFamily="34" charset="0"/>
+                <a:ea typeface="Calibri" pitchFamily="34" charset="-122"/>
+                <a:cs typeface="Calibri" pitchFamily="34" charset="-120"/>
+              </a:rPr>
+              <a:t>Figure 4</a:t>
+            </a:r>
+            <a:endParaRPr lang="en-US" sz="1500" dirty="0"/>
+          </a:p>
+        </p:txBody>
+      </p:sp>
+      <p:sp>
+        <p:nvSpPr>
+          <p:cNvPr id="17" name="Text 15"/>
+          <p:cNvSpPr txBox="1"/>
+          <p:nvPr/>
+        </p:nvSpPr>
+        <p:spPr>
+          <a:xfrm>
+            <a:off x="7525512" y="2816352"/>
+            <a:ext cx="1645920" cy="740664"/>
+          </a:xfrm>
+          <a:prstGeom prst="rect">
+            <a:avLst/>
+          </a:prstGeom>
+          <a:noFill/>
+          <a:ln/>
+        </p:spPr>
+        <p:txBody>
+          <a:bodyPr wrap="square" lIns="0" tIns="0" rIns="0" bIns="0" rtlCol="0" anchor="t"/>
+          <a:lstStyle/>
+          <a:p>
+            <a:pPr algn="l" indent="0" marL="0">
+              <a:lnSpc>
+                <a:spcPct val="110000"/>
+              </a:lnSpc>
+              <a:buNone/>
+            </a:pPr>
+            <a:r>
+              <a:rPr lang="en-US" sz="1200" dirty="0">
+                <a:solidFill>
+                  <a:srgbClr val="8C9094"/>
+                </a:solidFill>
+                <a:latin typeface="Calibri" pitchFamily="34" charset="0"/>
+                <a:ea typeface="Calibri" pitchFamily="34" charset="-122"/>
+                <a:cs typeface="Calibri" pitchFamily="34" charset="-120"/>
+              </a:rPr>
+              <a:t>In vitro and in vivo reporter</a:t>
+            </a:r>
+            <a:endParaRPr lang="en-US" sz="1200" dirty="0"/>
+          </a:p>
+        </p:txBody>
+      </p:sp>
+      <p:sp>
+        <p:nvSpPr>
+          <p:cNvPr id="18" name="Shape 16"/>
+          <p:cNvSpPr/>
+          <p:nvPr/>
+        </p:nvSpPr>
+        <p:spPr>
+          <a:xfrm>
+            <a:off x="9345168" y="2999232"/>
+            <a:ext cx="274320" cy="0"/>
+          </a:xfrm>
+          <a:prstGeom prst="line">
+            <a:avLst/>
+          </a:prstGeom>
+          <a:noFill/>
+          <a:ln w="12700">
+            <a:solidFill>
+              <a:srgbClr val="8C9094"/>
+            </a:solidFill>
+            <a:prstDash val="solid"/>
+            <a:tailEnd type="triangle"/>
+          </a:ln>
+        </p:spPr>
+      </p:sp>
+      <p:sp>
+        <p:nvSpPr>
+          <p:cNvPr id="19" name="Shape 17"/>
+          <p:cNvSpPr/>
+          <p:nvPr/>
+        </p:nvSpPr>
+        <p:spPr>
+          <a:xfrm>
+            <a:off x="9665208" y="2331720"/>
+            <a:ext cx="1901952" cy="1335024"/>
+          </a:xfrm>
+          <a:prstGeom prst="rect">
+            <a:avLst/>
+          </a:prstGeom>
+          <a:solidFill>
+            <a:srgbClr val="FFFFFF"/>
+          </a:solidFill>
+          <a:ln w="12700">
+            <a:solidFill>
+              <a:srgbClr val="D8DAD9"/>
+            </a:solidFill>
+            <a:prstDash val="solid"/>
+          </a:ln>
+        </p:spPr>
+      </p:sp>
+      <p:sp>
+        <p:nvSpPr>
+          <p:cNvPr id="20" name="Text 18"/>
+          <p:cNvSpPr txBox="1"/>
+          <p:nvPr/>
+        </p:nvSpPr>
+        <p:spPr>
+          <a:xfrm>
+            <a:off x="9793224" y="2468880"/>
+            <a:ext cx="1645920" cy="292608"/>
+          </a:xfrm>
+          <a:prstGeom prst="rect">
+            <a:avLst/>
+          </a:prstGeom>
+          <a:noFill/>
+          <a:ln/>
+        </p:spPr>
+        <p:txBody>
+          <a:bodyPr wrap="square" lIns="0" tIns="0" rIns="0" bIns="0" rtlCol="0" anchor="t"/>
+          <a:lstStyle/>
+          <a:p>
+            <a:pPr algn="l" indent="0" marL="0">
+              <a:buNone/>
+            </a:pPr>
+            <a:r>
+              <a:rPr lang="en-US" sz="1500" b="1" dirty="0">
+                <a:solidFill>
+                  <a:srgbClr val="1A1D20"/>
+                </a:solidFill>
+                <a:latin typeface="Calibri" pitchFamily="34" charset="0"/>
+                <a:ea typeface="Calibri" pitchFamily="34" charset="-122"/>
+                <a:cs typeface="Calibri" pitchFamily="34" charset="-120"/>
+              </a:rPr>
+              <a:t>Figure 5</a:t>
+            </a:r>
+            <a:endParaRPr lang="en-US" sz="1500" dirty="0"/>
+          </a:p>
+        </p:txBody>
+      </p:sp>
+      <p:sp>
+        <p:nvSpPr>
+          <p:cNvPr id="21" name="Text 19"/>
+          <p:cNvSpPr txBox="1"/>
+          <p:nvPr/>
+        </p:nvSpPr>
+        <p:spPr>
+          <a:xfrm>
+            <a:off x="9793224" y="2816352"/>
+            <a:ext cx="1645920" cy="740664"/>
+          </a:xfrm>
+          <a:prstGeom prst="rect">
+            <a:avLst/>
+          </a:prstGeom>
+          <a:noFill/>
+          <a:ln/>
+        </p:spPr>
+        <p:txBody>
+          <a:bodyPr wrap="square" lIns="0" tIns="0" rIns="0" bIns="0" rtlCol="0" anchor="t"/>
+          <a:lstStyle/>
+          <a:p>
+            <a:pPr algn="l" indent="0" marL="0">
+              <a:lnSpc>
+                <a:spcPct val="110000"/>
+              </a:lnSpc>
+              <a:buNone/>
+            </a:pPr>
+            <a:r>
+              <a:rPr lang="en-US" sz="1200" dirty="0">
+                <a:solidFill>
+                  <a:srgbClr val="8C9094"/>
+                </a:solidFill>
+                <a:latin typeface="Calibri" pitchFamily="34" charset="0"/>
+                <a:ea typeface="Calibri" pitchFamily="34" charset="-122"/>
+                <a:cs typeface="Calibri" pitchFamily="34" charset="-120"/>
+              </a:rPr>
+              <a:t>Application study</a:t>
+            </a:r>
+            <a:endParaRPr lang="en-US" sz="1200" dirty="0"/>
+          </a:p>
+        </p:txBody>
+      </p:sp>
+      <p:sp>
+        <p:nvSpPr>
+          <p:cNvPr id="22" name="Text 20"/>
+          <p:cNvSpPr txBox="1"/>
+          <p:nvPr/>
+        </p:nvSpPr>
+        <p:spPr>
+          <a:xfrm>
+            <a:off x="594360" y="4050792"/>
+            <a:ext cx="4169664" cy="274320"/>
+          </a:xfrm>
+          <a:prstGeom prst="rect">
+            <a:avLst/>
+          </a:prstGeom>
+          <a:noFill/>
+          <a:ln/>
+        </p:spPr>
+        <p:txBody>
+          <a:bodyPr wrap="square" lIns="0" tIns="0" rIns="0" bIns="0" rtlCol="0" anchor="ctr"/>
+          <a:lstStyle/>
+          <a:p>
+            <a:pPr indent="0" marL="0">
+              <a:buNone/>
+            </a:pPr>
+            <a:r>
+              <a:rPr lang="en-US" sz="1300" dirty="0">
+                <a:solidFill>
+                  <a:srgbClr val="8C9094"/>
+                </a:solidFill>
+                <a:latin typeface="Calibri" pitchFamily="34" charset="0"/>
+                <a:ea typeface="Calibri" pitchFamily="34" charset="-122"/>
+                <a:cs typeface="Calibri" pitchFamily="34" charset="-120"/>
+              </a:rPr>
+              <a:t>computational</a:t>
+            </a:r>
+            <a:endParaRPr lang="en-US" sz="1300" dirty="0"/>
+          </a:p>
+        </p:txBody>
+      </p:sp>
+      <p:sp>
+        <p:nvSpPr>
+          <p:cNvPr id="23" name="Text 21"/>
+          <p:cNvSpPr txBox="1"/>
+          <p:nvPr/>
+        </p:nvSpPr>
+        <p:spPr>
+          <a:xfrm>
+            <a:off x="5129784" y="4050792"/>
+            <a:ext cx="4169664" cy="274320"/>
+          </a:xfrm>
+          <a:prstGeom prst="rect">
+            <a:avLst/>
+          </a:prstGeom>
+          <a:noFill/>
+          <a:ln/>
+        </p:spPr>
+        <p:txBody>
+          <a:bodyPr wrap="square" lIns="0" tIns="0" rIns="0" bIns="0" rtlCol="0" anchor="ctr"/>
+          <a:lstStyle/>
+          <a:p>
+            <a:pPr indent="0" marL="0">
+              <a:buNone/>
+            </a:pPr>
+            <a:r>
+              <a:rPr lang="en-US" sz="1300" dirty="0">
+                <a:solidFill>
+                  <a:srgbClr val="8C9094"/>
+                </a:solidFill>
+                <a:latin typeface="Calibri" pitchFamily="34" charset="0"/>
+                <a:ea typeface="Calibri" pitchFamily="34" charset="-122"/>
+                <a:cs typeface="Calibri" pitchFamily="34" charset="-120"/>
+              </a:rPr>
+              <a:t>shared experimental architecture</a:t>
+            </a:r>
+            <a:endParaRPr lang="en-US" sz="1300" dirty="0"/>
+          </a:p>
+        </p:txBody>
+      </p:sp>
+      <p:sp>
+        <p:nvSpPr>
+          <p:cNvPr id="24" name="Text 22"/>
+          <p:cNvSpPr txBox="1"/>
+          <p:nvPr/>
+        </p:nvSpPr>
+        <p:spPr>
+          <a:xfrm>
+            <a:off x="9665208" y="4050792"/>
+            <a:ext cx="1901952" cy="274320"/>
+          </a:xfrm>
+          <a:prstGeom prst="rect">
+            <a:avLst/>
+          </a:prstGeom>
+          <a:noFill/>
+          <a:ln/>
+        </p:spPr>
+        <p:txBody>
+          <a:bodyPr wrap="square" lIns="0" tIns="0" rIns="0" bIns="0" rtlCol="0" anchor="ctr"/>
+          <a:lstStyle/>
+          <a:p>
+            <a:pPr indent="0" marL="0">
+              <a:buNone/>
+            </a:pPr>
+            <a:r>
+              <a:rPr lang="en-US" sz="1300" b="1" dirty="0">
+                <a:solidFill>
+                  <a:srgbClr val="A9581F"/>
+                </a:solidFill>
+                <a:latin typeface="Calibri" pitchFamily="34" charset="0"/>
+                <a:ea typeface="Calibri" pitchFamily="34" charset="-122"/>
+                <a:cs typeface="Calibri" pitchFamily="34" charset="-120"/>
+              </a:rPr>
+              <a:t>vaccine</a:t>
+            </a:r>
+            <a:pPr indent="0" marL="0">
+              <a:buNone/>
+            </a:pPr>
+            <a:r>
+              <a:rPr lang="en-US" sz="1300" dirty="0">
+                <a:solidFill>
+                  <a:srgbClr val="8C9094"/>
+                </a:solidFill>
+                <a:latin typeface="Calibri" pitchFamily="34" charset="0"/>
+                <a:ea typeface="Calibri" pitchFamily="34" charset="-122"/>
+                <a:cs typeface="Calibri" pitchFamily="34" charset="-120"/>
+              </a:rPr>
+              <a:t>  /  </a:t>
+            </a:r>
+            <a:pPr indent="0" marL="0">
+              <a:buNone/>
+            </a:pPr>
+            <a:r>
+              <a:rPr lang="en-US" sz="1300" b="1" dirty="0">
+                <a:solidFill>
+                  <a:srgbClr val="2F6B73"/>
+                </a:solidFill>
+                <a:latin typeface="Calibri" pitchFamily="34" charset="0"/>
+                <a:ea typeface="Calibri" pitchFamily="34" charset="-122"/>
+                <a:cs typeface="Calibri" pitchFamily="34" charset="-120"/>
+              </a:rPr>
+              <a:t>editing</a:t>
+            </a:r>
+            <a:endParaRPr lang="en-US" sz="1300" dirty="0"/>
+          </a:p>
+        </p:txBody>
+      </p:sp>
+      <p:sp>
+        <p:nvSpPr>
+          <p:cNvPr id="25" name="Text 23"/>
+          <p:cNvSpPr txBox="1"/>
+          <p:nvPr/>
+        </p:nvSpPr>
+        <p:spPr>
+          <a:xfrm>
+            <a:off x="685800" y="4956048"/>
+            <a:ext cx="10607040" cy="512064"/>
+          </a:xfrm>
+          <a:prstGeom prst="rect">
+            <a:avLst/>
+          </a:prstGeom>
+          <a:noFill/>
+          <a:ln/>
+        </p:spPr>
+        <p:txBody>
+          <a:bodyPr wrap="square" lIns="0" tIns="0" rIns="0" bIns="0" rtlCol="0" anchor="t"/>
+          <a:lstStyle/>
+          <a:p>
+            <a:pPr indent="0" marL="0">
+              <a:lnSpc>
+                <a:spcPct val="115000"/>
+              </a:lnSpc>
+              <a:buNone/>
+            </a:pPr>
+            <a:r>
+              <a:rPr lang="en-US" sz="1250" dirty="0">
+                <a:solidFill>
+                  <a:srgbClr val="8C9094"/>
+                </a:solidFill>
+                <a:latin typeface="Calibri" pitchFamily="34" charset="0"/>
+                <a:ea typeface="Calibri" pitchFamily="34" charset="-122"/>
+                <a:cs typeface="Calibri" pitchFamily="34" charset="-120"/>
+              </a:rPr>
+              <a:t>Both programmes take the same five-figure shape. The contents differ at Figures 1–2, where the model differs, and at Figure 5, where the application does. Panels below are proposed, not results.</a:t>
+            </a:r>
+            <a:endParaRPr lang="en-US" sz="1250" dirty="0"/>
+          </a:p>
+        </p:txBody>
+      </p:sp>
+    </p:spTree>
+  </p:cSld>
+  <p:clrMapOvr>
+    <a:masterClrMapping/>
+  </p:clrMapOvr>
+</p:sld>
+</file>
+
+<file path=ppt/slides/slide8.xml><?xml version="1.0" encoding="utf-8"?>
+<p:sld xmlns:a="http://schemas.openxmlformats.org/drawingml/2006/main" xmlns:r="http://schemas.openxmlformats.org/officeDocument/2006/relationships" xmlns:p="http://schemas.openxmlformats.org/presentationml/2006/main">
+  <p:cSld name="Slide 8">
+    <p:bg>
+      <p:bgPr>
+        <a:solidFill>
+          <a:srgbClr val="FFFFFF"/>
+        </a:solidFill>
+      </p:bgPr>
+    </p:bg>
+    <p:spTree>
+      <p:nvGrpSpPr>
+        <p:cNvPr id="1" name=""/>
+        <p:cNvGrpSpPr/>
+        <p:nvPr/>
+      </p:nvGrpSpPr>
+      <p:grpSpPr>
+        <a:xfrm>
+          <a:off x="0" y="0"/>
+          <a:ext cx="0" cy="0"/>
+          <a:chOff x="0" y="0"/>
+          <a:chExt cx="0" cy="0"/>
+        </a:xfrm>
+      </p:grpSpPr>
+      <p:sp>
+        <p:nvSpPr>
+          <p:cNvPr id="2" name="Text 0"/>
+          <p:cNvSpPr txBox="1"/>
+          <p:nvPr/>
+        </p:nvSpPr>
+        <p:spPr>
+          <a:xfrm>
+            <a:off x="685800" y="530352"/>
+            <a:ext cx="10820095" cy="1060704"/>
+          </a:xfrm>
+          <a:prstGeom prst="rect">
+            <a:avLst/>
+          </a:prstGeom>
+          <a:noFill/>
+          <a:ln/>
+        </p:spPr>
+        <p:txBody>
+          <a:bodyPr wrap="square" lIns="0" tIns="0" rIns="0" bIns="0" rtlCol="0" anchor="t"/>
+          <a:lstStyle/>
+          <a:p>
+            <a:pPr indent="0" marL="0">
+              <a:buNone/>
+            </a:pPr>
+            <a:r>
+              <a:rPr lang="en-US" sz="3200" b="1" dirty="0">
+                <a:solidFill>
+                  <a:srgbClr val="1A1D20"/>
+                </a:solidFill>
+                <a:latin typeface="Calibri" pitchFamily="34" charset="0"/>
+                <a:ea typeface="Calibri" pitchFamily="34" charset="-122"/>
+                <a:cs typeface="Calibri" pitchFamily="34" charset="-120"/>
+              </a:rPr>
+              <a:t>Figure 1 — the generative model</a:t>
+            </a:r>
+            <a:endParaRPr lang="en-US" sz="3200" dirty="0"/>
+          </a:p>
+        </p:txBody>
+      </p:sp>
+      <p:sp>
+        <p:nvSpPr>
+          <p:cNvPr id="3" name="Text 1"/>
+          <p:cNvSpPr txBox="1"/>
+          <p:nvPr/>
+        </p:nvSpPr>
+        <p:spPr>
+          <a:xfrm>
+            <a:off x="1261872" y="1481328"/>
+            <a:ext cx="4828032" cy="292608"/>
+          </a:xfrm>
+          <a:prstGeom prst="rect">
+            <a:avLst/>
+          </a:prstGeom>
+          <a:noFill/>
+          <a:ln/>
+        </p:spPr>
+        <p:txBody>
+          <a:bodyPr wrap="square" lIns="0" tIns="0" rIns="0" bIns="0" rtlCol="0" anchor="ctr"/>
+          <a:lstStyle/>
+          <a:p>
+            <a:pPr indent="0" marL="0">
+              <a:buNone/>
+            </a:pPr>
+            <a:r>
+              <a:rPr lang="en-US" sz="1600" b="1" dirty="0">
+                <a:solidFill>
+                  <a:srgbClr val="A9581F"/>
+                </a:solidFill>
+                <a:latin typeface="Calibri" pitchFamily="34" charset="0"/>
+                <a:ea typeface="Calibri" pitchFamily="34" charset="-122"/>
+                <a:cs typeface="Calibri" pitchFamily="34" charset="-120"/>
+              </a:rPr>
+              <a:t>FORGE</a:t>
+            </a:r>
+            <a:endParaRPr lang="en-US" sz="1600" dirty="0"/>
+          </a:p>
+        </p:txBody>
+      </p:sp>
+      <p:sp>
+        <p:nvSpPr>
+          <p:cNvPr id="4" name="Text 2"/>
+          <p:cNvSpPr txBox="1"/>
+          <p:nvPr/>
+        </p:nvSpPr>
+        <p:spPr>
+          <a:xfrm>
+            <a:off x="6419088" y="1481328"/>
+            <a:ext cx="5074920" cy="292608"/>
+          </a:xfrm>
+          <a:prstGeom prst="rect">
+            <a:avLst/>
+          </a:prstGeom>
+          <a:noFill/>
+          <a:ln/>
+        </p:spPr>
+        <p:txBody>
+          <a:bodyPr wrap="square" lIns="0" tIns="0" rIns="0" bIns="0" rtlCol="0" anchor="ctr"/>
+          <a:lstStyle/>
+          <a:p>
+            <a:pPr indent="0" marL="0">
+              <a:buNone/>
+            </a:pPr>
+            <a:r>
+              <a:rPr lang="en-US" sz="1600" b="1" dirty="0">
+                <a:solidFill>
+                  <a:srgbClr val="2F6B73"/>
+                </a:solidFill>
+                <a:latin typeface="Calibri" pitchFamily="34" charset="0"/>
+                <a:ea typeface="Calibri" pitchFamily="34" charset="-122"/>
+                <a:cs typeface="Calibri" pitchFamily="34" charset="-120"/>
+              </a:rPr>
+              <a:t>COMPOSE-Lipid</a:t>
+            </a:r>
+            <a:endParaRPr lang="en-US" sz="1600" dirty="0"/>
+          </a:p>
+        </p:txBody>
+      </p:sp>
+      <p:sp>
+        <p:nvSpPr>
+          <p:cNvPr id="5" name="Shape 3"/>
+          <p:cNvSpPr/>
+          <p:nvPr/>
+        </p:nvSpPr>
+        <p:spPr>
+          <a:xfrm>
+            <a:off x="685800" y="1901952"/>
+            <a:ext cx="10820095" cy="0"/>
+          </a:xfrm>
+          <a:prstGeom prst="line">
+            <a:avLst/>
+          </a:prstGeom>
+          <a:noFill/>
+          <a:ln w="9525">
+            <a:solidFill>
+              <a:srgbClr val="D8DAD9"/>
+            </a:solidFill>
+            <a:prstDash val="solid"/>
+          </a:ln>
+        </p:spPr>
+      </p:sp>
+      <p:sp>
+        <p:nvSpPr>
+          <p:cNvPr id="6" name="Text 4"/>
+          <p:cNvSpPr txBox="1"/>
+          <p:nvPr/>
+        </p:nvSpPr>
+        <p:spPr>
+          <a:xfrm>
+            <a:off x="685800" y="2029968"/>
+            <a:ext cx="384048" cy="365760"/>
+          </a:xfrm>
+          <a:prstGeom prst="rect">
+            <a:avLst/>
+          </a:prstGeom>
+          <a:noFill/>
+          <a:ln/>
+        </p:spPr>
+        <p:txBody>
+          <a:bodyPr wrap="square" lIns="0" tIns="0" rIns="0" bIns="0" rtlCol="0" anchor="ctr"/>
+          <a:lstStyle/>
+          <a:p>
+            <a:pPr indent="0" marL="0">
+              <a:buNone/>
+            </a:pPr>
+            <a:r>
+              <a:rPr lang="en-US" sz="1400" b="1" dirty="0">
+                <a:solidFill>
+                  <a:srgbClr val="8C9094"/>
+                </a:solidFill>
+                <a:latin typeface="Calibri" pitchFamily="34" charset="0"/>
+                <a:ea typeface="Calibri" pitchFamily="34" charset="-122"/>
+                <a:cs typeface="Calibri" pitchFamily="34" charset="-120"/>
+              </a:rPr>
+              <a:t>a</a:t>
+            </a:r>
+            <a:endParaRPr lang="en-US" sz="1400" dirty="0"/>
+          </a:p>
+        </p:txBody>
+      </p:sp>
+      <p:sp>
+        <p:nvSpPr>
+          <p:cNvPr id="7" name="Text 5"/>
+          <p:cNvSpPr txBox="1"/>
+          <p:nvPr/>
+        </p:nvSpPr>
+        <p:spPr>
+          <a:xfrm>
+            <a:off x="1261872" y="2029968"/>
+            <a:ext cx="10232136" cy="365760"/>
+          </a:xfrm>
+          <a:prstGeom prst="rect">
+            <a:avLst/>
+          </a:prstGeom>
+          <a:noFill/>
+          <a:ln/>
+        </p:spPr>
+        <p:txBody>
+          <a:bodyPr wrap="square" lIns="0" tIns="0" rIns="0" bIns="0" rtlCol="0" anchor="ctr"/>
+          <a:lstStyle/>
+          <a:p>
+            <a:pPr indent="0" marL="0">
+              <a:buNone/>
+            </a:pPr>
+            <a:r>
+              <a:rPr lang="en-US" sz="1450" dirty="0">
+                <a:solidFill>
+                  <a:srgbClr val="1A1D20"/>
+                </a:solidFill>
+                <a:latin typeface="Calibri" pitchFamily="34" charset="0"/>
+                <a:ea typeface="Calibri" pitchFamily="34" charset="-122"/>
+                <a:cs typeface="Calibri" pitchFamily="34" charset="-120"/>
+              </a:rPr>
+              <a:t>Design overview: from data through generation to synthesised candidates</a:t>
+            </a:r>
+            <a:endParaRPr lang="en-US" sz="1450" dirty="0"/>
+          </a:p>
+        </p:txBody>
+      </p:sp>
+      <p:sp>
+        <p:nvSpPr>
+          <p:cNvPr id="8" name="Shape 6"/>
+          <p:cNvSpPr/>
+          <p:nvPr/>
+        </p:nvSpPr>
+        <p:spPr>
+          <a:xfrm>
+            <a:off x="685800" y="2578608"/>
+            <a:ext cx="10820095" cy="0"/>
+          </a:xfrm>
+          <a:prstGeom prst="line">
+            <a:avLst/>
+          </a:prstGeom>
+          <a:noFill/>
+          <a:ln w="9525">
+            <a:solidFill>
+              <a:srgbClr val="D8DAD9"/>
+            </a:solidFill>
+            <a:prstDash val="solid"/>
+          </a:ln>
+        </p:spPr>
+      </p:sp>
+      <p:sp>
+        <p:nvSpPr>
+          <p:cNvPr id="9" name="Text 7"/>
+          <p:cNvSpPr txBox="1"/>
+          <p:nvPr/>
+        </p:nvSpPr>
+        <p:spPr>
+          <a:xfrm>
+            <a:off x="685800" y="2706624"/>
+            <a:ext cx="384048" cy="365760"/>
+          </a:xfrm>
+          <a:prstGeom prst="rect">
+            <a:avLst/>
+          </a:prstGeom>
+          <a:noFill/>
+          <a:ln/>
+        </p:spPr>
+        <p:txBody>
+          <a:bodyPr wrap="square" lIns="0" tIns="0" rIns="0" bIns="0" rtlCol="0" anchor="ctr"/>
+          <a:lstStyle/>
+          <a:p>
+            <a:pPr indent="0" marL="0">
+              <a:buNone/>
+            </a:pPr>
+            <a:r>
+              <a:rPr lang="en-US" sz="1400" b="1" dirty="0">
+                <a:solidFill>
+                  <a:srgbClr val="8C9094"/>
+                </a:solidFill>
+                <a:latin typeface="Calibri" pitchFamily="34" charset="0"/>
+                <a:ea typeface="Calibri" pitchFamily="34" charset="-122"/>
+                <a:cs typeface="Calibri" pitchFamily="34" charset="-120"/>
+              </a:rPr>
+              <a:t>b</a:t>
+            </a:r>
+            <a:endParaRPr lang="en-US" sz="1400" dirty="0"/>
+          </a:p>
+        </p:txBody>
+      </p:sp>
+      <p:sp>
+        <p:nvSpPr>
+          <p:cNvPr id="10" name="Text 8"/>
+          <p:cNvSpPr txBox="1"/>
+          <p:nvPr/>
+        </p:nvSpPr>
+        <p:spPr>
+          <a:xfrm>
+            <a:off x="1261872" y="2706624"/>
+            <a:ext cx="4828032" cy="365760"/>
+          </a:xfrm>
+          <a:prstGeom prst="rect">
+            <a:avLst/>
+          </a:prstGeom>
+          <a:noFill/>
+          <a:ln/>
+        </p:spPr>
+        <p:txBody>
+          <a:bodyPr wrap="square" lIns="0" tIns="0" rIns="0" bIns="0" rtlCol="0" anchor="ctr"/>
+          <a:lstStyle/>
+          <a:p>
+            <a:pPr indent="0" marL="0">
+              <a:buNone/>
+            </a:pPr>
+            <a:r>
+              <a:rPr lang="en-US" sz="1450" dirty="0">
+                <a:solidFill>
+                  <a:srgbClr val="1A1D20"/>
+                </a:solidFill>
+                <a:latin typeface="Calibri" pitchFamily="34" charset="0"/>
+                <a:ea typeface="Calibri" pitchFamily="34" charset="-122"/>
+                <a:cs typeface="Calibri" pitchFamily="34" charset="-120"/>
+              </a:rPr>
+              <a:t>Ugi-3 precursor inventory and reaction constraints</a:t>
+            </a:r>
+            <a:endParaRPr lang="en-US" sz="1450" dirty="0"/>
+          </a:p>
+        </p:txBody>
+      </p:sp>
+      <p:sp>
+        <p:nvSpPr>
+          <p:cNvPr id="11" name="Text 9"/>
+          <p:cNvSpPr txBox="1"/>
+          <p:nvPr/>
+        </p:nvSpPr>
+        <p:spPr>
+          <a:xfrm>
+            <a:off x="6419088" y="2706624"/>
+            <a:ext cx="5074920" cy="365760"/>
+          </a:xfrm>
+          <a:prstGeom prst="rect">
+            <a:avLst/>
+          </a:prstGeom>
+          <a:noFill/>
+          <a:ln/>
+        </p:spPr>
+        <p:txBody>
+          <a:bodyPr wrap="square" lIns="0" tIns="0" rIns="0" bIns="0" rtlCol="0" anchor="ctr"/>
+          <a:lstStyle/>
+          <a:p>
+            <a:pPr indent="0" marL="0">
+              <a:buNone/>
+            </a:pPr>
+            <a:r>
+              <a:rPr lang="en-US" sz="1450" dirty="0">
+                <a:solidFill>
+                  <a:srgbClr val="1A1D20"/>
+                </a:solidFill>
+                <a:latin typeface="Calibri" pitchFamily="34" charset="0"/>
+                <a:ea typeface="Calibri" pitchFamily="34" charset="-122"/>
+                <a:cs typeface="Calibri" pitchFamily="34" charset="-120"/>
+              </a:rPr>
+              <a:t>Lipid and drug-like corpus; the executable transition set</a:t>
+            </a:r>
+            <a:endParaRPr lang="en-US" sz="1450" dirty="0"/>
+          </a:p>
+        </p:txBody>
+      </p:sp>
+      <p:sp>
+        <p:nvSpPr>
+          <p:cNvPr id="12" name="Shape 10"/>
+          <p:cNvSpPr/>
+          <p:nvPr/>
+        </p:nvSpPr>
+        <p:spPr>
+          <a:xfrm>
+            <a:off x="685800" y="3255264"/>
+            <a:ext cx="10820095" cy="0"/>
+          </a:xfrm>
+          <a:prstGeom prst="line">
+            <a:avLst/>
+          </a:prstGeom>
+          <a:noFill/>
+          <a:ln w="9525">
+            <a:solidFill>
+              <a:srgbClr val="D8DAD9"/>
+            </a:solidFill>
+            <a:prstDash val="solid"/>
+          </a:ln>
+        </p:spPr>
+      </p:sp>
+      <p:sp>
+        <p:nvSpPr>
+          <p:cNvPr id="13" name="Text 11"/>
+          <p:cNvSpPr txBox="1"/>
+          <p:nvPr/>
+        </p:nvSpPr>
+        <p:spPr>
+          <a:xfrm>
+            <a:off x="685800" y="3383280"/>
+            <a:ext cx="384048" cy="365760"/>
+          </a:xfrm>
+          <a:prstGeom prst="rect">
+            <a:avLst/>
+          </a:prstGeom>
+          <a:noFill/>
+          <a:ln/>
+        </p:spPr>
+        <p:txBody>
+          <a:bodyPr wrap="square" lIns="0" tIns="0" rIns="0" bIns="0" rtlCol="0" anchor="ctr"/>
+          <a:lstStyle/>
+          <a:p>
+            <a:pPr indent="0" marL="0">
+              <a:buNone/>
+            </a:pPr>
+            <a:r>
+              <a:rPr lang="en-US" sz="1400" b="1" dirty="0">
+                <a:solidFill>
+                  <a:srgbClr val="8C9094"/>
+                </a:solidFill>
+                <a:latin typeface="Calibri" pitchFamily="34" charset="0"/>
+                <a:ea typeface="Calibri" pitchFamily="34" charset="-122"/>
+                <a:cs typeface="Calibri" pitchFamily="34" charset="-120"/>
+              </a:rPr>
+              <a:t>c</a:t>
+            </a:r>
+            <a:endParaRPr lang="en-US" sz="1400" dirty="0"/>
+          </a:p>
+        </p:txBody>
+      </p:sp>
+      <p:sp>
+        <p:nvSpPr>
+          <p:cNvPr id="14" name="Text 12"/>
+          <p:cNvSpPr txBox="1"/>
+          <p:nvPr/>
+        </p:nvSpPr>
+        <p:spPr>
+          <a:xfrm>
+            <a:off x="1261872" y="3383280"/>
+            <a:ext cx="4828032" cy="365760"/>
+          </a:xfrm>
+          <a:prstGeom prst="rect">
+            <a:avLst/>
+          </a:prstGeom>
+          <a:noFill/>
+          <a:ln/>
+        </p:spPr>
+        <p:txBody>
+          <a:bodyPr wrap="square" lIns="0" tIns="0" rIns="0" bIns="0" rtlCol="0" anchor="ctr"/>
+          <a:lstStyle/>
+          <a:p>
+            <a:pPr indent="0" marL="0">
+              <a:buNone/>
+            </a:pPr>
+            <a:r>
+              <a:rPr lang="en-US" sz="1450" dirty="0">
+                <a:solidFill>
+                  <a:srgbClr val="1A1D20"/>
+                </a:solidFill>
+                <a:latin typeface="Calibri" pitchFamily="34" charset="0"/>
+                <a:ea typeface="Calibri" pitchFamily="34" charset="-122"/>
+                <a:cs typeface="Calibri" pitchFamily="34" charset="-120"/>
+              </a:rPr>
+              <a:t>Flow-matching model over precursor roles</a:t>
+            </a:r>
+            <a:endParaRPr lang="en-US" sz="1450" dirty="0"/>
+          </a:p>
+        </p:txBody>
+      </p:sp>
+      <p:sp>
+        <p:nvSpPr>
+          <p:cNvPr id="15" name="Text 13"/>
+          <p:cNvSpPr txBox="1"/>
+          <p:nvPr/>
+        </p:nvSpPr>
+        <p:spPr>
+          <a:xfrm>
+            <a:off x="6419088" y="3383280"/>
+            <a:ext cx="5074920" cy="365760"/>
+          </a:xfrm>
+          <a:prstGeom prst="rect">
+            <a:avLst/>
+          </a:prstGeom>
+          <a:noFill/>
+          <a:ln/>
+        </p:spPr>
+        <p:txBody>
+          <a:bodyPr wrap="square" lIns="0" tIns="0" rIns="0" bIns="0" rtlCol="0" anchor="ctr"/>
+          <a:lstStyle/>
+          <a:p>
+            <a:pPr indent="0" marL="0">
+              <a:buNone/>
+            </a:pPr>
+            <a:r>
+              <a:rPr lang="en-US" sz="1450" dirty="0">
+                <a:solidFill>
+                  <a:srgbClr val="1A1D20"/>
+                </a:solidFill>
+                <a:latin typeface="Calibri" pitchFamily="34" charset="0"/>
+                <a:ea typeface="Calibri" pitchFamily="34" charset="-122"/>
+                <a:cs typeface="Calibri" pitchFamily="34" charset="-120"/>
+              </a:rPr>
+              <a:t>Reusable transformation process and its edit vocabulary</a:t>
+            </a:r>
+            <a:endParaRPr lang="en-US" sz="1450" dirty="0"/>
+          </a:p>
+        </p:txBody>
+      </p:sp>
+      <p:sp>
+        <p:nvSpPr>
+          <p:cNvPr id="16" name="Shape 14"/>
+          <p:cNvSpPr/>
+          <p:nvPr/>
+        </p:nvSpPr>
+        <p:spPr>
+          <a:xfrm>
+            <a:off x="685800" y="3931920"/>
+            <a:ext cx="10820095" cy="0"/>
+          </a:xfrm>
+          <a:prstGeom prst="line">
+            <a:avLst/>
+          </a:prstGeom>
+          <a:noFill/>
+          <a:ln w="9525">
+            <a:solidFill>
+              <a:srgbClr val="D8DAD9"/>
+            </a:solidFill>
+            <a:prstDash val="solid"/>
+          </a:ln>
+        </p:spPr>
+      </p:sp>
+      <p:sp>
+        <p:nvSpPr>
+          <p:cNvPr id="17" name="Text 15"/>
+          <p:cNvSpPr txBox="1"/>
+          <p:nvPr/>
+        </p:nvSpPr>
+        <p:spPr>
+          <a:xfrm>
+            <a:off x="685800" y="4059936"/>
+            <a:ext cx="384048" cy="365760"/>
+          </a:xfrm>
+          <a:prstGeom prst="rect">
+            <a:avLst/>
+          </a:prstGeom>
+          <a:noFill/>
+          <a:ln/>
+        </p:spPr>
+        <p:txBody>
+          <a:bodyPr wrap="square" lIns="0" tIns="0" rIns="0" bIns="0" rtlCol="0" anchor="ctr"/>
+          <a:lstStyle/>
+          <a:p>
+            <a:pPr indent="0" marL="0">
+              <a:buNone/>
+            </a:pPr>
+            <a:r>
+              <a:rPr lang="en-US" sz="1400" b="1" dirty="0">
+                <a:solidFill>
+                  <a:srgbClr val="8C9094"/>
+                </a:solidFill>
+                <a:latin typeface="Calibri" pitchFamily="34" charset="0"/>
+                <a:ea typeface="Calibri" pitchFamily="34" charset="-122"/>
+                <a:cs typeface="Calibri" pitchFamily="34" charset="-120"/>
+              </a:rPr>
+              <a:t>d</a:t>
+            </a:r>
+            <a:endParaRPr lang="en-US" sz="1400" dirty="0"/>
+          </a:p>
+        </p:txBody>
+      </p:sp>
+      <p:sp>
+        <p:nvSpPr>
+          <p:cNvPr id="18" name="Text 16"/>
+          <p:cNvSpPr txBox="1"/>
+          <p:nvPr/>
+        </p:nvSpPr>
+        <p:spPr>
+          <a:xfrm>
+            <a:off x="1261872" y="4059936"/>
+            <a:ext cx="10232136" cy="365760"/>
+          </a:xfrm>
+          <a:prstGeom prst="rect">
+            <a:avLst/>
+          </a:prstGeom>
+          <a:noFill/>
+          <a:ln/>
+        </p:spPr>
+        <p:txBody>
+          <a:bodyPr wrap="square" lIns="0" tIns="0" rIns="0" bIns="0" rtlCol="0" anchor="ctr"/>
+          <a:lstStyle/>
+          <a:p>
+            <a:pPr indent="0" marL="0">
+              <a:buNone/>
+            </a:pPr>
+            <a:r>
+              <a:rPr lang="en-US" sz="1450" dirty="0">
+                <a:solidFill>
+                  <a:srgbClr val="1A1D20"/>
+                </a:solidFill>
+                <a:latin typeface="Calibri" pitchFamily="34" charset="0"/>
+                <a:ea typeface="Calibri" pitchFamily="34" charset="-122"/>
+                <a:cs typeface="Calibri" pitchFamily="34" charset="-120"/>
+              </a:rPr>
+              <a:t>Training objective and convergence</a:t>
+            </a:r>
+            <a:endParaRPr lang="en-US" sz="1450" dirty="0"/>
+          </a:p>
+        </p:txBody>
+      </p:sp>
+      <p:sp>
+        <p:nvSpPr>
+          <p:cNvPr id="19" name="Shape 17"/>
+          <p:cNvSpPr/>
+          <p:nvPr/>
+        </p:nvSpPr>
+        <p:spPr>
+          <a:xfrm>
+            <a:off x="685800" y="4608576"/>
+            <a:ext cx="10820095" cy="0"/>
+          </a:xfrm>
+          <a:prstGeom prst="line">
+            <a:avLst/>
+          </a:prstGeom>
+          <a:noFill/>
+          <a:ln w="9525">
+            <a:solidFill>
+              <a:srgbClr val="D8DAD9"/>
+            </a:solidFill>
+            <a:prstDash val="solid"/>
+          </a:ln>
+        </p:spPr>
+      </p:sp>
+      <p:sp>
+        <p:nvSpPr>
+          <p:cNvPr id="20" name="Text 18"/>
+          <p:cNvSpPr txBox="1"/>
+          <p:nvPr/>
+        </p:nvSpPr>
+        <p:spPr>
+          <a:xfrm>
+            <a:off x="685800" y="4736592"/>
+            <a:ext cx="384048" cy="365760"/>
+          </a:xfrm>
+          <a:prstGeom prst="rect">
+            <a:avLst/>
+          </a:prstGeom>
+          <a:noFill/>
+          <a:ln/>
+        </p:spPr>
+        <p:txBody>
+          <a:bodyPr wrap="square" lIns="0" tIns="0" rIns="0" bIns="0" rtlCol="0" anchor="ctr"/>
+          <a:lstStyle/>
+          <a:p>
+            <a:pPr indent="0" marL="0">
+              <a:buNone/>
+            </a:pPr>
+            <a:r>
+              <a:rPr lang="en-US" sz="1400" b="1" dirty="0">
+                <a:solidFill>
+                  <a:srgbClr val="8C9094"/>
+                </a:solidFill>
+                <a:latin typeface="Calibri" pitchFamily="34" charset="0"/>
+                <a:ea typeface="Calibri" pitchFamily="34" charset="-122"/>
+                <a:cs typeface="Calibri" pitchFamily="34" charset="-120"/>
+              </a:rPr>
+              <a:t>e</a:t>
+            </a:r>
+            <a:endParaRPr lang="en-US" sz="1400" dirty="0"/>
+          </a:p>
+        </p:txBody>
+      </p:sp>
+      <p:sp>
+        <p:nvSpPr>
+          <p:cNvPr id="21" name="Text 19"/>
+          <p:cNvSpPr txBox="1"/>
+          <p:nvPr/>
+        </p:nvSpPr>
+        <p:spPr>
+          <a:xfrm>
+            <a:off x="1261872" y="4736592"/>
+            <a:ext cx="4828032" cy="365760"/>
+          </a:xfrm>
+          <a:prstGeom prst="rect">
+            <a:avLst/>
+          </a:prstGeom>
+          <a:noFill/>
+          <a:ln/>
+        </p:spPr>
+        <p:txBody>
+          <a:bodyPr wrap="square" lIns="0" tIns="0" rIns="0" bIns="0" rtlCol="0" anchor="ctr"/>
+          <a:lstStyle/>
+          <a:p>
+            <a:pPr indent="0" marL="0">
+              <a:buNone/>
+            </a:pPr>
+            <a:r>
+              <a:rPr lang="en-US" sz="1450" dirty="0">
+                <a:solidFill>
+                  <a:srgbClr val="1A1D20"/>
+                </a:solidFill>
+                <a:latin typeface="Calibri" pitchFamily="34" charset="0"/>
+                <a:ea typeface="Calibri" pitchFamily="34" charset="-122"/>
+                <a:cs typeface="Calibri" pitchFamily="34" charset="-120"/>
+              </a:rPr>
+              <a:t>Held-out reconstruction within the family</a:t>
+            </a:r>
+            <a:endParaRPr lang="en-US" sz="1450" dirty="0"/>
+          </a:p>
+        </p:txBody>
+      </p:sp>
+      <p:sp>
+        <p:nvSpPr>
+          <p:cNvPr id="22" name="Text 20"/>
+          <p:cNvSpPr txBox="1"/>
+          <p:nvPr/>
+        </p:nvSpPr>
+        <p:spPr>
+          <a:xfrm>
+            <a:off x="6419088" y="4736592"/>
+            <a:ext cx="5074920" cy="365760"/>
+          </a:xfrm>
+          <a:prstGeom prst="rect">
+            <a:avLst/>
+          </a:prstGeom>
+          <a:noFill/>
+          <a:ln/>
+        </p:spPr>
+        <p:txBody>
+          <a:bodyPr wrap="square" lIns="0" tIns="0" rIns="0" bIns="0" rtlCol="0" anchor="ctr"/>
+          <a:lstStyle/>
+          <a:p>
+            <a:pPr indent="0" marL="0">
+              <a:buNone/>
+            </a:pPr>
+            <a:r>
+              <a:rPr lang="en-US" sz="1450" dirty="0">
+                <a:solidFill>
+                  <a:srgbClr val="1A1D20"/>
+                </a:solidFill>
+                <a:latin typeface="Calibri" pitchFamily="34" charset="0"/>
+                <a:ea typeface="Calibri" pitchFamily="34" charset="-122"/>
+                <a:cs typeface="Calibri" pitchFamily="34" charset="-120"/>
+              </a:rPr>
+              <a:t>Validity and constraint satisfaction by construction</a:t>
+            </a:r>
+            <a:endParaRPr lang="en-US" sz="1450" dirty="0"/>
+          </a:p>
+        </p:txBody>
+      </p:sp>
+      <p:sp>
+        <p:nvSpPr>
+          <p:cNvPr id="23" name="Shape 21"/>
+          <p:cNvSpPr/>
+          <p:nvPr/>
+        </p:nvSpPr>
+        <p:spPr>
+          <a:xfrm>
+            <a:off x="685800" y="5285232"/>
+            <a:ext cx="10820095" cy="0"/>
+          </a:xfrm>
+          <a:prstGeom prst="line">
+            <a:avLst/>
+          </a:prstGeom>
+          <a:noFill/>
+          <a:ln w="9525">
+            <a:solidFill>
+              <a:srgbClr val="D8DAD9"/>
+            </a:solidFill>
+            <a:prstDash val="solid"/>
+          </a:ln>
+        </p:spPr>
+      </p:sp>
+      <p:sp>
+        <p:nvSpPr>
+          <p:cNvPr id="24" name="Text 22"/>
+          <p:cNvSpPr txBox="1"/>
+          <p:nvPr/>
+        </p:nvSpPr>
+        <p:spPr>
+          <a:xfrm>
+            <a:off x="685800" y="5742432"/>
+            <a:ext cx="10607040" cy="512064"/>
+          </a:xfrm>
+          <a:prstGeom prst="rect">
+            <a:avLst/>
+          </a:prstGeom>
+          <a:noFill/>
+          <a:ln/>
+        </p:spPr>
+        <p:txBody>
+          <a:bodyPr wrap="square" lIns="0" tIns="0" rIns="0" bIns="0" rtlCol="0" anchor="t"/>
+          <a:lstStyle/>
+          <a:p>
+            <a:pPr indent="0" marL="0">
+              <a:lnSpc>
+                <a:spcPct val="115000"/>
+              </a:lnSpc>
+              <a:buNone/>
+            </a:pPr>
+            <a:r>
+              <a:rPr lang="en-US" sz="1250" dirty="0">
+                <a:solidFill>
+                  <a:srgbClr val="8C9094"/>
+                </a:solidFill>
+                <a:latin typeface="Calibri" pitchFamily="34" charset="0"/>
+                <a:ea typeface="Calibri" pitchFamily="34" charset="-122"/>
+                <a:cs typeface="Calibri" pitchFamily="34" charset="-120"/>
+              </a:rPr>
+              <a:t>Panel a carries the whole argument; b–e establish that the generator is sound before any molecule is made.</a:t>
+            </a:r>
+            <a:endParaRPr lang="en-US" sz="1250" dirty="0"/>
+          </a:p>
+        </p:txBody>
+      </p:sp>
+    </p:spTree>
+  </p:cSld>
+  <p:clrMapOvr>
+    <a:masterClrMapping/>
+  </p:clrMapOvr>
+</p:sld>
+</file>
+
+<file path=ppt/slides/slide9.xml><?xml version="1.0" encoding="utf-8"?>
+<p:sld xmlns:a="http://schemas.openxmlformats.org/drawingml/2006/main" xmlns:r="http://schemas.openxmlformats.org/officeDocument/2006/relationships" xmlns:p="http://schemas.openxmlformats.org/presentationml/2006/main">
+  <p:cSld name="Slide 9">
+    <p:bg>
+      <p:bgPr>
+        <a:solidFill>
+          <a:srgbClr val="FFFFFF"/>
+        </a:solidFill>
+      </p:bgPr>
+    </p:bg>
+    <p:spTree>
+      <p:nvGrpSpPr>
+        <p:cNvPr id="1" name=""/>
+        <p:cNvGrpSpPr/>
+        <p:nvPr/>
+      </p:nvGrpSpPr>
+      <p:grpSpPr>
+        <a:xfrm>
+          <a:off x="0" y="0"/>
+          <a:ext cx="0" cy="0"/>
+          <a:chOff x="0" y="0"/>
+          <a:chExt cx="0" cy="0"/>
+        </a:xfrm>
+      </p:grpSpPr>
+      <p:sp>
+        <p:nvSpPr>
+          <p:cNvPr id="2" name="Text 0"/>
+          <p:cNvSpPr txBox="1"/>
+          <p:nvPr/>
+        </p:nvSpPr>
+        <p:spPr>
+          <a:xfrm>
+            <a:off x="685800" y="530352"/>
+            <a:ext cx="10820095" cy="1060704"/>
+          </a:xfrm>
+          <a:prstGeom prst="rect">
+            <a:avLst/>
+          </a:prstGeom>
+          <a:noFill/>
+          <a:ln/>
+        </p:spPr>
+        <p:txBody>
+          <a:bodyPr wrap="square" lIns="0" tIns="0" rIns="0" bIns="0" rtlCol="0" anchor="t"/>
+          <a:lstStyle/>
+          <a:p>
+            <a:pPr indent="0" marL="0">
+              <a:buNone/>
+            </a:pPr>
+            <a:r>
+              <a:rPr lang="en-US" sz="3200" b="1" dirty="0">
+                <a:solidFill>
+                  <a:srgbClr val="1A1D20"/>
+                </a:solidFill>
+                <a:latin typeface="Calibri" pitchFamily="34" charset="0"/>
+                <a:ea typeface="Calibri" pitchFamily="34" charset="-122"/>
+                <a:cs typeface="Calibri" pitchFamily="34" charset="-120"/>
+              </a:rPr>
+              <a:t>Figure 2 — computational validation of the generator</a:t>
+            </a:r>
+            <a:endParaRPr lang="en-US" sz="3200" dirty="0"/>
+          </a:p>
+        </p:txBody>
+      </p:sp>
+      <p:sp>
+        <p:nvSpPr>
+          <p:cNvPr id="3" name="Text 1"/>
+          <p:cNvSpPr txBox="1"/>
+          <p:nvPr/>
+        </p:nvSpPr>
+        <p:spPr>
+          <a:xfrm>
+            <a:off x="1261872" y="1481328"/>
+            <a:ext cx="4828032" cy="292608"/>
+          </a:xfrm>
+          <a:prstGeom prst="rect">
+            <a:avLst/>
+          </a:prstGeom>
+          <a:noFill/>
+          <a:ln/>
+        </p:spPr>
+        <p:txBody>
+          <a:bodyPr wrap="square" lIns="0" tIns="0" rIns="0" bIns="0" rtlCol="0" anchor="ctr"/>
+          <a:lstStyle/>
+          <a:p>
+            <a:pPr indent="0" marL="0">
+              <a:buNone/>
+            </a:pPr>
+            <a:r>
+              <a:rPr lang="en-US" sz="1600" b="1" dirty="0">
+                <a:solidFill>
+                  <a:srgbClr val="A9581F"/>
+                </a:solidFill>
+                <a:latin typeface="Calibri" pitchFamily="34" charset="0"/>
+                <a:ea typeface="Calibri" pitchFamily="34" charset="-122"/>
+                <a:cs typeface="Calibri" pitchFamily="34" charset="-120"/>
+              </a:rPr>
+              <a:t>FORGE</a:t>
+            </a:r>
+            <a:endParaRPr lang="en-US" sz="1600" dirty="0"/>
+          </a:p>
+        </p:txBody>
+      </p:sp>
+      <p:sp>
+        <p:nvSpPr>
+          <p:cNvPr id="4" name="Text 2"/>
+          <p:cNvSpPr txBox="1"/>
+          <p:nvPr/>
+        </p:nvSpPr>
+        <p:spPr>
+          <a:xfrm>
+            <a:off x="6419088" y="1481328"/>
+            <a:ext cx="5074920" cy="292608"/>
+          </a:xfrm>
+          <a:prstGeom prst="rect">
+            <a:avLst/>
+          </a:prstGeom>
+          <a:noFill/>
+          <a:ln/>
+        </p:spPr>
+        <p:txBody>
+          <a:bodyPr wrap="square" lIns="0" tIns="0" rIns="0" bIns="0" rtlCol="0" anchor="ctr"/>
+          <a:lstStyle/>
+          <a:p>
+            <a:pPr indent="0" marL="0">
+              <a:buNone/>
+            </a:pPr>
+            <a:r>
+              <a:rPr lang="en-US" sz="1600" b="1" dirty="0">
+                <a:solidFill>
+                  <a:srgbClr val="2F6B73"/>
+                </a:solidFill>
+                <a:latin typeface="Calibri" pitchFamily="34" charset="0"/>
+                <a:ea typeface="Calibri" pitchFamily="34" charset="-122"/>
+                <a:cs typeface="Calibri" pitchFamily="34" charset="-120"/>
+              </a:rPr>
+              <a:t>COMPOSE-Lipid</a:t>
+            </a:r>
+            <a:endParaRPr lang="en-US" sz="1600" dirty="0"/>
+          </a:p>
+        </p:txBody>
+      </p:sp>
+      <p:sp>
+        <p:nvSpPr>
+          <p:cNvPr id="5" name="Shape 3"/>
+          <p:cNvSpPr/>
+          <p:nvPr/>
+        </p:nvSpPr>
+        <p:spPr>
+          <a:xfrm>
+            <a:off x="685800" y="1901952"/>
+            <a:ext cx="10820095" cy="0"/>
+          </a:xfrm>
+          <a:prstGeom prst="line">
+            <a:avLst/>
+          </a:prstGeom>
+          <a:noFill/>
+          <a:ln w="9525">
+            <a:solidFill>
+              <a:srgbClr val="D8DAD9"/>
+            </a:solidFill>
+            <a:prstDash val="solid"/>
+          </a:ln>
+        </p:spPr>
+      </p:sp>
+      <p:sp>
+        <p:nvSpPr>
+          <p:cNvPr id="6" name="Text 4"/>
+          <p:cNvSpPr txBox="1"/>
+          <p:nvPr/>
+        </p:nvSpPr>
+        <p:spPr>
+          <a:xfrm>
+            <a:off x="685800" y="2029968"/>
+            <a:ext cx="384048" cy="365760"/>
+          </a:xfrm>
+          <a:prstGeom prst="rect">
+            <a:avLst/>
+          </a:prstGeom>
+          <a:noFill/>
+          <a:ln/>
+        </p:spPr>
+        <p:txBody>
+          <a:bodyPr wrap="square" lIns="0" tIns="0" rIns="0" bIns="0" rtlCol="0" anchor="ctr"/>
+          <a:lstStyle/>
+          <a:p>
+            <a:pPr indent="0" marL="0">
+              <a:buNone/>
+            </a:pPr>
+            <a:r>
+              <a:rPr lang="en-US" sz="1400" b="1" dirty="0">
+                <a:solidFill>
+                  <a:srgbClr val="8C9094"/>
+                </a:solidFill>
+                <a:latin typeface="Calibri" pitchFamily="34" charset="0"/>
+                <a:ea typeface="Calibri" pitchFamily="34" charset="-122"/>
+                <a:cs typeface="Calibri" pitchFamily="34" charset="-120"/>
+              </a:rPr>
+              <a:t>a</a:t>
+            </a:r>
+            <a:endParaRPr lang="en-US" sz="1400" dirty="0"/>
+          </a:p>
+        </p:txBody>
+      </p:sp>
+      <p:sp>
+        <p:nvSpPr>
+          <p:cNvPr id="7" name="Text 5"/>
+          <p:cNvSpPr txBox="1"/>
+          <p:nvPr/>
+        </p:nvSpPr>
+        <p:spPr>
+          <a:xfrm>
+            <a:off x="1261872" y="2029968"/>
+            <a:ext cx="10232136" cy="365760"/>
+          </a:xfrm>
+          <a:prstGeom prst="rect">
+            <a:avLst/>
+          </a:prstGeom>
+          <a:noFill/>
+          <a:ln/>
+        </p:spPr>
+        <p:txBody>
+          <a:bodyPr wrap="square" lIns="0" tIns="0" rIns="0" bIns="0" rtlCol="0" anchor="ctr"/>
+          <a:lstStyle/>
+          <a:p>
+            <a:pPr indent="0" marL="0">
+              <a:buNone/>
+            </a:pPr>
+            <a:r>
+              <a:rPr lang="en-US" sz="1450" dirty="0">
+                <a:solidFill>
+                  <a:srgbClr val="1A1D20"/>
+                </a:solidFill>
+                <a:latin typeface="Calibri" pitchFamily="34" charset="0"/>
+                <a:ea typeface="Calibri" pitchFamily="34" charset="-122"/>
+                <a:cs typeface="Calibri" pitchFamily="34" charset="-120"/>
+              </a:rPr>
+              <a:t>Property distributions of generated against reference lipids</a:t>
+            </a:r>
+            <a:endParaRPr lang="en-US" sz="1450" dirty="0"/>
+          </a:p>
+        </p:txBody>
+      </p:sp>
+      <p:sp>
+        <p:nvSpPr>
+          <p:cNvPr id="8" name="Shape 6"/>
+          <p:cNvSpPr/>
+          <p:nvPr/>
+        </p:nvSpPr>
+        <p:spPr>
+          <a:xfrm>
+            <a:off x="685800" y="2505456"/>
+            <a:ext cx="10820095" cy="0"/>
+          </a:xfrm>
+          <a:prstGeom prst="line">
+            <a:avLst/>
+          </a:prstGeom>
+          <a:noFill/>
+          <a:ln w="9525">
+            <a:solidFill>
+              <a:srgbClr val="D8DAD9"/>
+            </a:solidFill>
+            <a:prstDash val="solid"/>
+          </a:ln>
+        </p:spPr>
+      </p:sp>
+      <p:sp>
+        <p:nvSpPr>
+          <p:cNvPr id="9" name="Text 7"/>
+          <p:cNvSpPr txBox="1"/>
+          <p:nvPr/>
+        </p:nvSpPr>
+        <p:spPr>
+          <a:xfrm>
+            <a:off x="685800" y="2633472"/>
+            <a:ext cx="384048" cy="365760"/>
+          </a:xfrm>
+          <a:prstGeom prst="rect">
+            <a:avLst/>
+          </a:prstGeom>
+          <a:noFill/>
+          <a:ln/>
+        </p:spPr>
+        <p:txBody>
+          <a:bodyPr wrap="square" lIns="0" tIns="0" rIns="0" bIns="0" rtlCol="0" anchor="ctr"/>
+          <a:lstStyle/>
+          <a:p>
+            <a:pPr indent="0" marL="0">
+              <a:buNone/>
+            </a:pPr>
+            <a:r>
+              <a:rPr lang="en-US" sz="1400" b="1" dirty="0">
+                <a:solidFill>
+                  <a:srgbClr val="8C9094"/>
+                </a:solidFill>
+                <a:latin typeface="Calibri" pitchFamily="34" charset="0"/>
+                <a:ea typeface="Calibri" pitchFamily="34" charset="-122"/>
+                <a:cs typeface="Calibri" pitchFamily="34" charset="-120"/>
+              </a:rPr>
+              <a:t>b</a:t>
+            </a:r>
+            <a:endParaRPr lang="en-US" sz="1400" dirty="0"/>
+          </a:p>
+        </p:txBody>
+      </p:sp>
+      <p:sp>
+        <p:nvSpPr>
+          <p:cNvPr id="10" name="Text 8"/>
+          <p:cNvSpPr txBox="1"/>
+          <p:nvPr/>
+        </p:nvSpPr>
+        <p:spPr>
+          <a:xfrm>
+            <a:off x="1261872" y="2633472"/>
+            <a:ext cx="4828032" cy="365760"/>
+          </a:xfrm>
+          <a:prstGeom prst="rect">
+            <a:avLst/>
+          </a:prstGeom>
+          <a:noFill/>
+          <a:ln/>
+        </p:spPr>
+        <p:txBody>
+          <a:bodyPr wrap="square" lIns="0" tIns="0" rIns="0" bIns="0" rtlCol="0" anchor="ctr"/>
+          <a:lstStyle/>
+          <a:p>
+            <a:pPr indent="0" marL="0">
+              <a:buNone/>
+            </a:pPr>
+            <a:r>
+              <a:rPr lang="en-US" sz="1450" dirty="0">
+                <a:solidFill>
+                  <a:srgbClr val="1A1D20"/>
+                </a:solidFill>
+                <a:latin typeface="Calibri" pitchFamily="34" charset="0"/>
+                <a:ea typeface="Calibri" pitchFamily="34" charset="-122"/>
+                <a:cs typeface="Calibri" pitchFamily="34" charset="-120"/>
+              </a:rPr>
+              <a:t>Coverage of the known family and novelty within it</a:t>
+            </a:r>
+            <a:endParaRPr lang="en-US" sz="1450" dirty="0"/>
+          </a:p>
+        </p:txBody>
+      </p:sp>
+      <p:sp>
+        <p:nvSpPr>
+          <p:cNvPr id="11" name="Text 9"/>
+          <p:cNvSpPr txBox="1"/>
+          <p:nvPr/>
+        </p:nvSpPr>
+        <p:spPr>
+          <a:xfrm>
+            <a:off x="6419088" y="2633472"/>
+            <a:ext cx="5074920" cy="365760"/>
+          </a:xfrm>
+          <a:prstGeom prst="rect">
+            <a:avLst/>
+          </a:prstGeom>
+          <a:noFill/>
+          <a:ln/>
+        </p:spPr>
+        <p:txBody>
+          <a:bodyPr wrap="square" lIns="0" tIns="0" rIns="0" bIns="0" rtlCol="0" anchor="ctr"/>
+          <a:lstStyle/>
+          <a:p>
+            <a:pPr indent="0" marL="0">
+              <a:buNone/>
+            </a:pPr>
+            <a:r>
+              <a:rPr lang="en-US" sz="1450" dirty="0">
+                <a:solidFill>
+                  <a:srgbClr val="1A1D20"/>
+                </a:solidFill>
+                <a:latin typeface="Calibri" pitchFamily="34" charset="0"/>
+                <a:ea typeface="Calibri" pitchFamily="34" charset="-122"/>
+                <a:cs typeface="Calibri" pitchFamily="34" charset="-120"/>
+              </a:rPr>
+              <a:t>Scaffold novelty and distance from known lipids</a:t>
+            </a:r>
+            <a:endParaRPr lang="en-US" sz="1450" dirty="0"/>
+          </a:p>
+        </p:txBody>
+      </p:sp>
+      <p:sp>
+        <p:nvSpPr>
+          <p:cNvPr id="12" name="Shape 10"/>
+          <p:cNvSpPr/>
+          <p:nvPr/>
+        </p:nvSpPr>
+        <p:spPr>
+          <a:xfrm>
+            <a:off x="685800" y="3108960"/>
+            <a:ext cx="10820095" cy="0"/>
+          </a:xfrm>
+          <a:prstGeom prst="line">
+            <a:avLst/>
+          </a:prstGeom>
+          <a:noFill/>
+          <a:ln w="9525">
+            <a:solidFill>
+              <a:srgbClr val="D8DAD9"/>
+            </a:solidFill>
+            <a:prstDash val="solid"/>
+          </a:ln>
+        </p:spPr>
+      </p:sp>
+      <p:sp>
+        <p:nvSpPr>
+          <p:cNvPr id="13" name="Text 11"/>
+          <p:cNvSpPr txBox="1"/>
+          <p:nvPr/>
+        </p:nvSpPr>
+        <p:spPr>
+          <a:xfrm>
+            <a:off x="685800" y="3236976"/>
+            <a:ext cx="384048" cy="365760"/>
+          </a:xfrm>
+          <a:prstGeom prst="rect">
+            <a:avLst/>
+          </a:prstGeom>
+          <a:noFill/>
+          <a:ln/>
+        </p:spPr>
+        <p:txBody>
+          <a:bodyPr wrap="square" lIns="0" tIns="0" rIns="0" bIns="0" rtlCol="0" anchor="ctr"/>
+          <a:lstStyle/>
+          <a:p>
+            <a:pPr indent="0" marL="0">
+              <a:buNone/>
+            </a:pPr>
+            <a:r>
+              <a:rPr lang="en-US" sz="1400" b="1" dirty="0">
+                <a:solidFill>
+                  <a:srgbClr val="8C9094"/>
+                </a:solidFill>
+                <a:latin typeface="Calibri" pitchFamily="34" charset="0"/>
+                <a:ea typeface="Calibri" pitchFamily="34" charset="-122"/>
+                <a:cs typeface="Calibri" pitchFamily="34" charset="-120"/>
+              </a:rPr>
+              <a:t>c</a:t>
+            </a:r>
+            <a:endParaRPr lang="en-US" sz="1400" dirty="0"/>
+          </a:p>
+        </p:txBody>
+      </p:sp>
+      <p:sp>
+        <p:nvSpPr>
+          <p:cNvPr id="14" name="Text 12"/>
+          <p:cNvSpPr txBox="1"/>
+          <p:nvPr/>
+        </p:nvSpPr>
+        <p:spPr>
+          <a:xfrm>
+            <a:off x="1261872" y="3236976"/>
+            <a:ext cx="10232136" cy="365760"/>
+          </a:xfrm>
+          <a:prstGeom prst="rect">
+            <a:avLst/>
+          </a:prstGeom>
+          <a:noFill/>
+          <a:ln/>
+        </p:spPr>
+        <p:txBody>
+          <a:bodyPr wrap="square" lIns="0" tIns="0" rIns="0" bIns="0" rtlCol="0" anchor="ctr"/>
+          <a:lstStyle/>
+          <a:p>
+            <a:pPr indent="0" marL="0">
+              <a:buNone/>
+            </a:pPr>
+            <a:r>
+              <a:rPr lang="en-US" sz="1450" dirty="0">
+                <a:solidFill>
+                  <a:srgbClr val="1A1D20"/>
+                </a:solidFill>
+                <a:latin typeface="Calibri" pitchFamily="34" charset="0"/>
+                <a:ea typeface="Calibri" pitchFamily="34" charset="-122"/>
+                <a:cs typeface="Calibri" pitchFamily="34" charset="-120"/>
+              </a:rPr>
+              <a:t>Diversity of the generated set</a:t>
+            </a:r>
+            <a:endParaRPr lang="en-US" sz="1450" dirty="0"/>
+          </a:p>
+        </p:txBody>
+      </p:sp>
+      <p:sp>
+        <p:nvSpPr>
+          <p:cNvPr id="15" name="Shape 13"/>
+          <p:cNvSpPr/>
+          <p:nvPr/>
+        </p:nvSpPr>
+        <p:spPr>
+          <a:xfrm>
+            <a:off x="685800" y="3712464"/>
+            <a:ext cx="10820095" cy="0"/>
+          </a:xfrm>
+          <a:prstGeom prst="line">
+            <a:avLst/>
+          </a:prstGeom>
+          <a:noFill/>
+          <a:ln w="9525">
+            <a:solidFill>
+              <a:srgbClr val="D8DAD9"/>
+            </a:solidFill>
+            <a:prstDash val="solid"/>
+          </a:ln>
+        </p:spPr>
+      </p:sp>
+      <p:sp>
+        <p:nvSpPr>
+          <p:cNvPr id="16" name="Text 14"/>
+          <p:cNvSpPr txBox="1"/>
+          <p:nvPr/>
+        </p:nvSpPr>
+        <p:spPr>
+          <a:xfrm>
+            <a:off x="685800" y="3840480"/>
+            <a:ext cx="384048" cy="365760"/>
+          </a:xfrm>
+          <a:prstGeom prst="rect">
+            <a:avLst/>
+          </a:prstGeom>
+          <a:noFill/>
+          <a:ln/>
+        </p:spPr>
+        <p:txBody>
+          <a:bodyPr wrap="square" lIns="0" tIns="0" rIns="0" bIns="0" rtlCol="0" anchor="ctr"/>
+          <a:lstStyle/>
+          <a:p>
+            <a:pPr indent="0" marL="0">
+              <a:buNone/>
+            </a:pPr>
+            <a:r>
+              <a:rPr lang="en-US" sz="1400" b="1" dirty="0">
+                <a:solidFill>
+                  <a:srgbClr val="8C9094"/>
+                </a:solidFill>
+                <a:latin typeface="Calibri" pitchFamily="34" charset="0"/>
+                <a:ea typeface="Calibri" pitchFamily="34" charset="-122"/>
+                <a:cs typeface="Calibri" pitchFamily="34" charset="-120"/>
+              </a:rPr>
+              <a:t>d</a:t>
+            </a:r>
+            <a:endParaRPr lang="en-US" sz="1400" dirty="0"/>
+          </a:p>
+        </p:txBody>
+      </p:sp>
+      <p:sp>
+        <p:nvSpPr>
+          <p:cNvPr id="17" name="Text 15"/>
+          <p:cNvSpPr txBox="1"/>
+          <p:nvPr/>
+        </p:nvSpPr>
+        <p:spPr>
+          <a:xfrm>
+            <a:off x="1261872" y="3840480"/>
+            <a:ext cx="10232136" cy="365760"/>
+          </a:xfrm>
+          <a:prstGeom prst="rect">
+            <a:avLst/>
+          </a:prstGeom>
+          <a:noFill/>
+          <a:ln/>
+        </p:spPr>
+        <p:txBody>
+          <a:bodyPr wrap="square" lIns="0" tIns="0" rIns="0" bIns="0" rtlCol="0" anchor="ctr"/>
+          <a:lstStyle/>
+          <a:p>
+            <a:pPr indent="0" marL="0">
+              <a:buNone/>
+            </a:pPr>
+            <a:r>
+              <a:rPr lang="en-US" sz="1450" dirty="0">
+                <a:solidFill>
+                  <a:srgbClr val="1A1D20"/>
+                </a:solidFill>
+                <a:latin typeface="Calibri" pitchFamily="34" charset="0"/>
+                <a:ea typeface="Calibri" pitchFamily="34" charset="-122"/>
+                <a:cs typeface="Calibri" pitchFamily="34" charset="-120"/>
+              </a:rPr>
+              <a:t>Comparison against baseline generators</a:t>
+            </a:r>
+            <a:endParaRPr lang="en-US" sz="1450" dirty="0"/>
+          </a:p>
+        </p:txBody>
+      </p:sp>
+      <p:sp>
+        <p:nvSpPr>
+          <p:cNvPr id="18" name="Shape 16"/>
+          <p:cNvSpPr/>
+          <p:nvPr/>
+        </p:nvSpPr>
+        <p:spPr>
+          <a:xfrm>
+            <a:off x="685800" y="4315968"/>
+            <a:ext cx="10820095" cy="0"/>
+          </a:xfrm>
+          <a:prstGeom prst="line">
+            <a:avLst/>
+          </a:prstGeom>
+          <a:noFill/>
+          <a:ln w="9525">
+            <a:solidFill>
+              <a:srgbClr val="D8DAD9"/>
+            </a:solidFill>
+            <a:prstDash val="solid"/>
+          </a:ln>
+        </p:spPr>
+      </p:sp>
+      <p:sp>
+        <p:nvSpPr>
+          <p:cNvPr id="19" name="Text 17"/>
+          <p:cNvSpPr txBox="1"/>
+          <p:nvPr/>
+        </p:nvSpPr>
+        <p:spPr>
+          <a:xfrm>
+            <a:off x="685800" y="4443984"/>
+            <a:ext cx="384048" cy="365760"/>
+          </a:xfrm>
+          <a:prstGeom prst="rect">
+            <a:avLst/>
+          </a:prstGeom>
+          <a:noFill/>
+          <a:ln/>
+        </p:spPr>
+        <p:txBody>
+          <a:bodyPr wrap="square" lIns="0" tIns="0" rIns="0" bIns="0" rtlCol="0" anchor="ctr"/>
+          <a:lstStyle/>
+          <a:p>
+            <a:pPr indent="0" marL="0">
+              <a:buNone/>
+            </a:pPr>
+            <a:r>
+              <a:rPr lang="en-US" sz="1400" b="1" dirty="0">
+                <a:solidFill>
+                  <a:srgbClr val="8C9094"/>
+                </a:solidFill>
+                <a:latin typeface="Calibri" pitchFamily="34" charset="0"/>
+                <a:ea typeface="Calibri" pitchFamily="34" charset="-122"/>
+                <a:cs typeface="Calibri" pitchFamily="34" charset="-120"/>
+              </a:rPr>
+              <a:t>e</a:t>
+            </a:r>
+            <a:endParaRPr lang="en-US" sz="1400" dirty="0"/>
+          </a:p>
+        </p:txBody>
+      </p:sp>
+      <p:sp>
+        <p:nvSpPr>
+          <p:cNvPr id="20" name="Text 18"/>
+          <p:cNvSpPr txBox="1"/>
+          <p:nvPr/>
+        </p:nvSpPr>
+        <p:spPr>
+          <a:xfrm>
+            <a:off x="1261872" y="4443984"/>
+            <a:ext cx="4828032" cy="365760"/>
+          </a:xfrm>
+          <a:prstGeom prst="rect">
+            <a:avLst/>
+          </a:prstGeom>
+          <a:noFill/>
+          <a:ln/>
+        </p:spPr>
+        <p:txBody>
+          <a:bodyPr wrap="square" lIns="0" tIns="0" rIns="0" bIns="0" rtlCol="0" anchor="ctr"/>
+          <a:lstStyle/>
+          <a:p>
+            <a:pPr indent="0" marL="0">
+              <a:buNone/>
+            </a:pPr>
+            <a:r>
+              <a:rPr lang="en-US" sz="1450" dirty="0">
+                <a:solidFill>
+                  <a:srgbClr val="1A1D20"/>
+                </a:solidFill>
+                <a:latin typeface="Calibri" pitchFamily="34" charset="0"/>
+                <a:ea typeface="Calibri" pitchFamily="34" charset="-122"/>
+                <a:cs typeface="Calibri" pitchFamily="34" charset="-120"/>
+              </a:rPr>
+              <a:t>Ablation: reaction grounding removed</a:t>
+            </a:r>
+            <a:endParaRPr lang="en-US" sz="1450" dirty="0"/>
+          </a:p>
+        </p:txBody>
+      </p:sp>
+      <p:sp>
+        <p:nvSpPr>
+          <p:cNvPr id="21" name="Text 19"/>
+          <p:cNvSpPr txBox="1"/>
+          <p:nvPr/>
+        </p:nvSpPr>
+        <p:spPr>
+          <a:xfrm>
+            <a:off x="6419088" y="4443984"/>
+            <a:ext cx="5074920" cy="365760"/>
+          </a:xfrm>
+          <a:prstGeom prst="rect">
+            <a:avLst/>
+          </a:prstGeom>
+          <a:noFill/>
+          <a:ln/>
+        </p:spPr>
+        <p:txBody>
+          <a:bodyPr wrap="square" lIns="0" tIns="0" rIns="0" bIns="0" rtlCol="0" anchor="ctr"/>
+          <a:lstStyle/>
+          <a:p>
+            <a:pPr indent="0" marL="0">
+              <a:buNone/>
+            </a:pPr>
+            <a:r>
+              <a:rPr lang="en-US" sz="1450" dirty="0">
+                <a:solidFill>
+                  <a:srgbClr val="1A1D20"/>
+                </a:solidFill>
+                <a:latin typeface="Calibri" pitchFamily="34" charset="0"/>
+                <a:ea typeface="Calibri" pitchFamily="34" charset="-122"/>
+                <a:cs typeface="Calibri" pitchFamily="34" charset="-120"/>
+              </a:rPr>
+              <a:t>Ablation: fragment constraint and learned prior removed</a:t>
+            </a:r>
+            <a:endParaRPr lang="en-US" sz="1450" dirty="0"/>
+          </a:p>
+        </p:txBody>
+      </p:sp>
+      <p:sp>
+        <p:nvSpPr>
+          <p:cNvPr id="22" name="Shape 20"/>
+          <p:cNvSpPr/>
+          <p:nvPr/>
+        </p:nvSpPr>
+        <p:spPr>
+          <a:xfrm>
+            <a:off x="685800" y="4919472"/>
+            <a:ext cx="10820095" cy="0"/>
+          </a:xfrm>
+          <a:prstGeom prst="line">
+            <a:avLst/>
+          </a:prstGeom>
+          <a:noFill/>
+          <a:ln w="9525">
+            <a:solidFill>
+              <a:srgbClr val="D8DAD9"/>
+            </a:solidFill>
+            <a:prstDash val="solid"/>
+          </a:ln>
+        </p:spPr>
+      </p:sp>
+      <p:sp>
+        <p:nvSpPr>
+          <p:cNvPr id="23" name="Text 21"/>
+          <p:cNvSpPr txBox="1"/>
+          <p:nvPr/>
+        </p:nvSpPr>
+        <p:spPr>
+          <a:xfrm>
+            <a:off x="685800" y="5047488"/>
+            <a:ext cx="384048" cy="365760"/>
+          </a:xfrm>
+          <a:prstGeom prst="rect">
+            <a:avLst/>
+          </a:prstGeom>
+          <a:noFill/>
+          <a:ln/>
+        </p:spPr>
+        <p:txBody>
+          <a:bodyPr wrap="square" lIns="0" tIns="0" rIns="0" bIns="0" rtlCol="0" anchor="ctr"/>
+          <a:lstStyle/>
+          <a:p>
+            <a:pPr indent="0" marL="0">
+              <a:buNone/>
+            </a:pPr>
+            <a:r>
+              <a:rPr lang="en-US" sz="1400" b="1" dirty="0">
+                <a:solidFill>
+                  <a:srgbClr val="8C9094"/>
+                </a:solidFill>
+                <a:latin typeface="Calibri" pitchFamily="34" charset="0"/>
+                <a:ea typeface="Calibri" pitchFamily="34" charset="-122"/>
+                <a:cs typeface="Calibri" pitchFamily="34" charset="-120"/>
+              </a:rPr>
+              <a:t>f</a:t>
+            </a:r>
+            <a:endParaRPr lang="en-US" sz="1400" dirty="0"/>
+          </a:p>
+        </p:txBody>
+      </p:sp>
+      <p:sp>
+        <p:nvSpPr>
+          <p:cNvPr id="24" name="Text 22"/>
+          <p:cNvSpPr txBox="1"/>
+          <p:nvPr/>
+        </p:nvSpPr>
+        <p:spPr>
+          <a:xfrm>
+            <a:off x="1261872" y="5047488"/>
+            <a:ext cx="10232136" cy="365760"/>
+          </a:xfrm>
+          <a:prstGeom prst="rect">
+            <a:avLst/>
+          </a:prstGeom>
+          <a:noFill/>
+          <a:ln/>
+        </p:spPr>
+        <p:txBody>
+          <a:bodyPr wrap="square" lIns="0" tIns="0" rIns="0" bIns="0" rtlCol="0" anchor="ctr"/>
+          <a:lstStyle/>
+          <a:p>
+            <a:pPr indent="0" marL="0">
+              <a:buNone/>
+            </a:pPr>
+            <a:r>
+              <a:rPr lang="en-US" sz="1450" dirty="0">
+                <a:solidFill>
+                  <a:srgbClr val="1A1D20"/>
+                </a:solidFill>
+                <a:latin typeface="Calibri" pitchFamily="34" charset="0"/>
+                <a:ea typeface="Calibri" pitchFamily="34" charset="-122"/>
+                <a:cs typeface="Calibri" pitchFamily="34" charset="-120"/>
+              </a:rPr>
+              <a:t>Selection funnel: generated → filtered → carried to synthesis</a:t>
+            </a:r>
+            <a:endParaRPr lang="en-US" sz="1450" dirty="0"/>
+          </a:p>
+        </p:txBody>
+      </p:sp>
+      <p:sp>
+        <p:nvSpPr>
+          <p:cNvPr id="25" name="Shape 23"/>
+          <p:cNvSpPr/>
+          <p:nvPr/>
+        </p:nvSpPr>
+        <p:spPr>
+          <a:xfrm>
+            <a:off x="685800" y="5522976"/>
+            <a:ext cx="10820095" cy="0"/>
+          </a:xfrm>
+          <a:prstGeom prst="line">
+            <a:avLst/>
+          </a:prstGeom>
+          <a:noFill/>
+          <a:ln w="9525">
+            <a:solidFill>
+              <a:srgbClr val="D8DAD9"/>
+            </a:solidFill>
+            <a:prstDash val="solid"/>
+          </a:ln>
+        </p:spPr>
+      </p:sp>
+      <p:sp>
+        <p:nvSpPr>
+          <p:cNvPr id="26" name="Text 24"/>
+          <p:cNvSpPr txBox="1"/>
+          <p:nvPr/>
+        </p:nvSpPr>
+        <p:spPr>
+          <a:xfrm>
+            <a:off x="685800" y="5815584"/>
+            <a:ext cx="10607040" cy="512064"/>
+          </a:xfrm>
+          <a:prstGeom prst="rect">
+            <a:avLst/>
+          </a:prstGeom>
+          <a:noFill/>
+          <a:ln/>
+        </p:spPr>
+        <p:txBody>
+          <a:bodyPr wrap="square" lIns="0" tIns="0" rIns="0" bIns="0" rtlCol="0" anchor="t"/>
+          <a:lstStyle/>
+          <a:p>
+            <a:pPr indent="0" marL="0">
+              <a:lnSpc>
+                <a:spcPct val="115000"/>
+              </a:lnSpc>
+              <a:buNone/>
+            </a:pPr>
+            <a:r>
+              <a:rPr lang="en-US" sz="1250" dirty="0">
+                <a:solidFill>
+                  <a:srgbClr val="8C9094"/>
+                </a:solidFill>
+                <a:latin typeface="Calibri" pitchFamily="34" charset="0"/>
+                <a:ea typeface="Calibri" pitchFamily="34" charset="-122"/>
+                <a:cs typeface="Calibri" pitchFamily="34" charset="-120"/>
+              </a:rPr>
+              <a:t>A row that spans both columns is the same panel in both programmes. The ablations separate a working generator from a merely valid one; the funnel is what licenses the wet-lab spend.</a:t>
             </a:r>
             <a:endParaRPr lang="en-US" sz="1250" dirty="0"/>
           </a:p>
